--- a/curso/pptx/S23.pptx
+++ b/curso/pptx/S23.pptx
@@ -3892,8 +3892,8 @@
         </p:nvSpPr>
         <p:spPr>
           <a:xfrm>
-            <a:off x="640000" y="420000"/>
-            <a:ext cx="10912000" cy="420000"/>
+            <a:off x="10652000" y="380000"/>
+            <a:ext cx="900000" cy="800000"/>
           </a:xfrm>
           <a:prstGeom prst="rect">
             <a:avLst/>
@@ -3908,17 +3908,17 @@
           <a:p>
             <a:pPr>
               <a:spcAft>
-                <a:spcPts val="810"/>
-              </a:spcAft>
-            </a:pPr>
-            <a:r>
-              <a:rPr sz="1800" b="1">
+                <a:spcPts val="1980"/>
+              </a:spcAft>
+            </a:pPr>
+            <a:r>
+              <a:rPr sz="4400" b="0">
                 <a:solidFill>
                   <a:srgbClr val="1F2A44"/>
                 </a:solidFill>
                 <a:latin typeface="Nunito Sans"/>
               </a:rPr>
-              <a:t>🦉 Aula de Filosofía</a:t>
+              <a:t>🙃</a:t>
             </a:r>
           </a:p>
         </p:txBody>

--- a/curso/pptx/S23.pptx
+++ b/curso/pptx/S23.pptx
@@ -473,426 +473,6 @@
     </a:lvl9pPr>
   </p:notesStyle>
 </p:notesMaster>
-</file>
-
-<file path=ppt/notesSlides/notesSlide1.xml><?xml version="1.0" encoding="utf-8"?>
-<p:notes xmlns:a="http://schemas.openxmlformats.org/drawingml/2006/main" xmlns:p="http://schemas.openxmlformats.org/presentationml/2006/main" xmlns:r="http://schemas.openxmlformats.org/officeDocument/2006/relationships">
-  <p:cSld>
-    <p:spTree>
-      <p:nvGrpSpPr>
-        <p:cNvPr id="1" name=""/>
-        <p:cNvGrpSpPr/>
-        <p:nvPr/>
-      </p:nvGrpSpPr>
-      <p:grpSpPr>
-        <a:xfrm>
-          <a:off x="0" y="0"/>
-          <a:ext cx="0" cy="0"/>
-          <a:chOff x="0" y="0"/>
-          <a:chExt cx="0" cy="0"/>
-        </a:xfrm>
-      </p:grpSpPr>
-      <p:sp>
-        <p:nvSpPr>
-          <p:cNvPr id="2" name="Slide Image Placeholder 1"/>
-          <p:cNvSpPr>
-            <a:spLocks noGrp="1"/>
-          </p:cNvSpPr>
-          <p:nvPr>
-            <p:ph type="sldImg" idx="2"/>
-          </p:nvPr>
-        </p:nvSpPr>
-        <p:spPr/>
-      </p:sp>
-      <p:sp>
-        <p:nvSpPr>
-          <p:cNvPr id="3" name="Notes Placeholder 2"/>
-          <p:cNvSpPr>
-            <a:spLocks noGrp="1"/>
-          </p:cNvSpPr>
-          <p:nvPr>
-            <p:ph type="body" idx="3" sz="quarter"/>
-          </p:nvPr>
-        </p:nvSpPr>
-        <p:spPr/>
-        <p:txBody>
-          <a:bodyPr/>
-          <a:lstStyle/>
-          <a:p>
-            <a:r>
-              <a:t>3 minutos. Sin apuntes. Es para recordar, no cuenta para nota.</a:t>
-            </a:r>
-          </a:p>
-        </p:txBody>
-      </p:sp>
-      <p:sp>
-        <p:nvSpPr>
-          <p:cNvPr id="4" name="Slide Number Placeholder 3"/>
-          <p:cNvSpPr>
-            <a:spLocks noGrp="1"/>
-          </p:cNvSpPr>
-          <p:nvPr>
-            <p:ph type="sldNum" idx="5" sz="quarter"/>
-          </p:nvPr>
-        </p:nvSpPr>
-        <p:spPr/>
-      </p:sp>
-    </p:spTree>
-  </p:cSld>
-  <p:clrMapOvr>
-    <a:masterClrMapping/>
-  </p:clrMapOvr>
-</p:notes>
-</file>
-
-<file path=ppt/notesSlides/notesSlide2.xml><?xml version="1.0" encoding="utf-8"?>
-<p:notes xmlns:a="http://schemas.openxmlformats.org/drawingml/2006/main" xmlns:p="http://schemas.openxmlformats.org/presentationml/2006/main" xmlns:r="http://schemas.openxmlformats.org/officeDocument/2006/relationships">
-  <p:cSld>
-    <p:spTree>
-      <p:nvGrpSpPr>
-        <p:cNvPr id="1" name=""/>
-        <p:cNvGrpSpPr/>
-        <p:nvPr/>
-      </p:nvGrpSpPr>
-      <p:grpSpPr>
-        <a:xfrm>
-          <a:off x="0" y="0"/>
-          <a:ext cx="0" cy="0"/>
-          <a:chOff x="0" y="0"/>
-          <a:chExt cx="0" cy="0"/>
-        </a:xfrm>
-      </p:grpSpPr>
-      <p:sp>
-        <p:nvSpPr>
-          <p:cNvPr id="2" name="Slide Image Placeholder 1"/>
-          <p:cNvSpPr>
-            <a:spLocks noGrp="1"/>
-          </p:cNvSpPr>
-          <p:nvPr>
-            <p:ph type="sldImg" idx="2"/>
-          </p:nvPr>
-        </p:nvSpPr>
-        <p:spPr/>
-      </p:sp>
-      <p:sp>
-        <p:nvSpPr>
-          <p:cNvPr id="3" name="Notes Placeholder 2"/>
-          <p:cNvSpPr>
-            <a:spLocks noGrp="1"/>
-          </p:cNvSpPr>
-          <p:nvPr>
-            <p:ph type="body" idx="3" sz="quarter"/>
-          </p:nvPr>
-        </p:nvSpPr>
-        <p:spPr/>
-        <p:txBody>
-          <a:bodyPr/>
-          <a:lstStyle/>
-          <a:p>
-            <a:r>
-              <a:t>3 minutos. Sin apuntes. Es para recordar, no cuenta para nota.</a:t>
-            </a:r>
-          </a:p>
-        </p:txBody>
-      </p:sp>
-      <p:sp>
-        <p:nvSpPr>
-          <p:cNvPr id="4" name="Slide Number Placeholder 3"/>
-          <p:cNvSpPr>
-            <a:spLocks noGrp="1"/>
-          </p:cNvSpPr>
-          <p:nvPr>
-            <p:ph type="sldNum" idx="5" sz="quarter"/>
-          </p:nvPr>
-        </p:nvSpPr>
-        <p:spPr/>
-      </p:sp>
-    </p:spTree>
-  </p:cSld>
-  <p:clrMapOvr>
-    <a:masterClrMapping/>
-  </p:clrMapOvr>
-</p:notes>
-</file>
-
-<file path=ppt/notesSlides/notesSlide3.xml><?xml version="1.0" encoding="utf-8"?>
-<p:notes xmlns:a="http://schemas.openxmlformats.org/drawingml/2006/main" xmlns:p="http://schemas.openxmlformats.org/presentationml/2006/main" xmlns:r="http://schemas.openxmlformats.org/officeDocument/2006/relationships">
-  <p:cSld>
-    <p:spTree>
-      <p:nvGrpSpPr>
-        <p:cNvPr id="1" name=""/>
-        <p:cNvGrpSpPr/>
-        <p:nvPr/>
-      </p:nvGrpSpPr>
-      <p:grpSpPr>
-        <a:xfrm>
-          <a:off x="0" y="0"/>
-          <a:ext cx="0" cy="0"/>
-          <a:chOff x="0" y="0"/>
-          <a:chExt cx="0" cy="0"/>
-        </a:xfrm>
-      </p:grpSpPr>
-      <p:sp>
-        <p:nvSpPr>
-          <p:cNvPr id="2" name="Slide Image Placeholder 1"/>
-          <p:cNvSpPr>
-            <a:spLocks noGrp="1"/>
-          </p:cNvSpPr>
-          <p:nvPr>
-            <p:ph type="sldImg" idx="2"/>
-          </p:nvPr>
-        </p:nvSpPr>
-        <p:spPr/>
-      </p:sp>
-      <p:sp>
-        <p:nvSpPr>
-          <p:cNvPr id="3" name="Notes Placeholder 2"/>
-          <p:cNvSpPr>
-            <a:spLocks noGrp="1"/>
-          </p:cNvSpPr>
-          <p:nvPr>
-            <p:ph type="body" idx="3" sz="quarter"/>
-          </p:nvPr>
-        </p:nvSpPr>
-        <p:spPr/>
-        <p:txBody>
-          <a:bodyPr/>
-          <a:lstStyle/>
-          <a:p>
-            <a:r>
-              <a:t>Nadie tiene que contestar: solo pensarlo.</a:t>
-            </a:r>
-          </a:p>
-        </p:txBody>
-      </p:sp>
-      <p:sp>
-        <p:nvSpPr>
-          <p:cNvPr id="4" name="Slide Number Placeholder 3"/>
-          <p:cNvSpPr>
-            <a:spLocks noGrp="1"/>
-          </p:cNvSpPr>
-          <p:nvPr>
-            <p:ph type="sldNum" idx="5" sz="quarter"/>
-          </p:nvPr>
-        </p:nvSpPr>
-        <p:spPr/>
-      </p:sp>
-    </p:spTree>
-  </p:cSld>
-  <p:clrMapOvr>
-    <a:masterClrMapping/>
-  </p:clrMapOvr>
-</p:notes>
-</file>
-
-<file path=ppt/notesSlides/notesSlide4.xml><?xml version="1.0" encoding="utf-8"?>
-<p:notes xmlns:a="http://schemas.openxmlformats.org/drawingml/2006/main" xmlns:p="http://schemas.openxmlformats.org/presentationml/2006/main" xmlns:r="http://schemas.openxmlformats.org/officeDocument/2006/relationships">
-  <p:cSld>
-    <p:spTree>
-      <p:nvGrpSpPr>
-        <p:cNvPr id="1" name=""/>
-        <p:cNvGrpSpPr/>
-        <p:nvPr/>
-      </p:nvGrpSpPr>
-      <p:grpSpPr>
-        <a:xfrm>
-          <a:off x="0" y="0"/>
-          <a:ext cx="0" cy="0"/>
-          <a:chOff x="0" y="0"/>
-          <a:chExt cx="0" cy="0"/>
-        </a:xfrm>
-      </p:grpSpPr>
-      <p:sp>
-        <p:nvSpPr>
-          <p:cNvPr id="2" name="Slide Image Placeholder 1"/>
-          <p:cNvSpPr>
-            <a:spLocks noGrp="1"/>
-          </p:cNvSpPr>
-          <p:nvPr>
-            <p:ph type="sldImg" idx="2"/>
-          </p:nvPr>
-        </p:nvSpPr>
-        <p:spPr/>
-      </p:sp>
-      <p:sp>
-        <p:nvSpPr>
-          <p:cNvPr id="3" name="Notes Placeholder 2"/>
-          <p:cNvSpPr>
-            <a:spLocks noGrp="1"/>
-          </p:cNvSpPr>
-          <p:nvPr>
-            <p:ph type="body" idx="3" sz="quarter"/>
-          </p:nvPr>
-        </p:nvSpPr>
-        <p:spPr/>
-        <p:txBody>
-          <a:bodyPr/>
-          <a:lstStyle/>
-          <a:p>
-            <a:r>
-              <a:t>Dejar unos segundos para que piensen la respuesta fácil antes de enseñar los pasos.</a:t>
-            </a:r>
-          </a:p>
-        </p:txBody>
-      </p:sp>
-      <p:sp>
-        <p:nvSpPr>
-          <p:cNvPr id="4" name="Slide Number Placeholder 3"/>
-          <p:cNvSpPr>
-            <a:spLocks noGrp="1"/>
-          </p:cNvSpPr>
-          <p:nvPr>
-            <p:ph type="sldNum" idx="5" sz="quarter"/>
-          </p:nvPr>
-        </p:nvSpPr>
-        <p:spPr/>
-      </p:sp>
-    </p:spTree>
-  </p:cSld>
-  <p:clrMapOvr>
-    <a:masterClrMapping/>
-  </p:clrMapOvr>
-</p:notes>
-</file>
-
-<file path=ppt/notesSlides/notesSlide5.xml><?xml version="1.0" encoding="utf-8"?>
-<p:notes xmlns:a="http://schemas.openxmlformats.org/drawingml/2006/main" xmlns:p="http://schemas.openxmlformats.org/presentationml/2006/main" xmlns:r="http://schemas.openxmlformats.org/officeDocument/2006/relationships">
-  <p:cSld>
-    <p:spTree>
-      <p:nvGrpSpPr>
-        <p:cNvPr id="1" name=""/>
-        <p:cNvGrpSpPr/>
-        <p:nvPr/>
-      </p:nvGrpSpPr>
-      <p:grpSpPr>
-        <a:xfrm>
-          <a:off x="0" y="0"/>
-          <a:ext cx="0" cy="0"/>
-          <a:chOff x="0" y="0"/>
-          <a:chExt cx="0" cy="0"/>
-        </a:xfrm>
-      </p:grpSpPr>
-      <p:sp>
-        <p:nvSpPr>
-          <p:cNvPr id="2" name="Slide Image Placeholder 1"/>
-          <p:cNvSpPr>
-            <a:spLocks noGrp="1"/>
-          </p:cNvSpPr>
-          <p:nvPr>
-            <p:ph type="sldImg" idx="2"/>
-          </p:nvPr>
-        </p:nvSpPr>
-        <p:spPr/>
-      </p:sp>
-      <p:sp>
-        <p:nvSpPr>
-          <p:cNvPr id="3" name="Notes Placeholder 2"/>
-          <p:cNvSpPr>
-            <a:spLocks noGrp="1"/>
-          </p:cNvSpPr>
-          <p:nvPr>
-            <p:ph type="body" idx="3" sz="quarter"/>
-          </p:nvPr>
-        </p:nvSpPr>
-        <p:spPr/>
-        <p:txBody>
-          <a:bodyPr/>
-          <a:lstStyle/>
-          <a:p>
-            <a:r>
-              <a:t>Dejar 2 minutos para que lo escriban. La diapositiva siguiente muestra el resumen.</a:t>
-            </a:r>
-          </a:p>
-        </p:txBody>
-      </p:sp>
-      <p:sp>
-        <p:nvSpPr>
-          <p:cNvPr id="4" name="Slide Number Placeholder 3"/>
-          <p:cNvSpPr>
-            <a:spLocks noGrp="1"/>
-          </p:cNvSpPr>
-          <p:nvPr>
-            <p:ph type="sldNum" idx="5" sz="quarter"/>
-          </p:nvPr>
-        </p:nvSpPr>
-        <p:spPr/>
-      </p:sp>
-    </p:spTree>
-  </p:cSld>
-  <p:clrMapOvr>
-    <a:masterClrMapping/>
-  </p:clrMapOvr>
-</p:notes>
-</file>
-
-<file path=ppt/notesSlides/notesSlide6.xml><?xml version="1.0" encoding="utf-8"?>
-<p:notes xmlns:a="http://schemas.openxmlformats.org/drawingml/2006/main" xmlns:p="http://schemas.openxmlformats.org/presentationml/2006/main" xmlns:r="http://schemas.openxmlformats.org/officeDocument/2006/relationships">
-  <p:cSld>
-    <p:spTree>
-      <p:nvGrpSpPr>
-        <p:cNvPr id="1" name=""/>
-        <p:cNvGrpSpPr/>
-        <p:nvPr/>
-      </p:nvGrpSpPr>
-      <p:grpSpPr>
-        <a:xfrm>
-          <a:off x="0" y="0"/>
-          <a:ext cx="0" cy="0"/>
-          <a:chOff x="0" y="0"/>
-          <a:chExt cx="0" cy="0"/>
-        </a:xfrm>
-      </p:grpSpPr>
-      <p:sp>
-        <p:nvSpPr>
-          <p:cNvPr id="2" name="Slide Image Placeholder 1"/>
-          <p:cNvSpPr>
-            <a:spLocks noGrp="1"/>
-          </p:cNvSpPr>
-          <p:nvPr>
-            <p:ph type="sldImg" idx="2"/>
-          </p:nvPr>
-        </p:nvSpPr>
-        <p:spPr/>
-      </p:sp>
-      <p:sp>
-        <p:nvSpPr>
-          <p:cNvPr id="3" name="Notes Placeholder 2"/>
-          <p:cNvSpPr>
-            <a:spLocks noGrp="1"/>
-          </p:cNvSpPr>
-          <p:nvPr>
-            <p:ph type="body" idx="3" sz="quarter"/>
-          </p:nvPr>
-        </p:nvSpPr>
-        <p:spPr/>
-        <p:txBody>
-          <a:bodyPr/>
-          <a:lstStyle/>
-          <a:p>
-            <a:r>
-              <a:t>Buscar: «falacia ad ignorantiam» · «razonamiento circular falacia ejemplos» · «tetera de Russell explicada»</a:t>
-            </a:r>
-          </a:p>
-        </p:txBody>
-      </p:sp>
-      <p:sp>
-        <p:nvSpPr>
-          <p:cNvPr id="4" name="Slide Number Placeholder 3"/>
-          <p:cNvSpPr>
-            <a:spLocks noGrp="1"/>
-          </p:cNvSpPr>
-          <p:nvPr>
-            <p:ph type="sldNum" idx="5" sz="quarter"/>
-          </p:nvPr>
-        </p:nvSpPr>
-        <p:spPr/>
-      </p:sp>
-    </p:spTree>
-  </p:cSld>
-  <p:clrMapOvr>
-    <a:masterClrMapping/>
-  </p:clrMapOvr>
-</p:notes>
 </file>
 
 <file path=ppt/slideLayouts/slideLayout1.xml><?xml version="1.0" encoding="utf-8"?>

--- a/curso/pptx/S23.pptx
+++ b/curso/pptx/S23.pptx
@@ -4110,7 +4110,7 @@
                 </a:solidFill>
                 <a:latin typeface="Nunito Sans"/>
               </a:rPr>
-              <a:t>Dylan: «Seguro que Kevin copió en el examen. Nadie puede demostrar que no copiara».</a:t>
+              <a:t>Un chico: «Seguro que un compañero copió en el examen. Nadie puede demostrar que no copiara».</a:t>
             </a:r>
           </a:p>
         </p:txBody>
@@ -4158,7 +4158,7 @@
                 </a:solidFill>
                 <a:latin typeface="Nunito Sans"/>
               </a:rPr>
-              <a:t>¿Qué razón da Dylan? Que nadie puede demostrar lo contrario.</a:t>
+              <a:t>¿Qué razón da ese chico? Que nadie puede demostrar lo contrario.</a:t>
             </a:r>
           </a:p>
           <a:p>
@@ -4419,7 +4419,7 @@
                 </a:solidFill>
                 <a:latin typeface="Nunito Sans"/>
               </a:rPr>
-              <a:t>Yasmin: «Esta app de noticias dice la verdad». Leire: «¿Cómo lo sabes?». Yasmin: «Porque en la propia app pone que todas sus noticias son verdad».</a:t>
+              <a:t>Una chica: «Esta app de noticias dice la verdad». Un chico: «¿Cómo lo sabes?». La chica: «Porque en la propia app pone que todas sus noticias son verdad».</a:t>
             </a:r>
           </a:p>
         </p:txBody>
@@ -4728,7 +4728,7 @@
                 </a:solidFill>
                 <a:latin typeface="Nunito Sans"/>
               </a:rPr>
-              <a:t>La jefa de estudios: «No hay pruebas de que Kevin copiara en el examen. Así que no se le castiga».</a:t>
+              <a:t>La jefa de estudios: «No hay pruebas de que un alumno copiara en el examen. Así que no se le castiga».</a:t>
             </a:r>
           </a:p>
         </p:txBody>
@@ -6526,7 +6526,7 @@
                 </a:solidFill>
                 <a:latin typeface="Nunito Sans"/>
               </a:rPr>
-              <a:t>Pregunta que desmonta la causa falsa: ¿podría ser ______ o haber otra causa?  (sesión 22)</a:t>
+              <a:t>Explicaciones que olvida la causa falsa: la casualidad, una ______ causa o que sea al revés.  (sesión 22)</a:t>
             </a:r>
           </a:p>
           <a:p>
@@ -6551,7 +6551,7 @@
                 </a:solidFill>
                 <a:latin typeface="Nunito Sans"/>
               </a:rPr>
-              <a:t>La causa falsa olvida que «después de» no es «por ______ de».  (sesión 22)</a:t>
+              <a:t>La causa falsa cree que una cosa ______ otra solo porque pasó antes o van juntas.  (sesión 22)</a:t>
             </a:r>
           </a:p>
           <a:p>
@@ -6728,7 +6728,7 @@
                 </a:solidFill>
                 <a:latin typeface="Nunito Sans"/>
               </a:rPr>
-              <a:t>Pregunta que desmonta la causa falsa: ¿podría ser </a:t>
+              <a:t>Explicaciones que olvida la causa falsa: la casualidad, una </a:t>
             </a:r>
             <a:r>
               <a:rPr sz="2600" b="1">
@@ -6737,7 +6737,7 @@
                 </a:solidFill>
                 <a:latin typeface="Nunito Sans"/>
               </a:rPr>
-              <a:t>casualidad</a:t>
+              <a:t>tercera</a:t>
             </a:r>
             <a:r>
               <a:rPr sz="2600" b="0">
@@ -6746,7 +6746,7 @@
                 </a:solidFill>
                 <a:latin typeface="Nunito Sans"/>
               </a:rPr>
-              <a:t> o haber otra causa?  (sesión 22)</a:t>
+              <a:t> causa o que sea al revés.  (sesión 22)</a:t>
             </a:r>
           </a:p>
           <a:p>
@@ -6771,7 +6771,7 @@
                 </a:solidFill>
                 <a:latin typeface="Nunito Sans"/>
               </a:rPr>
-              <a:t>La causa falsa olvida que «después de» no es «por </a:t>
+              <a:t>La causa falsa cree que una cosa </a:t>
             </a:r>
             <a:r>
               <a:rPr sz="2600" b="1">
@@ -6780,7 +6780,7 @@
                 </a:solidFill>
                 <a:latin typeface="Nunito Sans"/>
               </a:rPr>
-              <a:t>culpa</a:t>
+              <a:t>causa</a:t>
             </a:r>
             <a:r>
               <a:rPr sz="2600" b="0">
@@ -6789,7 +6789,7 @@
                 </a:solidFill>
                 <a:latin typeface="Nunito Sans"/>
               </a:rPr>
-              <a:t> de».  (sesión 22)</a:t>
+              <a:t> otra solo porque pasó antes o van juntas.  (sesión 22)</a:t>
             </a:r>
           </a:p>
           <a:p>

--- a/curso/pptx/S23.pptx
+++ b/curso/pptx/S23.pptx
@@ -23,7 +23,6 @@
     <p:sldId id="271" r:id="rId23"/>
     <p:sldId id="272" r:id="rId24"/>
     <p:sldId id="273" r:id="rId25"/>
-    <p:sldId id="274" r:id="rId26"/>
   </p:sldIdLst>
   <p:sldSz cx="12192000" cy="6858000" type="screen4x3"/>
   <p:notesSz cx="6858000" cy="9144000"/>
@@ -3537,7 +3536,7 @@
                 </a:solidFill>
                 <a:latin typeface="Nunito Sans"/>
               </a:rPr>
-              <a:t>PENSAMIENTO CRÍTICO · SESIÓN 23 · UNIDAD 4 · FALACIAS II: RAZONAR MAL</a:t>
+              <a:t>PENSAMIENTO CRÍTICO · SESIÓN 23 · UNIDAD 4 · FALACIAS I: ATACAR, DESVIAR, EMOCIONAR</a:t>
             </a:r>
           </a:p>
         </p:txBody>
@@ -3576,7 +3575,7 @@
                 </a:solidFill>
                 <a:latin typeface="Fredoka"/>
               </a:rPr>
-              <a:t>Ignorancia y razonamiento circular</a:t>
+              <a:t>La pista falsa</a:t>
             </a:r>
           </a:p>
         </p:txBody>
@@ -3615,7 +3614,7 @@
                 </a:solidFill>
                 <a:latin typeface="Nunito Sans"/>
               </a:rPr>
-              <a:t>No saber que algo es falso no lo hace verdadero, y una conclusión escondida en la premisa no demuestra nada.</a:t>
+              <a:t>La pista falsa cambia de tema para no responder, y la discusión acaba lejos de la pregunta.</a:t>
             </a:r>
           </a:p>
         </p:txBody>
@@ -3719,7 +3718,7 @@
                 </a:solidFill>
                 <a:latin typeface="Fredoka"/>
               </a:rPr>
-              <a:t>Caso 1 · Los fantasmas</a:t>
+              <a:t>Caso 2 · En el grupo del equipo</a:t>
             </a:r>
           </a:p>
         </p:txBody>
@@ -3801,7 +3800,7 @@
                 </a:solidFill>
                 <a:latin typeface="Nunito Sans"/>
               </a:rPr>
-              <a:t>«Los fantasmas existen: nadie ha demostrado nunca que no existan.»</a:t>
+              <a:t>Una chica: «Oye, ¿por qué no viniste al entrenamiento?». Un chico: «¿Y qué me dices de otro compañero, que lleva un mes sin venir?».</a:t>
             </a:r>
           </a:p>
         </p:txBody>
@@ -3849,7 +3848,7 @@
                 </a:solidFill>
                 <a:latin typeface="Nunito Sans"/>
               </a:rPr>
-              <a:t>¿Cuál es la conclusión? Los fantasmas existen.</a:t>
+              <a:t>¿Qué se discute? Por qué el chico no fue al entrenamiento.</a:t>
             </a:r>
           </a:p>
           <a:p>
@@ -3874,7 +3873,7 @@
                 </a:solidFill>
                 <a:latin typeface="Nunito Sans"/>
               </a:rPr>
-              <a:t>¿Qué razón da? Nadie ha demostrado que no existan.</a:t>
+              <a:t>¿Qué hace el chico? Habla de las faltas de otro compañero.</a:t>
             </a:r>
           </a:p>
           <a:p>
@@ -3899,7 +3898,7 @@
                 </a:solidFill>
                 <a:latin typeface="Nunito Sans"/>
               </a:rPr>
-              <a:t>¿Es una prueba a favor? No: solo dice que no sabemos. Así se podría «demostrar» cualquier cosa.</a:t>
+              <a:t>¿Eso responde? No: aunque ese otro compañero lo haga peor, la pregunta era sobre él.</a:t>
             </a:r>
           </a:p>
           <a:p>
@@ -3924,7 +3923,7 @@
                 </a:solidFill>
                 <a:latin typeface="Nunito Sans"/>
               </a:rPr>
-              <a:t>Conclusión: apelación a la ignorancia. Quien dice que existen tiene que dar pruebas.</a:t>
+              <a:t>Conclusión: pista falsa. Hay que volver a la pregunta: ¿por qué no viniste?</a:t>
             </a:r>
           </a:p>
         </p:txBody>
@@ -4028,7 +4027,7 @@
                 </a:solidFill>
                 <a:latin typeface="Fredoka"/>
               </a:rPr>
-              <a:t>Caso 2 · Una acusación</a:t>
+              <a:t>Caso 3 · Cambiar de tema sin trampa</a:t>
             </a:r>
           </a:p>
         </p:txBody>
@@ -4110,7 +4109,7 @@
                 </a:solidFill>
                 <a:latin typeface="Nunito Sans"/>
               </a:rPr>
-              <a:t>Un chico: «Seguro que un compañero copió en el examen. Nadie puede demostrar que no copiara».</a:t>
+              <a:t>Una chica y un chico discuten qué serie ver. El chico: «Espera, eso luego. ¿Ves que sale humo de la cocina?».</a:t>
             </a:r>
           </a:p>
         </p:txBody>
@@ -4158,7 +4157,7 @@
                 </a:solidFill>
                 <a:latin typeface="Nunito Sans"/>
               </a:rPr>
-              <a:t>¿Qué razón da ese chico? Que nadie puede demostrar lo contrario.</a:t>
+              <a:t>¿Cambia de tema? Sí.</a:t>
             </a:r>
           </a:p>
           <a:p>
@@ -4183,7 +4182,7 @@
                 </a:solidFill>
                 <a:latin typeface="Nunito Sans"/>
               </a:rPr>
-              <a:t>¿Qué pruebas hay de que copió? Ninguna.</a:t>
+              <a:t>¿Es para no responder? No: hay algo urgente y lo dice claro.</a:t>
             </a:r>
           </a:p>
           <a:p>
@@ -4208,7 +4207,7 @@
                 </a:solidFill>
                 <a:latin typeface="Nunito Sans"/>
               </a:rPr>
-              <a:t>Así se puede acusar a cualquiera de cualquier cosa.</a:t>
+              <a:t>Después pueden volver a la serie.</a:t>
             </a:r>
           </a:p>
           <a:p>
@@ -4233,7 +4232,7 @@
                 </a:solidFill>
                 <a:latin typeface="Nunito Sans"/>
               </a:rPr>
-              <a:t>Conclusión: apelación a la ignorancia. Acusar sin pruebas, además, es injusto.</a:t>
+              <a:t>Conclusión: no es pista falsa. Cambiar de tema es legítimo si no sirve para esquivar.</a:t>
             </a:r>
           </a:p>
         </p:txBody>
@@ -4247,6 +4246,110 @@
 </file>
 
 <file path=ppt/slides/slide12.xml><?xml version="1.0" encoding="utf-8"?>
+<p:sld xmlns:a="http://schemas.openxmlformats.org/drawingml/2006/main" xmlns:p="http://schemas.openxmlformats.org/presentationml/2006/main" xmlns:r="http://schemas.openxmlformats.org/officeDocument/2006/relationships">
+  <p:cSld>
+    <p:bg>
+      <p:bgPr>
+        <a:solidFill>
+          <a:srgbClr val="1F2A44"/>
+        </a:solidFill>
+        <a:effectLst/>
+      </p:bgPr>
+    </p:bg>
+    <p:spTree>
+      <p:nvGrpSpPr>
+        <p:cNvPr id="1" name=""/>
+        <p:cNvGrpSpPr/>
+        <p:nvPr/>
+      </p:nvGrpSpPr>
+      <p:grpSpPr/>
+      <p:sp>
+        <p:nvSpPr>
+          <p:cNvPr id="2" name="TextBox 1"/>
+          <p:cNvSpPr txBox="1"/>
+          <p:nvPr/>
+        </p:nvSpPr>
+        <p:spPr>
+          <a:xfrm>
+            <a:off x="640000" y="2300000"/>
+            <a:ext cx="10912000" cy="500000"/>
+          </a:xfrm>
+          <a:prstGeom prst="rect">
+            <a:avLst/>
+          </a:prstGeom>
+          <a:noFill/>
+        </p:spPr>
+        <p:txBody>
+          <a:bodyPr wrap="square">
+            <a:spAutoFit/>
+          </a:bodyPr>
+          <a:lstStyle/>
+          <a:p>
+            <a:pPr>
+              <a:spcAft>
+                <a:spcPts val="810"/>
+              </a:spcAft>
+            </a:pPr>
+            <a:r>
+              <a:rPr sz="1800" b="1">
+                <a:solidFill>
+                  <a:srgbClr val="F4B183"/>
+                </a:solidFill>
+                <a:latin typeface="Nunito Sans"/>
+              </a:rPr>
+              <a:t>BLOQUE 3</a:t>
+            </a:r>
+          </a:p>
+        </p:txBody>
+      </p:sp>
+      <p:sp>
+        <p:nvSpPr>
+          <p:cNvPr id="3" name="TextBox 2"/>
+          <p:cNvSpPr txBox="1"/>
+          <p:nvPr/>
+        </p:nvSpPr>
+        <p:spPr>
+          <a:xfrm>
+            <a:off x="640000" y="2800000"/>
+            <a:ext cx="10912000" cy="800000"/>
+          </a:xfrm>
+          <a:prstGeom prst="rect">
+            <a:avLst/>
+          </a:prstGeom>
+          <a:noFill/>
+        </p:spPr>
+        <p:txBody>
+          <a:bodyPr wrap="square">
+            <a:spAutoFit/>
+          </a:bodyPr>
+          <a:lstStyle/>
+          <a:p>
+            <a:pPr>
+              <a:spcAft>
+                <a:spcPts val="2160"/>
+              </a:spcAft>
+            </a:pPr>
+            <a:r>
+              <a:rPr sz="4800" b="1">
+                <a:solidFill>
+                  <a:srgbClr val="FBF7EF"/>
+                </a:solidFill>
+                <a:latin typeface="Fredoka"/>
+              </a:rPr>
+              <a:t>Tres formas de no responder</a:t>
+            </a:r>
+          </a:p>
+        </p:txBody>
+      </p:sp>
+    </p:spTree>
+  </p:cSld>
+  <p:clrMapOvr>
+    <a:masterClrMapping/>
+  </p:clrMapOvr>
+</p:sld>
+</file>
+
+<file path=ppt/slides/slide13.xml><?xml version="1.0" encoding="utf-8"?>
 <p:sld xmlns:a="http://schemas.openxmlformats.org/drawingml/2006/main" xmlns:p="http://schemas.openxmlformats.org/presentationml/2006/main" xmlns:r="http://schemas.openxmlformats.org/officeDocument/2006/relationships">
   <p:cSld>
     <p:bg>
@@ -4298,7 +4401,7 @@
                 </a:solidFill>
                 <a:latin typeface="Nunito Sans"/>
               </a:rPr>
-              <a:t>BLOQUE 2 · CASOS RESUELTOS</a:t>
+              <a:t>BLOQUE 3 · TRES FORMAS DE NO RESPONDER</a:t>
             </a:r>
           </a:p>
         </p:txBody>
@@ -4337,3595 +4440,7 @@
                 </a:solidFill>
                 <a:latin typeface="Fredoka"/>
               </a:rPr>
-              <a:t>Caso 3 · La app que no miente</a:t>
-            </a:r>
-          </a:p>
-        </p:txBody>
-      </p:sp>
-      <p:sp>
-        <p:nvSpPr>
-          <p:cNvPr id="4" name="Rectangle 3"/>
-          <p:cNvSpPr/>
-          <p:nvPr/>
-        </p:nvSpPr>
-        <p:spPr>
-          <a:xfrm>
-            <a:off x="640000" y="1600000"/>
-            <a:ext cx="10912000" cy="1100000"/>
-          </a:xfrm>
-          <a:prstGeom prst="rect">
-            <a:avLst/>
-          </a:prstGeom>
-          <a:solidFill>
-            <a:srgbClr val="FFFFFF"/>
-          </a:solidFill>
-          <a:ln>
-            <a:noFill/>
-          </a:ln>
-        </p:spPr>
-        <p:style>
-          <a:lnRef idx="1">
-            <a:schemeClr val="accent1"/>
-          </a:lnRef>
-          <a:fillRef idx="3">
-            <a:schemeClr val="accent1"/>
-          </a:fillRef>
-          <a:effectRef idx="2">
-            <a:schemeClr val="accent1"/>
-          </a:effectRef>
-          <a:fontRef idx="minor">
-            <a:schemeClr val="lt1"/>
-          </a:fontRef>
-        </p:style>
-        <p:txBody>
-          <a:bodyPr rtlCol="0" anchor="ctr"/>
-          <a:lstStyle/>
-          <a:p>
-            <a:pPr algn="ctr"/>
-          </a:p>
-        </p:txBody>
-      </p:sp>
-      <p:sp>
-        <p:nvSpPr>
-          <p:cNvPr id="5" name="TextBox 4"/>
-          <p:cNvSpPr txBox="1"/>
-          <p:nvPr/>
-        </p:nvSpPr>
-        <p:spPr>
-          <a:xfrm>
-            <a:off x="840000" y="1650000"/>
-            <a:ext cx="10512000" cy="1000000"/>
-          </a:xfrm>
-          <a:prstGeom prst="rect">
-            <a:avLst/>
-          </a:prstGeom>
-          <a:noFill/>
-        </p:spPr>
-        <p:txBody>
-          <a:bodyPr wrap="square" anchor="ctr">
-            <a:spAutoFit/>
-          </a:bodyPr>
-          <a:lstStyle/>
-          <a:p>
-            <a:pPr>
-              <a:spcAft>
-                <a:spcPts val="1170"/>
-              </a:spcAft>
-            </a:pPr>
-            <a:r>
-              <a:rPr sz="2600" b="1">
-                <a:solidFill>
-                  <a:srgbClr val="1F2A44"/>
-                </a:solidFill>
-                <a:latin typeface="Nunito Sans"/>
-              </a:rPr>
-              <a:t>Una chica: «Esta app de noticias dice la verdad». Un chico: «¿Cómo lo sabes?». La chica: «Porque en la propia app pone que todas sus noticias son verdad».</a:t>
-            </a:r>
-          </a:p>
-        </p:txBody>
-      </p:sp>
-      <p:sp>
-        <p:nvSpPr>
-          <p:cNvPr id="6" name="TextBox 5"/>
-          <p:cNvSpPr txBox="1"/>
-          <p:nvPr/>
-        </p:nvSpPr>
-        <p:spPr>
-          <a:xfrm>
-            <a:off x="640000" y="2900000"/>
-            <a:ext cx="10912000" cy="3500000"/>
-          </a:xfrm>
-          <a:prstGeom prst="rect">
-            <a:avLst/>
-          </a:prstGeom>
-          <a:noFill/>
-        </p:spPr>
-        <p:txBody>
-          <a:bodyPr wrap="square">
-            <a:spAutoFit/>
-          </a:bodyPr>
-          <a:lstStyle/>
-          <a:p>
-            <a:pPr>
-              <a:spcAft>
-                <a:spcPts val="1080"/>
-              </a:spcAft>
-            </a:pPr>
-            <a:r>
-              <a:rPr sz="2400" b="1">
-                <a:solidFill>
-                  <a:srgbClr val="E8793A"/>
-                </a:solidFill>
-                <a:latin typeface="Nunito Sans"/>
-              </a:rPr>
-              <a:t>1. </a:t>
-            </a:r>
-            <a:r>
-              <a:rPr sz="2400" b="0">
-                <a:solidFill>
-                  <a:srgbClr val="1F2A44"/>
-                </a:solidFill>
-                <a:latin typeface="Nunito Sans"/>
-              </a:rPr>
-              <a:t>¿Cuál es la conclusión? La app dice la verdad.</a:t>
-            </a:r>
-          </a:p>
-          <a:p>
-            <a:pPr>
-              <a:spcAft>
-                <a:spcPts val="1080"/>
-              </a:spcAft>
-            </a:pPr>
-            <a:r>
-              <a:rPr sz="2400" b="1">
-                <a:solidFill>
-                  <a:srgbClr val="E8793A"/>
-                </a:solidFill>
-                <a:latin typeface="Nunito Sans"/>
-              </a:rPr>
-              <a:t>2. </a:t>
-            </a:r>
-            <a:r>
-              <a:rPr sz="2400" b="0">
-                <a:solidFill>
-                  <a:srgbClr val="1F2A44"/>
-                </a:solidFill>
-                <a:latin typeface="Nunito Sans"/>
-              </a:rPr>
-              <a:t>¿Cuál es la razón? Lo que dice la propia app.</a:t>
-            </a:r>
-          </a:p>
-          <a:p>
-            <a:pPr>
-              <a:spcAft>
-                <a:spcPts val="1080"/>
-              </a:spcAft>
-            </a:pPr>
-            <a:r>
-              <a:rPr sz="2400" b="1">
-                <a:solidFill>
-                  <a:srgbClr val="E8793A"/>
-                </a:solidFill>
-                <a:latin typeface="Nunito Sans"/>
-              </a:rPr>
-              <a:t>3. </a:t>
-            </a:r>
-            <a:r>
-              <a:rPr sz="2400" b="0">
-                <a:solidFill>
-                  <a:srgbClr val="1F2A44"/>
-                </a:solidFill>
-                <a:latin typeface="Nunito Sans"/>
-              </a:rPr>
-              <a:t>Para creer esa razón, ya tengo que creer que la app dice la verdad: es un círculo.</a:t>
-            </a:r>
-          </a:p>
-          <a:p>
-            <a:pPr>
-              <a:spcAft>
-                <a:spcPts val="1080"/>
-              </a:spcAft>
-            </a:pPr>
-            <a:r>
-              <a:rPr sz="2400" b="1">
-                <a:solidFill>
-                  <a:srgbClr val="E8793A"/>
-                </a:solidFill>
-                <a:latin typeface="Nunito Sans"/>
-              </a:rPr>
-              <a:t>4. </a:t>
-            </a:r>
-            <a:r>
-              <a:rPr sz="2400" b="0">
-                <a:solidFill>
-                  <a:srgbClr val="1F2A44"/>
-                </a:solidFill>
-                <a:latin typeface="Nunito Sans"/>
-              </a:rPr>
-              <a:t>Conclusión: razonamiento circular. Hace falta una razón de fuera: otras fuentes.</a:t>
-            </a:r>
-          </a:p>
-        </p:txBody>
-      </p:sp>
-    </p:spTree>
-  </p:cSld>
-  <p:clrMapOvr>
-    <a:masterClrMapping/>
-  </p:clrMapOvr>
-</p:sld>
-</file>
-
-<file path=ppt/slides/slide13.xml><?xml version="1.0" encoding="utf-8"?>
-<p:sld xmlns:a="http://schemas.openxmlformats.org/drawingml/2006/main" xmlns:p="http://schemas.openxmlformats.org/presentationml/2006/main" xmlns:r="http://schemas.openxmlformats.org/officeDocument/2006/relationships">
-  <p:cSld>
-    <p:bg>
-      <p:bgPr>
-        <a:solidFill>
-          <a:srgbClr val="F6C9A8"/>
-        </a:solidFill>
-        <a:effectLst/>
-      </p:bgPr>
-    </p:bg>
-    <p:spTree>
-      <p:nvGrpSpPr>
-        <p:cNvPr id="1" name=""/>
-        <p:cNvGrpSpPr/>
-        <p:nvPr/>
-      </p:nvGrpSpPr>
-      <p:grpSpPr/>
-      <p:sp>
-        <p:nvSpPr>
-          <p:cNvPr id="2" name="TextBox 1"/>
-          <p:cNvSpPr txBox="1"/>
-          <p:nvPr/>
-        </p:nvSpPr>
-        <p:spPr>
-          <a:xfrm>
-            <a:off x="640000" y="380000"/>
-            <a:ext cx="10912000" cy="420000"/>
-          </a:xfrm>
-          <a:prstGeom prst="rect">
-            <a:avLst/>
-          </a:prstGeom>
-          <a:noFill/>
-        </p:spPr>
-        <p:txBody>
-          <a:bodyPr wrap="square">
-            <a:spAutoFit/>
-          </a:bodyPr>
-          <a:lstStyle/>
-          <a:p>
-            <a:pPr>
-              <a:spcAft>
-                <a:spcPts val="630"/>
-              </a:spcAft>
-            </a:pPr>
-            <a:r>
-              <a:rPr sz="1400" b="1">
-                <a:solidFill>
-                  <a:srgbClr val="1F2A44"/>
-                </a:solidFill>
-                <a:latin typeface="Nunito Sans"/>
-              </a:rPr>
-              <a:t>CASO TRAMPA · BLOQUE 2 · CASOS RESUELTOS</a:t>
-            </a:r>
-          </a:p>
-        </p:txBody>
-      </p:sp>
-      <p:sp>
-        <p:nvSpPr>
-          <p:cNvPr id="3" name="TextBox 2"/>
-          <p:cNvSpPr txBox="1"/>
-          <p:nvPr/>
-        </p:nvSpPr>
-        <p:spPr>
-          <a:xfrm>
-            <a:off x="640000" y="760000"/>
-            <a:ext cx="10912000" cy="800000"/>
-          </a:xfrm>
-          <a:prstGeom prst="rect">
-            <a:avLst/>
-          </a:prstGeom>
-          <a:noFill/>
-        </p:spPr>
-        <p:txBody>
-          <a:bodyPr wrap="square">
-            <a:spAutoFit/>
-          </a:bodyPr>
-          <a:lstStyle/>
-          <a:p>
-            <a:pPr>
-              <a:spcAft>
-                <a:spcPts val="1710"/>
-              </a:spcAft>
-            </a:pPr>
-            <a:r>
-              <a:rPr sz="3800" b="1">
-                <a:solidFill>
-                  <a:srgbClr val="1F2A44"/>
-                </a:solidFill>
-                <a:latin typeface="Fredoka"/>
-              </a:rPr>
-              <a:t>⚠ Sin pruebas, sin castigo</a:t>
-            </a:r>
-          </a:p>
-        </p:txBody>
-      </p:sp>
-      <p:sp>
-        <p:nvSpPr>
-          <p:cNvPr id="4" name="Rectangle 3"/>
-          <p:cNvSpPr/>
-          <p:nvPr/>
-        </p:nvSpPr>
-        <p:spPr>
-          <a:xfrm>
-            <a:off x="640000" y="1600000"/>
-            <a:ext cx="10912000" cy="1100000"/>
-          </a:xfrm>
-          <a:prstGeom prst="rect">
-            <a:avLst/>
-          </a:prstGeom>
-          <a:solidFill>
-            <a:srgbClr val="FBF7EF"/>
-          </a:solidFill>
-          <a:ln>
-            <a:noFill/>
-          </a:ln>
-        </p:spPr>
-        <p:style>
-          <a:lnRef idx="1">
-            <a:schemeClr val="accent1"/>
-          </a:lnRef>
-          <a:fillRef idx="3">
-            <a:schemeClr val="accent1"/>
-          </a:fillRef>
-          <a:effectRef idx="2">
-            <a:schemeClr val="accent1"/>
-          </a:effectRef>
-          <a:fontRef idx="minor">
-            <a:schemeClr val="lt1"/>
-          </a:fontRef>
-        </p:style>
-        <p:txBody>
-          <a:bodyPr rtlCol="0" anchor="ctr"/>
-          <a:lstStyle/>
-          <a:p>
-            <a:pPr algn="ctr"/>
-          </a:p>
-        </p:txBody>
-      </p:sp>
-      <p:sp>
-        <p:nvSpPr>
-          <p:cNvPr id="5" name="TextBox 4"/>
-          <p:cNvSpPr txBox="1"/>
-          <p:nvPr/>
-        </p:nvSpPr>
-        <p:spPr>
-          <a:xfrm>
-            <a:off x="840000" y="1650000"/>
-            <a:ext cx="10512000" cy="1000000"/>
-          </a:xfrm>
-          <a:prstGeom prst="rect">
-            <a:avLst/>
-          </a:prstGeom>
-          <a:noFill/>
-        </p:spPr>
-        <p:txBody>
-          <a:bodyPr wrap="square" anchor="ctr">
-            <a:spAutoFit/>
-          </a:bodyPr>
-          <a:lstStyle/>
-          <a:p>
-            <a:pPr>
-              <a:spcAft>
-                <a:spcPts val="1170"/>
-              </a:spcAft>
-            </a:pPr>
-            <a:r>
-              <a:rPr sz="2600" b="1">
-                <a:solidFill>
-                  <a:srgbClr val="1F2A44"/>
-                </a:solidFill>
-                <a:latin typeface="Nunito Sans"/>
-              </a:rPr>
-              <a:t>La jefa de estudios: «No hay pruebas de que un alumno copiara en el examen. Así que no se le castiga».</a:t>
-            </a:r>
-          </a:p>
-        </p:txBody>
-      </p:sp>
-      <p:sp>
-        <p:nvSpPr>
-          <p:cNvPr id="6" name="TextBox 5"/>
-          <p:cNvSpPr txBox="1"/>
-          <p:nvPr/>
-        </p:nvSpPr>
-        <p:spPr>
-          <a:xfrm>
-            <a:off x="640000" y="2900000"/>
-            <a:ext cx="10912000" cy="3500000"/>
-          </a:xfrm>
-          <a:prstGeom prst="rect">
-            <a:avLst/>
-          </a:prstGeom>
-          <a:noFill/>
-        </p:spPr>
-        <p:txBody>
-          <a:bodyPr wrap="square">
-            <a:spAutoFit/>
-          </a:bodyPr>
-          <a:lstStyle/>
-          <a:p>
-            <a:pPr>
-              <a:spcAft>
-                <a:spcPts val="1080"/>
-              </a:spcAft>
-            </a:pPr>
-            <a:r>
-              <a:rPr sz="2400" b="1">
-                <a:solidFill>
-                  <a:srgbClr val="E8793A"/>
-                </a:solidFill>
-                <a:latin typeface="Nunito Sans"/>
-              </a:rPr>
-              <a:t>1. </a:t>
-            </a:r>
-            <a:r>
-              <a:rPr sz="2400" b="0">
-                <a:solidFill>
-                  <a:srgbClr val="1F2A44"/>
-                </a:solidFill>
-                <a:latin typeface="Nunito Sans"/>
-              </a:rPr>
-              <a:t>Decide algo porque no hay pruebas… ¿apelación a la ignorancia?</a:t>
-            </a:r>
-          </a:p>
-          <a:p>
-            <a:pPr>
-              <a:spcAft>
-                <a:spcPts val="1080"/>
-              </a:spcAft>
-            </a:pPr>
-            <a:r>
-              <a:rPr sz="2400" b="1">
-                <a:solidFill>
-                  <a:srgbClr val="E8793A"/>
-                </a:solidFill>
-                <a:latin typeface="Nunito Sans"/>
-              </a:rPr>
-              <a:t>2. </a:t>
-            </a:r>
-            <a:r>
-              <a:rPr sz="2400" b="0">
-                <a:solidFill>
-                  <a:srgbClr val="1F2A44"/>
-                </a:solidFill>
-                <a:latin typeface="Nunito Sans"/>
-              </a:rPr>
-              <a:t>Parece la misma forma: «no se ha demostrado que sí, luego no».</a:t>
-            </a:r>
-          </a:p>
-          <a:p>
-            <a:pPr>
-              <a:spcAft>
-                <a:spcPts val="1080"/>
-              </a:spcAft>
-            </a:pPr>
-            <a:r>
-              <a:rPr sz="2400" b="1">
-                <a:solidFill>
-                  <a:srgbClr val="E8793A"/>
-                </a:solidFill>
-                <a:latin typeface="Nunito Sans"/>
-              </a:rPr>
-              <a:t>3. </a:t>
-            </a:r>
-            <a:r>
-              <a:rPr sz="2400" b="0">
-                <a:solidFill>
-                  <a:srgbClr val="1F2A44"/>
-                </a:solidFill>
-                <a:latin typeface="Nunito Sans"/>
-              </a:rPr>
-              <a:t>Pero no dice «seguro que no copió». Decide qué hacer mientras no hay pruebas.</a:t>
-            </a:r>
-          </a:p>
-          <a:p>
-            <a:pPr>
-              <a:spcAft>
-                <a:spcPts val="1080"/>
-              </a:spcAft>
-            </a:pPr>
-            <a:r>
-              <a:rPr sz="2400" b="1">
-                <a:solidFill>
-                  <a:srgbClr val="E8793A"/>
-                </a:solidFill>
-                <a:latin typeface="Nunito Sans"/>
-              </a:rPr>
-              <a:t>4. </a:t>
-            </a:r>
-            <a:r>
-              <a:rPr sz="2400" b="0">
-                <a:solidFill>
-                  <a:srgbClr val="1F2A44"/>
-                </a:solidFill>
-                <a:latin typeface="Nunito Sans"/>
-              </a:rPr>
-              <a:t>Es una regla justa: sin pruebas, no se castiga a nadie. Se llama presunción de inocencia.</a:t>
-            </a:r>
-          </a:p>
-          <a:p>
-            <a:pPr>
-              <a:spcAft>
-                <a:spcPts val="1080"/>
-              </a:spcAft>
-            </a:pPr>
-            <a:r>
-              <a:rPr sz="2400" b="1">
-                <a:solidFill>
-                  <a:srgbClr val="E8793A"/>
-                </a:solidFill>
-                <a:latin typeface="Nunito Sans"/>
-              </a:rPr>
-              <a:t>5. </a:t>
-            </a:r>
-            <a:r>
-              <a:rPr sz="2400" b="0">
-                <a:solidFill>
-                  <a:srgbClr val="1F2A44"/>
-                </a:solidFill>
-                <a:latin typeface="Nunito Sans"/>
-              </a:rPr>
-              <a:t>Conclusión: no es falacia. Decidir cómo actuar sin pruebas no es afirmar que algo es verdad.</a:t>
-            </a:r>
-          </a:p>
-        </p:txBody>
-      </p:sp>
-    </p:spTree>
-  </p:cSld>
-  <p:clrMapOvr>
-    <a:masterClrMapping/>
-  </p:clrMapOvr>
-</p:sld>
-</file>
-
-<file path=ppt/slides/slide14.xml><?xml version="1.0" encoding="utf-8"?>
-<p:sld xmlns:a="http://schemas.openxmlformats.org/drawingml/2006/main" xmlns:p="http://schemas.openxmlformats.org/presentationml/2006/main" xmlns:r="http://schemas.openxmlformats.org/officeDocument/2006/relationships">
-  <p:cSld>
-    <p:bg>
-      <p:bgPr>
-        <a:solidFill>
-          <a:srgbClr val="1F2A44"/>
-        </a:solidFill>
-        <a:effectLst/>
-      </p:bgPr>
-    </p:bg>
-    <p:spTree>
-      <p:nvGrpSpPr>
-        <p:cNvPr id="1" name=""/>
-        <p:cNvGrpSpPr/>
-        <p:nvPr/>
-      </p:nvGrpSpPr>
-      <p:grpSpPr/>
-      <p:sp>
-        <p:nvSpPr>
-          <p:cNvPr id="2" name="TextBox 1"/>
-          <p:cNvSpPr txBox="1"/>
-          <p:nvPr/>
-        </p:nvSpPr>
-        <p:spPr>
-          <a:xfrm>
-            <a:off x="640000" y="2300000"/>
-            <a:ext cx="10912000" cy="500000"/>
-          </a:xfrm>
-          <a:prstGeom prst="rect">
-            <a:avLst/>
-          </a:prstGeom>
-          <a:noFill/>
-        </p:spPr>
-        <p:txBody>
-          <a:bodyPr wrap="square">
-            <a:spAutoFit/>
-          </a:bodyPr>
-          <a:lstStyle/>
-          <a:p>
-            <a:pPr>
-              <a:spcAft>
-                <a:spcPts val="810"/>
-              </a:spcAft>
-            </a:pPr>
-            <a:r>
-              <a:rPr sz="1800" b="1">
-                <a:solidFill>
-                  <a:srgbClr val="F4B183"/>
-                </a:solidFill>
-                <a:latin typeface="Nunito Sans"/>
-              </a:rPr>
-              <a:t>BLOQUE 3</a:t>
-            </a:r>
-          </a:p>
-        </p:txBody>
-      </p:sp>
-      <p:sp>
-        <p:nvSpPr>
-          <p:cNvPr id="3" name="TextBox 2"/>
-          <p:cNvSpPr txBox="1"/>
-          <p:nvPr/>
-        </p:nvSpPr>
-        <p:spPr>
-          <a:xfrm>
-            <a:off x="640000" y="2800000"/>
-            <a:ext cx="10912000" cy="800000"/>
-          </a:xfrm>
-          <a:prstGeom prst="rect">
-            <a:avLst/>
-          </a:prstGeom>
-          <a:noFill/>
-        </p:spPr>
-        <p:txBody>
-          <a:bodyPr wrap="square">
-            <a:spAutoFit/>
-          </a:bodyPr>
-          <a:lstStyle/>
-          <a:p>
-            <a:pPr>
-              <a:spcAft>
-                <a:spcPts val="2160"/>
-              </a:spcAft>
-            </a:pPr>
-            <a:r>
-              <a:rPr sz="4800" b="1">
-                <a:solidFill>
-                  <a:srgbClr val="FBF7EF"/>
-                </a:solidFill>
-                <a:latin typeface="Fredoka"/>
-              </a:rPr>
-              <a:t>¿Cuándo no es falacia?</a:t>
-            </a:r>
-          </a:p>
-        </p:txBody>
-      </p:sp>
-    </p:spTree>
-  </p:cSld>
-  <p:clrMapOvr>
-    <a:masterClrMapping/>
-  </p:clrMapOvr>
-</p:sld>
-</file>
-
-<file path=ppt/slides/slide15.xml><?xml version="1.0" encoding="utf-8"?>
-<p:sld xmlns:a="http://schemas.openxmlformats.org/drawingml/2006/main" xmlns:p="http://schemas.openxmlformats.org/presentationml/2006/main" xmlns:r="http://schemas.openxmlformats.org/officeDocument/2006/relationships">
-  <p:cSld>
-    <p:bg>
-      <p:bgPr>
-        <a:solidFill>
-          <a:srgbClr val="FBF7EF"/>
-        </a:solidFill>
-        <a:effectLst/>
-      </p:bgPr>
-    </p:bg>
-    <p:spTree>
-      <p:nvGrpSpPr>
-        <p:cNvPr id="1" name=""/>
-        <p:cNvGrpSpPr/>
-        <p:nvPr/>
-      </p:nvGrpSpPr>
-      <p:grpSpPr/>
-      <p:sp>
-        <p:nvSpPr>
-          <p:cNvPr id="2" name="TextBox 1"/>
-          <p:cNvSpPr txBox="1"/>
-          <p:nvPr/>
-        </p:nvSpPr>
-        <p:spPr>
-          <a:xfrm>
-            <a:off x="640000" y="380000"/>
-            <a:ext cx="10912000" cy="420000"/>
-          </a:xfrm>
-          <a:prstGeom prst="rect">
-            <a:avLst/>
-          </a:prstGeom>
-          <a:noFill/>
-        </p:spPr>
-        <p:txBody>
-          <a:bodyPr wrap="square">
-            <a:spAutoFit/>
-          </a:bodyPr>
-          <a:lstStyle/>
-          <a:p>
-            <a:pPr>
-              <a:spcAft>
-                <a:spcPts val="630"/>
-              </a:spcAft>
-            </a:pPr>
-            <a:r>
-              <a:rPr sz="1400" b="1">
-                <a:solidFill>
-                  <a:srgbClr val="E8793A"/>
-                </a:solidFill>
-                <a:latin typeface="Nunito Sans"/>
-              </a:rPr>
-              <a:t>BLOQUE 3 · ¿CUÁNDO NO ES FALACIA?</a:t>
-            </a:r>
-          </a:p>
-        </p:txBody>
-      </p:sp>
-      <p:sp>
-        <p:nvSpPr>
-          <p:cNvPr id="3" name="TextBox 2"/>
-          <p:cNvSpPr txBox="1"/>
-          <p:nvPr/>
-        </p:nvSpPr>
-        <p:spPr>
-          <a:xfrm>
-            <a:off x="640000" y="760000"/>
-            <a:ext cx="10912000" cy="800000"/>
-          </a:xfrm>
-          <a:prstGeom prst="rect">
-            <a:avLst/>
-          </a:prstGeom>
-          <a:noFill/>
-        </p:spPr>
-        <p:txBody>
-          <a:bodyPr wrap="square">
-            <a:spAutoFit/>
-          </a:bodyPr>
-          <a:lstStyle/>
-          <a:p>
-            <a:pPr>
-              <a:spcAft>
-                <a:spcPts val="1710"/>
-              </a:spcAft>
-            </a:pPr>
-            <a:r>
-              <a:rPr sz="3800" b="1">
-                <a:solidFill>
-                  <a:srgbClr val="1F2A44"/>
-                </a:solidFill>
-                <a:latin typeface="Fredoka"/>
-              </a:rPr>
-              <a:t>Falta de pruebas: ¿truco o prudencia?</a:t>
-            </a:r>
-          </a:p>
-        </p:txBody>
-      </p:sp>
-      <p:sp>
-        <p:nvSpPr>
-          <p:cNvPr id="4" name="Rectangle 3"/>
-          <p:cNvSpPr/>
-          <p:nvPr/>
-        </p:nvSpPr>
-        <p:spPr>
-          <a:xfrm>
-            <a:off x="640000" y="1650000"/>
-            <a:ext cx="5306000" cy="4400000"/>
-          </a:xfrm>
-          <a:prstGeom prst="rect">
-            <a:avLst/>
-          </a:prstGeom>
-          <a:solidFill>
-            <a:srgbClr val="FBE3D2"/>
-          </a:solidFill>
-          <a:ln>
-            <a:noFill/>
-          </a:ln>
-        </p:spPr>
-        <p:style>
-          <a:lnRef idx="1">
-            <a:schemeClr val="accent1"/>
-          </a:lnRef>
-          <a:fillRef idx="3">
-            <a:schemeClr val="accent1"/>
-          </a:fillRef>
-          <a:effectRef idx="2">
-            <a:schemeClr val="accent1"/>
-          </a:effectRef>
-          <a:fontRef idx="minor">
-            <a:schemeClr val="lt1"/>
-          </a:fontRef>
-        </p:style>
-        <p:txBody>
-          <a:bodyPr rtlCol="0" anchor="ctr"/>
-          <a:lstStyle/>
-          <a:p>
-            <a:pPr algn="ctr"/>
-          </a:p>
-        </p:txBody>
-      </p:sp>
-      <p:sp>
-        <p:nvSpPr>
-          <p:cNvPr id="5" name="TextBox 4"/>
-          <p:cNvSpPr txBox="1"/>
-          <p:nvPr/>
-        </p:nvSpPr>
-        <p:spPr>
-          <a:xfrm>
-            <a:off x="840000" y="1750000"/>
-            <a:ext cx="4906000" cy="600000"/>
-          </a:xfrm>
-          <a:prstGeom prst="rect">
-            <a:avLst/>
-          </a:prstGeom>
-          <a:noFill/>
-        </p:spPr>
-        <p:txBody>
-          <a:bodyPr wrap="square">
-            <a:spAutoFit/>
-          </a:bodyPr>
-          <a:lstStyle/>
-          <a:p>
-            <a:pPr>
-              <a:spcAft>
-                <a:spcPts val="1260"/>
-              </a:spcAft>
-            </a:pPr>
-            <a:r>
-              <a:rPr sz="2800" b="1">
-                <a:solidFill>
-                  <a:srgbClr val="C2531C"/>
-                </a:solidFill>
-                <a:latin typeface="Nunito Sans"/>
-              </a:rPr>
-              <a:t>Falacia</a:t>
-            </a:r>
-          </a:p>
-        </p:txBody>
-      </p:sp>
-      <p:sp>
-        <p:nvSpPr>
-          <p:cNvPr id="6" name="TextBox 5"/>
-          <p:cNvSpPr txBox="1"/>
-          <p:nvPr/>
-        </p:nvSpPr>
-        <p:spPr>
-          <a:xfrm>
-            <a:off x="840000" y="2400000"/>
-            <a:ext cx="4906000" cy="3500000"/>
-          </a:xfrm>
-          <a:prstGeom prst="rect">
-            <a:avLst/>
-          </a:prstGeom>
-          <a:noFill/>
-        </p:spPr>
-        <p:txBody>
-          <a:bodyPr wrap="square">
-            <a:spAutoFit/>
-          </a:bodyPr>
-          <a:lstStyle/>
-          <a:p>
-            <a:pPr>
-              <a:spcAft>
-                <a:spcPts val="1170"/>
-              </a:spcAft>
-            </a:pPr>
-            <a:r>
-              <a:rPr sz="2600" b="1">
-                <a:solidFill>
-                  <a:srgbClr val="E8793A"/>
-                </a:solidFill>
-                <a:latin typeface="Nunito Sans"/>
-              </a:rPr>
-              <a:t>• </a:t>
-            </a:r>
-            <a:r>
-              <a:rPr sz="2600" b="0">
-                <a:solidFill>
-                  <a:srgbClr val="1F2A44"/>
-                </a:solidFill>
-                <a:latin typeface="Nunito Sans"/>
-              </a:rPr>
-              <a:t>«No está demostrado que no, así que sí»</a:t>
-            </a:r>
-          </a:p>
-          <a:p>
-            <a:pPr>
-              <a:spcAft>
-                <a:spcPts val="1170"/>
-              </a:spcAft>
-            </a:pPr>
-            <a:r>
-              <a:rPr sz="2600" b="1">
-                <a:solidFill>
-                  <a:srgbClr val="E8793A"/>
-                </a:solidFill>
-                <a:latin typeface="Nunito Sans"/>
-              </a:rPr>
-              <a:t>• </a:t>
-            </a:r>
-            <a:r>
-              <a:rPr sz="2600" b="0">
-                <a:solidFill>
-                  <a:srgbClr val="1F2A44"/>
-                </a:solidFill>
-                <a:latin typeface="Nunito Sans"/>
-              </a:rPr>
-              <a:t>La razón repite la conclusión</a:t>
-            </a:r>
-          </a:p>
-        </p:txBody>
-      </p:sp>
-      <p:sp>
-        <p:nvSpPr>
-          <p:cNvPr id="7" name="Rectangle 6"/>
-          <p:cNvSpPr/>
-          <p:nvPr/>
-        </p:nvSpPr>
-        <p:spPr>
-          <a:xfrm>
-            <a:off x="6246000" y="1650000"/>
-            <a:ext cx="5306000" cy="4400000"/>
-          </a:xfrm>
-          <a:prstGeom prst="rect">
-            <a:avLst/>
-          </a:prstGeom>
-          <a:solidFill>
-            <a:srgbClr val="EAF0F7"/>
-          </a:solidFill>
-          <a:ln>
-            <a:noFill/>
-          </a:ln>
-        </p:spPr>
-        <p:style>
-          <a:lnRef idx="1">
-            <a:schemeClr val="accent1"/>
-          </a:lnRef>
-          <a:fillRef idx="3">
-            <a:schemeClr val="accent1"/>
-          </a:fillRef>
-          <a:effectRef idx="2">
-            <a:schemeClr val="accent1"/>
-          </a:effectRef>
-          <a:fontRef idx="minor">
-            <a:schemeClr val="lt1"/>
-          </a:fontRef>
-        </p:style>
-        <p:txBody>
-          <a:bodyPr rtlCol="0" anchor="ctr"/>
-          <a:lstStyle/>
-          <a:p>
-            <a:pPr algn="ctr"/>
-          </a:p>
-        </p:txBody>
-      </p:sp>
-      <p:sp>
-        <p:nvSpPr>
-          <p:cNvPr id="8" name="TextBox 7"/>
-          <p:cNvSpPr txBox="1"/>
-          <p:nvPr/>
-        </p:nvSpPr>
-        <p:spPr>
-          <a:xfrm>
-            <a:off x="6446000" y="1750000"/>
-            <a:ext cx="4906000" cy="600000"/>
-          </a:xfrm>
-          <a:prstGeom prst="rect">
-            <a:avLst/>
-          </a:prstGeom>
-          <a:noFill/>
-        </p:spPr>
-        <p:txBody>
-          <a:bodyPr wrap="square">
-            <a:spAutoFit/>
-          </a:bodyPr>
-          <a:lstStyle/>
-          <a:p>
-            <a:pPr>
-              <a:spcAft>
-                <a:spcPts val="1260"/>
-              </a:spcAft>
-            </a:pPr>
-            <a:r>
-              <a:rPr sz="2800" b="1">
-                <a:solidFill>
-                  <a:srgbClr val="2F6FB5"/>
-                </a:solidFill>
-                <a:latin typeface="Nunito Sans"/>
-              </a:rPr>
-              <a:t>Legítimo</a:t>
-            </a:r>
-          </a:p>
-        </p:txBody>
-      </p:sp>
-      <p:sp>
-        <p:nvSpPr>
-          <p:cNvPr id="9" name="TextBox 8"/>
-          <p:cNvSpPr txBox="1"/>
-          <p:nvPr/>
-        </p:nvSpPr>
-        <p:spPr>
-          <a:xfrm>
-            <a:off x="6446000" y="2400000"/>
-            <a:ext cx="4906000" cy="3500000"/>
-          </a:xfrm>
-          <a:prstGeom prst="rect">
-            <a:avLst/>
-          </a:prstGeom>
-          <a:noFill/>
-        </p:spPr>
-        <p:txBody>
-          <a:bodyPr wrap="square">
-            <a:spAutoFit/>
-          </a:bodyPr>
-          <a:lstStyle/>
-          <a:p>
-            <a:pPr>
-              <a:spcAft>
-                <a:spcPts val="1170"/>
-              </a:spcAft>
-            </a:pPr>
-            <a:r>
-              <a:rPr sz="2600" b="1">
-                <a:solidFill>
-                  <a:srgbClr val="E8793A"/>
-                </a:solidFill>
-                <a:latin typeface="Nunito Sans"/>
-              </a:rPr>
-              <a:t>• </a:t>
-            </a:r>
-            <a:r>
-              <a:rPr sz="2600" b="0">
-                <a:solidFill>
-                  <a:srgbClr val="1F2A44"/>
-                </a:solidFill>
-                <a:latin typeface="Nunito Sans"/>
-              </a:rPr>
-              <a:t>«Hemos buscado bien y no hay pruebas: probablemente no»</a:t>
-            </a:r>
-          </a:p>
-          <a:p>
-            <a:pPr>
-              <a:spcAft>
-                <a:spcPts val="1170"/>
-              </a:spcAft>
-            </a:pPr>
-            <a:r>
-              <a:rPr sz="2600" b="1">
-                <a:solidFill>
-                  <a:srgbClr val="E8793A"/>
-                </a:solidFill>
-                <a:latin typeface="Nunito Sans"/>
-              </a:rPr>
-              <a:t>• </a:t>
-            </a:r>
-            <a:r>
-              <a:rPr sz="2600" b="0">
-                <a:solidFill>
-                  <a:srgbClr val="1F2A44"/>
-                </a:solidFill>
-                <a:latin typeface="Nunito Sans"/>
-              </a:rPr>
-              <a:t>«Todavía no lo sabemos», sin concluir nada</a:t>
-            </a:r>
-          </a:p>
-          <a:p>
-            <a:pPr>
-              <a:spcAft>
-                <a:spcPts val="1170"/>
-              </a:spcAft>
-            </a:pPr>
-            <a:r>
-              <a:rPr sz="2600" b="1">
-                <a:solidFill>
-                  <a:srgbClr val="E8793A"/>
-                </a:solidFill>
-                <a:latin typeface="Nunito Sans"/>
-              </a:rPr>
-              <a:t>• </a:t>
-            </a:r>
-            <a:r>
-              <a:rPr sz="2600" b="0">
-                <a:solidFill>
-                  <a:srgbClr val="1F2A44"/>
-                </a:solidFill>
-                <a:latin typeface="Nunito Sans"/>
-              </a:rPr>
-              <a:t>Una razón nueva, que no depende de la conclusión</a:t>
-            </a:r>
-          </a:p>
-        </p:txBody>
-      </p:sp>
-    </p:spTree>
-  </p:cSld>
-  <p:clrMapOvr>
-    <a:masterClrMapping/>
-  </p:clrMapOvr>
-</p:sld>
-</file>
-
-<file path=ppt/slides/slide16.xml><?xml version="1.0" encoding="utf-8"?>
-<p:sld xmlns:a="http://schemas.openxmlformats.org/drawingml/2006/main" xmlns:p="http://schemas.openxmlformats.org/presentationml/2006/main" xmlns:r="http://schemas.openxmlformats.org/officeDocument/2006/relationships">
-  <p:cSld>
-    <p:bg>
-      <p:bgPr>
-        <a:solidFill>
-          <a:srgbClr val="FBF7EF"/>
-        </a:solidFill>
-        <a:effectLst/>
-      </p:bgPr>
-    </p:bg>
-    <p:spTree>
-      <p:nvGrpSpPr>
-        <p:cNvPr id="1" name=""/>
-        <p:cNvGrpSpPr/>
-        <p:nvPr/>
-      </p:nvGrpSpPr>
-      <p:grpSpPr/>
-      <p:sp>
-        <p:nvSpPr>
-          <p:cNvPr id="2" name="TextBox 1"/>
-          <p:cNvSpPr txBox="1"/>
-          <p:nvPr/>
-        </p:nvSpPr>
-        <p:spPr>
-          <a:xfrm>
-            <a:off x="640000" y="380000"/>
-            <a:ext cx="10912000" cy="420000"/>
-          </a:xfrm>
-          <a:prstGeom prst="rect">
-            <a:avLst/>
-          </a:prstGeom>
-          <a:noFill/>
-        </p:spPr>
-        <p:txBody>
-          <a:bodyPr wrap="square">
-            <a:spAutoFit/>
-          </a:bodyPr>
-          <a:lstStyle/>
-          <a:p>
-            <a:pPr>
-              <a:spcAft>
-                <a:spcPts val="630"/>
-              </a:spcAft>
-            </a:pPr>
-            <a:r>
-              <a:rPr sz="1400" b="1">
-                <a:solidFill>
-                  <a:srgbClr val="E8793A"/>
-                </a:solidFill>
-                <a:latin typeface="Nunito Sans"/>
-              </a:rPr>
-              <a:t>LO DE HOY EN TRES LÍNEAS</a:t>
-            </a:r>
-          </a:p>
-        </p:txBody>
-      </p:sp>
-      <p:sp>
-        <p:nvSpPr>
-          <p:cNvPr id="3" name="TextBox 2"/>
-          <p:cNvSpPr txBox="1"/>
-          <p:nvPr/>
-        </p:nvSpPr>
-        <p:spPr>
-          <a:xfrm>
-            <a:off x="640000" y="760000"/>
-            <a:ext cx="10912000" cy="800000"/>
-          </a:xfrm>
-          <a:prstGeom prst="rect">
-            <a:avLst/>
-          </a:prstGeom>
-          <a:noFill/>
-        </p:spPr>
-        <p:txBody>
-          <a:bodyPr wrap="square">
-            <a:spAutoFit/>
-          </a:bodyPr>
-          <a:lstStyle/>
-          <a:p>
-            <a:pPr>
-              <a:spcAft>
-                <a:spcPts val="1710"/>
-              </a:spcAft>
-            </a:pPr>
-            <a:r>
-              <a:rPr sz="3800" b="1">
-                <a:solidFill>
-                  <a:srgbClr val="1F2A44"/>
-                </a:solidFill>
-                <a:latin typeface="Fredoka"/>
-              </a:rPr>
-              <a:t>Escríbelo tú primero, sin mirar</a:t>
-            </a:r>
-          </a:p>
-        </p:txBody>
-      </p:sp>
-      <p:sp>
-        <p:nvSpPr>
-          <p:cNvPr id="4" name="TextBox 3"/>
-          <p:cNvSpPr txBox="1"/>
-          <p:nvPr/>
-        </p:nvSpPr>
-        <p:spPr>
-          <a:xfrm>
-            <a:off x="640000" y="1800000"/>
-            <a:ext cx="10912000" cy="1500000"/>
-          </a:xfrm>
-          <a:prstGeom prst="rect">
-            <a:avLst/>
-          </a:prstGeom>
-          <a:noFill/>
-        </p:spPr>
-        <p:txBody>
-          <a:bodyPr wrap="square">
-            <a:spAutoFit/>
-          </a:bodyPr>
-          <a:lstStyle/>
-          <a:p>
-            <a:pPr>
-              <a:spcAft>
-                <a:spcPts val="1170"/>
-              </a:spcAft>
-            </a:pPr>
-            <a:r>
-              <a:rPr sz="2600" b="0">
-                <a:solidFill>
-                  <a:srgbClr val="4A5568"/>
-                </a:solidFill>
-                <a:latin typeface="Nunito Sans"/>
-              </a:rPr>
-              <a:t>Dos minutos. Después lo comparamos.</a:t>
-            </a:r>
-          </a:p>
-        </p:txBody>
-      </p:sp>
-    </p:spTree>
-  </p:cSld>
-  <p:clrMapOvr>
-    <a:masterClrMapping/>
-  </p:clrMapOvr>
-</p:sld>
-</file>
-
-<file path=ppt/slides/slide17.xml><?xml version="1.0" encoding="utf-8"?>
-<p:sld xmlns:a="http://schemas.openxmlformats.org/drawingml/2006/main" xmlns:p="http://schemas.openxmlformats.org/presentationml/2006/main" xmlns:r="http://schemas.openxmlformats.org/officeDocument/2006/relationships">
-  <p:cSld>
-    <p:bg>
-      <p:bgPr>
-        <a:solidFill>
-          <a:srgbClr val="FBF7EF"/>
-        </a:solidFill>
-        <a:effectLst/>
-      </p:bgPr>
-    </p:bg>
-    <p:spTree>
-      <p:nvGrpSpPr>
-        <p:cNvPr id="1" name=""/>
-        <p:cNvGrpSpPr/>
-        <p:nvPr/>
-      </p:nvGrpSpPr>
-      <p:grpSpPr/>
-      <p:sp>
-        <p:nvSpPr>
-          <p:cNvPr id="2" name="TextBox 1"/>
-          <p:cNvSpPr txBox="1"/>
-          <p:nvPr/>
-        </p:nvSpPr>
-        <p:spPr>
-          <a:xfrm>
-            <a:off x="640000" y="380000"/>
-            <a:ext cx="10912000" cy="420000"/>
-          </a:xfrm>
-          <a:prstGeom prst="rect">
-            <a:avLst/>
-          </a:prstGeom>
-          <a:noFill/>
-        </p:spPr>
-        <p:txBody>
-          <a:bodyPr wrap="square">
-            <a:spAutoFit/>
-          </a:bodyPr>
-          <a:lstStyle/>
-          <a:p>
-            <a:pPr>
-              <a:spcAft>
-                <a:spcPts val="630"/>
-              </a:spcAft>
-            </a:pPr>
-            <a:r>
-              <a:rPr sz="1400" b="1">
-                <a:solidFill>
-                  <a:srgbClr val="E8793A"/>
-                </a:solidFill>
-                <a:latin typeface="Nunito Sans"/>
-              </a:rPr>
-              <a:t>LO DE HOY EN TRES LÍNEAS</a:t>
-            </a:r>
-          </a:p>
-        </p:txBody>
-      </p:sp>
-      <p:sp>
-        <p:nvSpPr>
-          <p:cNvPr id="3" name="TextBox 2"/>
-          <p:cNvSpPr txBox="1"/>
-          <p:nvPr/>
-        </p:nvSpPr>
-        <p:spPr>
-          <a:xfrm>
-            <a:off x="640000" y="1300000"/>
-            <a:ext cx="10912000" cy="4800000"/>
-          </a:xfrm>
-          <a:prstGeom prst="rect">
-            <a:avLst/>
-          </a:prstGeom>
-          <a:noFill/>
-        </p:spPr>
-        <p:txBody>
-          <a:bodyPr wrap="square">
-            <a:spAutoFit/>
-          </a:bodyPr>
-          <a:lstStyle/>
-          <a:p>
-            <a:pPr>
-              <a:spcAft>
-                <a:spcPts val="1350"/>
-              </a:spcAft>
-            </a:pPr>
-            <a:r>
-              <a:rPr sz="3000" b="1">
-                <a:solidFill>
-                  <a:srgbClr val="E8793A"/>
-                </a:solidFill>
-                <a:latin typeface="Nunito Sans"/>
-              </a:rPr>
-              <a:t>1. </a:t>
-            </a:r>
-            <a:r>
-              <a:rPr sz="3000" b="0">
-                <a:solidFill>
-                  <a:srgbClr val="1F2A44"/>
-                </a:solidFill>
-                <a:latin typeface="Nunito Sans"/>
-              </a:rPr>
-              <a:t>Apelación a la ignorancia: «nadie ha demostrado que no, así que es verdad».</a:t>
-            </a:r>
-          </a:p>
-          <a:p>
-            <a:pPr>
-              <a:spcAft>
-                <a:spcPts val="1350"/>
-              </a:spcAft>
-            </a:pPr>
-            <a:r>
-              <a:rPr sz="3000" b="1">
-                <a:solidFill>
-                  <a:srgbClr val="E8793A"/>
-                </a:solidFill>
-                <a:latin typeface="Nunito Sans"/>
-              </a:rPr>
-              <a:t>2. </a:t>
-            </a:r>
-            <a:r>
-              <a:rPr sz="3000" b="0">
-                <a:solidFill>
-                  <a:srgbClr val="1F2A44"/>
-                </a:solidFill>
-                <a:latin typeface="Nunito Sans"/>
-              </a:rPr>
-              <a:t>Razonamiento circular: la conclusión ya está escondida en la razón.</a:t>
-            </a:r>
-          </a:p>
-          <a:p>
-            <a:pPr>
-              <a:spcAft>
-                <a:spcPts val="1350"/>
-              </a:spcAft>
-            </a:pPr>
-            <a:r>
-              <a:rPr sz="3000" b="1">
-                <a:solidFill>
-                  <a:srgbClr val="E8793A"/>
-                </a:solidFill>
-                <a:latin typeface="Nunito Sans"/>
-              </a:rPr>
-              <a:t>3. </a:t>
-            </a:r>
-            <a:r>
-              <a:rPr sz="3000" b="0">
-                <a:solidFill>
-                  <a:srgbClr val="1F2A44"/>
-                </a:solidFill>
-                <a:latin typeface="Nunito Sans"/>
-              </a:rPr>
-              <a:t>Quien afirma algo suele tener que dar pruebas nuevas, no vacíos ni círculos.</a:t>
-            </a:r>
-          </a:p>
-        </p:txBody>
-      </p:sp>
-    </p:spTree>
-  </p:cSld>
-  <p:clrMapOvr>
-    <a:masterClrMapping/>
-  </p:clrMapOvr>
-</p:sld>
-</file>
-
-<file path=ppt/slides/slide18.xml><?xml version="1.0" encoding="utf-8"?>
-<p:sld xmlns:a="http://schemas.openxmlformats.org/drawingml/2006/main" xmlns:p="http://schemas.openxmlformats.org/presentationml/2006/main" xmlns:r="http://schemas.openxmlformats.org/officeDocument/2006/relationships">
-  <p:cSld>
-    <p:bg>
-      <p:bgPr>
-        <a:solidFill>
-          <a:srgbClr val="1F2A44"/>
-        </a:solidFill>
-        <a:effectLst/>
-      </p:bgPr>
-    </p:bg>
-    <p:spTree>
-      <p:nvGrpSpPr>
-        <p:cNvPr id="1" name=""/>
-        <p:cNvGrpSpPr/>
-        <p:nvPr/>
-      </p:nvGrpSpPr>
-      <p:grpSpPr/>
-      <p:sp>
-        <p:nvSpPr>
-          <p:cNvPr id="2" name="TextBox 1"/>
-          <p:cNvSpPr txBox="1"/>
-          <p:nvPr/>
-        </p:nvSpPr>
-        <p:spPr>
-          <a:xfrm>
-            <a:off x="640000" y="380000"/>
-            <a:ext cx="10912000" cy="420000"/>
-          </a:xfrm>
-          <a:prstGeom prst="rect">
-            <a:avLst/>
-          </a:prstGeom>
-          <a:noFill/>
-        </p:spPr>
-        <p:txBody>
-          <a:bodyPr wrap="square">
-            <a:spAutoFit/>
-          </a:bodyPr>
-          <a:lstStyle/>
-          <a:p>
-            <a:pPr>
-              <a:spcAft>
-                <a:spcPts val="630"/>
-              </a:spcAft>
-            </a:pPr>
-            <a:r>
-              <a:rPr sz="1400" b="1">
-                <a:solidFill>
-                  <a:srgbClr val="F4B183"/>
-                </a:solidFill>
-                <a:latin typeface="Nunito Sans"/>
-              </a:rPr>
-              <a:t>VÍDEO</a:t>
-            </a:r>
-          </a:p>
-        </p:txBody>
-      </p:sp>
-      <p:sp>
-        <p:nvSpPr>
-          <p:cNvPr id="3" name="TextBox 2"/>
-          <p:cNvSpPr txBox="1"/>
-          <p:nvPr/>
-        </p:nvSpPr>
-        <p:spPr>
-          <a:xfrm>
-            <a:off x="640000" y="760000"/>
-            <a:ext cx="10912000" cy="800000"/>
-          </a:xfrm>
-          <a:prstGeom prst="rect">
-            <a:avLst/>
-          </a:prstGeom>
-          <a:noFill/>
-        </p:spPr>
-        <p:txBody>
-          <a:bodyPr wrap="square">
-            <a:spAutoFit/>
-          </a:bodyPr>
-          <a:lstStyle/>
-          <a:p>
-            <a:pPr>
-              <a:spcAft>
-                <a:spcPts val="1620"/>
-              </a:spcAft>
-            </a:pPr>
-            <a:r>
-              <a:rPr sz="3600" b="1">
-                <a:solidFill>
-                  <a:srgbClr val="FBF7EF"/>
-                </a:solidFill>
-                <a:latin typeface="Fredoka"/>
-              </a:rPr>
-              <a:t>La falacia ad ignorantiam y el razonamiento circular</a:t>
-            </a:r>
-          </a:p>
-        </p:txBody>
-      </p:sp>
-      <p:sp>
-        <p:nvSpPr>
-          <p:cNvPr id="4" name="TextBox 3"/>
-          <p:cNvSpPr txBox="1"/>
-          <p:nvPr/>
-        </p:nvSpPr>
-        <p:spPr>
-          <a:xfrm>
-            <a:off x="640000" y="2200000"/>
-            <a:ext cx="10912000" cy="2000000"/>
-          </a:xfrm>
-          <a:prstGeom prst="rect">
-            <a:avLst/>
-          </a:prstGeom>
-          <a:noFill/>
-        </p:spPr>
-        <p:txBody>
-          <a:bodyPr wrap="square">
-            <a:spAutoFit/>
-          </a:bodyPr>
-          <a:lstStyle/>
-          <a:p>
-            <a:pPr>
-              <a:spcAft>
-                <a:spcPts val="1080"/>
-              </a:spcAft>
-            </a:pPr>
-            <a:r>
-              <a:rPr sz="2400" b="0">
-                <a:solidFill>
-                  <a:srgbClr val="C9D3E6"/>
-                </a:solidFill>
-                <a:latin typeface="Nunito Sans"/>
-              </a:rPr>
-              <a:t>Ver ejemplos de «no está demostrado que no» y de argumentos que dan vueltas.</a:t>
-            </a:r>
-          </a:p>
-        </p:txBody>
-      </p:sp>
-    </p:spTree>
-  </p:cSld>
-  <p:clrMapOvr>
-    <a:masterClrMapping/>
-  </p:clrMapOvr>
-</p:sld>
-</file>
-
-<file path=ppt/slides/slide19.xml><?xml version="1.0" encoding="utf-8"?>
-<p:sld xmlns:a="http://schemas.openxmlformats.org/drawingml/2006/main" xmlns:p="http://schemas.openxmlformats.org/presentationml/2006/main" xmlns:r="http://schemas.openxmlformats.org/officeDocument/2006/relationships">
-  <p:cSld>
-    <p:bg>
-      <p:bgPr>
-        <a:solidFill>
-          <a:srgbClr val="1F2A44"/>
-        </a:solidFill>
-        <a:effectLst/>
-      </p:bgPr>
-    </p:bg>
-    <p:spTree>
-      <p:nvGrpSpPr>
-        <p:cNvPr id="1" name=""/>
-        <p:cNvGrpSpPr/>
-        <p:nvPr/>
-      </p:nvGrpSpPr>
-      <p:grpSpPr/>
-      <p:sp>
-        <p:nvSpPr>
-          <p:cNvPr id="2" name="TextBox 1"/>
-          <p:cNvSpPr txBox="1"/>
-          <p:nvPr/>
-        </p:nvSpPr>
-        <p:spPr>
-          <a:xfrm>
-            <a:off x="640000" y="380000"/>
-            <a:ext cx="10912000" cy="420000"/>
-          </a:xfrm>
-          <a:prstGeom prst="rect">
-            <a:avLst/>
-          </a:prstGeom>
-          <a:noFill/>
-        </p:spPr>
-        <p:txBody>
-          <a:bodyPr wrap="square">
-            <a:spAutoFit/>
-          </a:bodyPr>
-          <a:lstStyle/>
-          <a:p>
-            <a:pPr>
-              <a:spcAft>
-                <a:spcPts val="630"/>
-              </a:spcAft>
-            </a:pPr>
-            <a:r>
-              <a:rPr sz="1400" b="1">
-                <a:solidFill>
-                  <a:srgbClr val="F4B183"/>
-                </a:solidFill>
-                <a:latin typeface="Nunito Sans"/>
-              </a:rPr>
-              <a:t>AHORA, LA HOJA DEL DÍA</a:t>
-            </a:r>
-          </a:p>
-        </p:txBody>
-      </p:sp>
-      <p:sp>
-        <p:nvSpPr>
-          <p:cNvPr id="3" name="TextBox 2"/>
-          <p:cNvSpPr txBox="1"/>
-          <p:nvPr/>
-        </p:nvSpPr>
-        <p:spPr>
-          <a:xfrm>
-            <a:off x="640000" y="760000"/>
-            <a:ext cx="10912000" cy="800000"/>
-          </a:xfrm>
-          <a:prstGeom prst="rect">
-            <a:avLst/>
-          </a:prstGeom>
-          <a:noFill/>
-        </p:spPr>
-        <p:txBody>
-          <a:bodyPr wrap="square">
-            <a:spAutoFit/>
-          </a:bodyPr>
-          <a:lstStyle/>
-          <a:p>
-            <a:pPr>
-              <a:spcAft>
-                <a:spcPts val="1710"/>
-              </a:spcAft>
-            </a:pPr>
-            <a:r>
-              <a:rPr sz="3800" b="1">
-                <a:solidFill>
-                  <a:srgbClr val="FBF7EF"/>
-                </a:solidFill>
-                <a:latin typeface="Fredoka"/>
-              </a:rPr>
-              <a:t>20 minutos · individual · en silencio</a:t>
-            </a:r>
-          </a:p>
-        </p:txBody>
-      </p:sp>
-      <p:sp>
-        <p:nvSpPr>
-          <p:cNvPr id="4" name="Rectangle 3"/>
-          <p:cNvSpPr/>
-          <p:nvPr/>
-        </p:nvSpPr>
-        <p:spPr>
-          <a:xfrm>
-            <a:off x="640000" y="2000000"/>
-            <a:ext cx="3504000" cy="1800000"/>
-          </a:xfrm>
-          <a:prstGeom prst="rect">
-            <a:avLst/>
-          </a:prstGeom>
-          <a:solidFill>
-            <a:srgbClr val="FBF7EF"/>
-          </a:solidFill>
-          <a:ln>
-            <a:noFill/>
-          </a:ln>
-        </p:spPr>
-        <p:style>
-          <a:lnRef idx="1">
-            <a:schemeClr val="accent1"/>
-          </a:lnRef>
-          <a:fillRef idx="3">
-            <a:schemeClr val="accent1"/>
-          </a:fillRef>
-          <a:effectRef idx="2">
-            <a:schemeClr val="accent1"/>
-          </a:effectRef>
-          <a:fontRef idx="minor">
-            <a:schemeClr val="lt1"/>
-          </a:fontRef>
-        </p:style>
-        <p:txBody>
-          <a:bodyPr rtlCol="0" anchor="ctr"/>
-          <a:lstStyle/>
-          <a:p>
-            <a:pPr algn="ctr"/>
-          </a:p>
-        </p:txBody>
-      </p:sp>
-      <p:sp>
-        <p:nvSpPr>
-          <p:cNvPr id="5" name="TextBox 4"/>
-          <p:cNvSpPr txBox="1"/>
-          <p:nvPr/>
-        </p:nvSpPr>
-        <p:spPr>
-          <a:xfrm>
-            <a:off x="790000" y="2100000"/>
-            <a:ext cx="3204000" cy="700000"/>
-          </a:xfrm>
-          <a:prstGeom prst="rect">
-            <a:avLst/>
-          </a:prstGeom>
-          <a:noFill/>
-        </p:spPr>
-        <p:txBody>
-          <a:bodyPr wrap="square">
-            <a:spAutoFit/>
-          </a:bodyPr>
-          <a:lstStyle/>
-          <a:p>
-            <a:pPr>
-              <a:spcAft>
-                <a:spcPts val="990"/>
-              </a:spcAft>
-            </a:pPr>
-            <a:r>
-              <a:rPr sz="2200" b="1">
-                <a:solidFill>
-                  <a:srgbClr val="E8793A"/>
-                </a:solidFill>
-                <a:latin typeface="Nunito Sans"/>
-              </a:rPr>
-              <a:t>Peldaño 1 · Todos</a:t>
-            </a:r>
-          </a:p>
-        </p:txBody>
-      </p:sp>
-      <p:sp>
-        <p:nvSpPr>
-          <p:cNvPr id="6" name="TextBox 5"/>
-          <p:cNvSpPr txBox="1"/>
-          <p:nvPr/>
-        </p:nvSpPr>
-        <p:spPr>
-          <a:xfrm>
-            <a:off x="790000" y="2900000"/>
-            <a:ext cx="3204000" cy="700000"/>
-          </a:xfrm>
-          <a:prstGeom prst="rect">
-            <a:avLst/>
-          </a:prstGeom>
-          <a:noFill/>
-        </p:spPr>
-        <p:txBody>
-          <a:bodyPr wrap="square">
-            <a:spAutoFit/>
-          </a:bodyPr>
-          <a:lstStyle/>
-          <a:p>
-            <a:pPr>
-              <a:spcAft>
-                <a:spcPts val="900"/>
-              </a:spcAft>
-            </a:pPr>
-            <a:r>
-              <a:rPr sz="2000" b="0">
-                <a:solidFill>
-                  <a:srgbClr val="4A5568"/>
-                </a:solidFill>
-                <a:latin typeface="Nunito Sans"/>
-              </a:rPr>
-              <a:t>6 puntos</a:t>
-            </a:r>
-          </a:p>
-        </p:txBody>
-      </p:sp>
-      <p:sp>
-        <p:nvSpPr>
-          <p:cNvPr id="7" name="Rectangle 6"/>
-          <p:cNvSpPr/>
-          <p:nvPr/>
-        </p:nvSpPr>
-        <p:spPr>
-          <a:xfrm>
-            <a:off x="4344000" y="2000000"/>
-            <a:ext cx="3504000" cy="1800000"/>
-          </a:xfrm>
-          <a:prstGeom prst="rect">
-            <a:avLst/>
-          </a:prstGeom>
-          <a:solidFill>
-            <a:srgbClr val="FBF7EF"/>
-          </a:solidFill>
-          <a:ln>
-            <a:noFill/>
-          </a:ln>
-        </p:spPr>
-        <p:style>
-          <a:lnRef idx="1">
-            <a:schemeClr val="accent1"/>
-          </a:lnRef>
-          <a:fillRef idx="3">
-            <a:schemeClr val="accent1"/>
-          </a:fillRef>
-          <a:effectRef idx="2">
-            <a:schemeClr val="accent1"/>
-          </a:effectRef>
-          <a:fontRef idx="minor">
-            <a:schemeClr val="lt1"/>
-          </a:fontRef>
-        </p:style>
-        <p:txBody>
-          <a:bodyPr rtlCol="0" anchor="ctr"/>
-          <a:lstStyle/>
-          <a:p>
-            <a:pPr algn="ctr"/>
-          </a:p>
-        </p:txBody>
-      </p:sp>
-      <p:sp>
-        <p:nvSpPr>
-          <p:cNvPr id="8" name="TextBox 7"/>
-          <p:cNvSpPr txBox="1"/>
-          <p:nvPr/>
-        </p:nvSpPr>
-        <p:spPr>
-          <a:xfrm>
-            <a:off x="4494000" y="2100000"/>
-            <a:ext cx="3204000" cy="700000"/>
-          </a:xfrm>
-          <a:prstGeom prst="rect">
-            <a:avLst/>
-          </a:prstGeom>
-          <a:noFill/>
-        </p:spPr>
-        <p:txBody>
-          <a:bodyPr wrap="square">
-            <a:spAutoFit/>
-          </a:bodyPr>
-          <a:lstStyle/>
-          <a:p>
-            <a:pPr>
-              <a:spcAft>
-                <a:spcPts val="990"/>
-              </a:spcAft>
-            </a:pPr>
-            <a:r>
-              <a:rPr sz="2200" b="1">
-                <a:solidFill>
-                  <a:srgbClr val="E8793A"/>
-                </a:solidFill>
-                <a:latin typeface="Nunito Sans"/>
-              </a:rPr>
-              <a:t>Peldaño 2 · Repaso</a:t>
-            </a:r>
-          </a:p>
-        </p:txBody>
-      </p:sp>
-      <p:sp>
-        <p:nvSpPr>
-          <p:cNvPr id="9" name="TextBox 8"/>
-          <p:cNvSpPr txBox="1"/>
-          <p:nvPr/>
-        </p:nvSpPr>
-        <p:spPr>
-          <a:xfrm>
-            <a:off x="4494000" y="2900000"/>
-            <a:ext cx="3204000" cy="700000"/>
-          </a:xfrm>
-          <a:prstGeom prst="rect">
-            <a:avLst/>
-          </a:prstGeom>
-          <a:noFill/>
-        </p:spPr>
-        <p:txBody>
-          <a:bodyPr wrap="square">
-            <a:spAutoFit/>
-          </a:bodyPr>
-          <a:lstStyle/>
-          <a:p>
-            <a:pPr>
-              <a:spcAft>
-                <a:spcPts val="900"/>
-              </a:spcAft>
-            </a:pPr>
-            <a:r>
-              <a:rPr sz="2000" b="0">
-                <a:solidFill>
-                  <a:srgbClr val="4A5568"/>
-                </a:solidFill>
-                <a:latin typeface="Nunito Sans"/>
-              </a:rPr>
-              <a:t>2 puntos</a:t>
-            </a:r>
-          </a:p>
-        </p:txBody>
-      </p:sp>
-      <p:sp>
-        <p:nvSpPr>
-          <p:cNvPr id="10" name="Rectangle 9"/>
-          <p:cNvSpPr/>
-          <p:nvPr/>
-        </p:nvSpPr>
-        <p:spPr>
-          <a:xfrm>
-            <a:off x="8048000" y="2000000"/>
-            <a:ext cx="3504000" cy="1800000"/>
-          </a:xfrm>
-          <a:prstGeom prst="rect">
-            <a:avLst/>
-          </a:prstGeom>
-          <a:solidFill>
-            <a:srgbClr val="FBF7EF"/>
-          </a:solidFill>
-          <a:ln>
-            <a:noFill/>
-          </a:ln>
-        </p:spPr>
-        <p:style>
-          <a:lnRef idx="1">
-            <a:schemeClr val="accent1"/>
-          </a:lnRef>
-          <a:fillRef idx="3">
-            <a:schemeClr val="accent1"/>
-          </a:fillRef>
-          <a:effectRef idx="2">
-            <a:schemeClr val="accent1"/>
-          </a:effectRef>
-          <a:fontRef idx="minor">
-            <a:schemeClr val="lt1"/>
-          </a:fontRef>
-        </p:style>
-        <p:txBody>
-          <a:bodyPr rtlCol="0" anchor="ctr"/>
-          <a:lstStyle/>
-          <a:p>
-            <a:pPr algn="ctr"/>
-          </a:p>
-        </p:txBody>
-      </p:sp>
-      <p:sp>
-        <p:nvSpPr>
-          <p:cNvPr id="11" name="TextBox 10"/>
-          <p:cNvSpPr txBox="1"/>
-          <p:nvPr/>
-        </p:nvSpPr>
-        <p:spPr>
-          <a:xfrm>
-            <a:off x="8198000" y="2100000"/>
-            <a:ext cx="3204000" cy="700000"/>
-          </a:xfrm>
-          <a:prstGeom prst="rect">
-            <a:avLst/>
-          </a:prstGeom>
-          <a:noFill/>
-        </p:spPr>
-        <p:txBody>
-          <a:bodyPr wrap="square">
-            <a:spAutoFit/>
-          </a:bodyPr>
-          <a:lstStyle/>
-          <a:p>
-            <a:pPr>
-              <a:spcAft>
-                <a:spcPts val="990"/>
-              </a:spcAft>
-            </a:pPr>
-            <a:r>
-              <a:rPr sz="2200" b="1">
-                <a:solidFill>
-                  <a:srgbClr val="E8793A"/>
-                </a:solidFill>
-                <a:latin typeface="Nunito Sans"/>
-              </a:rPr>
-              <a:t>Peldaño 3 · Reto</a:t>
-            </a:r>
-          </a:p>
-        </p:txBody>
-      </p:sp>
-      <p:sp>
-        <p:nvSpPr>
-          <p:cNvPr id="12" name="TextBox 11"/>
-          <p:cNvSpPr txBox="1"/>
-          <p:nvPr/>
-        </p:nvSpPr>
-        <p:spPr>
-          <a:xfrm>
-            <a:off x="8198000" y="2900000"/>
-            <a:ext cx="3204000" cy="700000"/>
-          </a:xfrm>
-          <a:prstGeom prst="rect">
-            <a:avLst/>
-          </a:prstGeom>
-          <a:noFill/>
-        </p:spPr>
-        <p:txBody>
-          <a:bodyPr wrap="square">
-            <a:spAutoFit/>
-          </a:bodyPr>
-          <a:lstStyle/>
-          <a:p>
-            <a:pPr>
-              <a:spcAft>
-                <a:spcPts val="900"/>
-              </a:spcAft>
-            </a:pPr>
-            <a:r>
-              <a:rPr sz="2000" b="0">
-                <a:solidFill>
-                  <a:srgbClr val="4A5568"/>
-                </a:solidFill>
-                <a:latin typeface="Nunito Sans"/>
-              </a:rPr>
-              <a:t>2 puntos</a:t>
-            </a:r>
-          </a:p>
-        </p:txBody>
-      </p:sp>
-      <p:sp>
-        <p:nvSpPr>
-          <p:cNvPr id="13" name="TextBox 12"/>
-          <p:cNvSpPr txBox="1"/>
-          <p:nvPr/>
-        </p:nvSpPr>
-        <p:spPr>
-          <a:xfrm>
-            <a:off x="640000" y="4200000"/>
-            <a:ext cx="10912000" cy="1500000"/>
-          </a:xfrm>
-          <a:prstGeom prst="rect">
-            <a:avLst/>
-          </a:prstGeom>
-          <a:noFill/>
-        </p:spPr>
-        <p:txBody>
-          <a:bodyPr wrap="square">
-            <a:spAutoFit/>
-          </a:bodyPr>
-          <a:lstStyle/>
-          <a:p>
-            <a:pPr>
-              <a:spcAft>
-                <a:spcPts val="990"/>
-              </a:spcAft>
-            </a:pPr>
-            <a:r>
-              <a:rPr sz="2200" b="0">
-                <a:solidFill>
-                  <a:srgbClr val="C9D3E6"/>
-                </a:solidFill>
-                <a:latin typeface="Nunito Sans"/>
-              </a:rPr>
-              <a:t>1.ª pasada: sin apuntes, con bolígrafo. 2.ª pasada: con los apuntes, en otro color. Marca «seguro» o «dudo» en cada respuesta.</a:t>
-            </a:r>
-          </a:p>
-        </p:txBody>
-      </p:sp>
-    </p:spTree>
-  </p:cSld>
-  <p:clrMapOvr>
-    <a:masterClrMapping/>
-  </p:clrMapOvr>
-</p:sld>
-</file>
-
-<file path=ppt/slides/slide2.xml><?xml version="1.0" encoding="utf-8"?>
-<p:sld xmlns:a="http://schemas.openxmlformats.org/drawingml/2006/main" xmlns:p="http://schemas.openxmlformats.org/presentationml/2006/main" xmlns:r="http://schemas.openxmlformats.org/officeDocument/2006/relationships">
-  <p:cSld>
-    <p:bg>
-      <p:bgPr>
-        <a:solidFill>
-          <a:srgbClr val="FBF7EF"/>
-        </a:solidFill>
-        <a:effectLst/>
-      </p:bgPr>
-    </p:bg>
-    <p:spTree>
-      <p:nvGrpSpPr>
-        <p:cNvPr id="1" name=""/>
-        <p:cNvGrpSpPr/>
-        <p:nvPr/>
-      </p:nvGrpSpPr>
-      <p:grpSpPr/>
-      <p:sp>
-        <p:nvSpPr>
-          <p:cNvPr id="2" name="TextBox 1"/>
-          <p:cNvSpPr txBox="1"/>
-          <p:nvPr/>
-        </p:nvSpPr>
-        <p:spPr>
-          <a:xfrm>
-            <a:off x="640000" y="380000"/>
-            <a:ext cx="10912000" cy="420000"/>
-          </a:xfrm>
-          <a:prstGeom prst="rect">
-            <a:avLst/>
-          </a:prstGeom>
-          <a:noFill/>
-        </p:spPr>
-        <p:txBody>
-          <a:bodyPr wrap="square">
-            <a:spAutoFit/>
-          </a:bodyPr>
-          <a:lstStyle/>
-          <a:p>
-            <a:pPr>
-              <a:spcAft>
-                <a:spcPts val="630"/>
-              </a:spcAft>
-            </a:pPr>
-            <a:r>
-              <a:rPr sz="1400" b="1">
-                <a:solidFill>
-                  <a:srgbClr val="E8793A"/>
-                </a:solidFill>
-                <a:latin typeface="Nunito Sans"/>
-              </a:rPr>
-              <a:t>ANTES DE EMPEZAR · SIN MIRAR</a:t>
-            </a:r>
-          </a:p>
-        </p:txBody>
-      </p:sp>
-      <p:sp>
-        <p:nvSpPr>
-          <p:cNvPr id="3" name="TextBox 2"/>
-          <p:cNvSpPr txBox="1"/>
-          <p:nvPr/>
-        </p:nvSpPr>
-        <p:spPr>
-          <a:xfrm>
-            <a:off x="640000" y="760000"/>
-            <a:ext cx="10912000" cy="800000"/>
-          </a:xfrm>
-          <a:prstGeom prst="rect">
-            <a:avLst/>
-          </a:prstGeom>
-          <a:noFill/>
-        </p:spPr>
-        <p:txBody>
-          <a:bodyPr wrap="square">
-            <a:spAutoFit/>
-          </a:bodyPr>
-          <a:lstStyle/>
-          <a:p>
-            <a:pPr>
-              <a:spcAft>
-                <a:spcPts val="1440"/>
-              </a:spcAft>
-            </a:pPr>
-            <a:r>
-              <a:rPr sz="3200" b="1">
-                <a:solidFill>
-                  <a:srgbClr val="1F2A44"/>
-                </a:solidFill>
-                <a:latin typeface="Fredoka"/>
-              </a:rPr>
-              <a:t>Escribe en tu hoja las palabras que faltan</a:t>
-            </a:r>
-          </a:p>
-        </p:txBody>
-      </p:sp>
-      <p:sp>
-        <p:nvSpPr>
-          <p:cNvPr id="4" name="TextBox 3"/>
-          <p:cNvSpPr txBox="1"/>
-          <p:nvPr/>
-        </p:nvSpPr>
-        <p:spPr>
-          <a:xfrm>
-            <a:off x="640000" y="1800000"/>
-            <a:ext cx="10912000" cy="4300000"/>
-          </a:xfrm>
-          <a:prstGeom prst="rect">
-            <a:avLst/>
-          </a:prstGeom>
-          <a:noFill/>
-        </p:spPr>
-        <p:txBody>
-          <a:bodyPr wrap="square">
-            <a:spAutoFit/>
-          </a:bodyPr>
-          <a:lstStyle/>
-          <a:p>
-            <a:pPr>
-              <a:spcAft>
-                <a:spcPts val="1170"/>
-              </a:spcAft>
-            </a:pPr>
-            <a:r>
-              <a:rPr sz="2600" b="1">
-                <a:solidFill>
-                  <a:srgbClr val="E8793A"/>
-                </a:solidFill>
-                <a:latin typeface="Nunito Sans"/>
-              </a:rPr>
-              <a:t>1. </a:t>
-            </a:r>
-            <a:r>
-              <a:rPr sz="2600" b="0">
-                <a:solidFill>
-                  <a:srgbClr val="1F2A44"/>
-                </a:solidFill>
-                <a:latin typeface="Nunito Sans"/>
-              </a:rPr>
-              <a:t>Explicaciones que olvida la causa falsa: la casualidad, una ______ causa o que sea al revés.  (sesión 22)</a:t>
-            </a:r>
-          </a:p>
-          <a:p>
-            <a:pPr>
-              <a:spcAft>
-                <a:spcPts val="1170"/>
-              </a:spcAft>
-            </a:pPr>
-            <a:r>
-              <a:rPr sz="2600" b="1">
-                <a:solidFill>
-                  <a:srgbClr val="E8793A"/>
-                </a:solidFill>
-                <a:latin typeface="Nunito Sans"/>
-              </a:rPr>
-              <a:t>2. </a:t>
-            </a:r>
-            <a:r>
-              <a:rPr sz="2600" b="0">
-                <a:solidFill>
-                  <a:srgbClr val="1F2A44"/>
-                </a:solidFill>
-                <a:latin typeface="Nunito Sans"/>
-              </a:rPr>
-              <a:t>La causa falsa cree que una cosa ______ otra solo porque pasó antes o van juntas.  (sesión 22)</a:t>
-            </a:r>
-          </a:p>
-          <a:p>
-            <a:pPr>
-              <a:spcAft>
-                <a:spcPts val="1170"/>
-              </a:spcAft>
-            </a:pPr>
-            <a:r>
-              <a:rPr sz="2600" b="1">
-                <a:solidFill>
-                  <a:srgbClr val="E8793A"/>
-                </a:solidFill>
-                <a:latin typeface="Nunito Sans"/>
-              </a:rPr>
-              <a:t>3. </a:t>
-            </a:r>
-            <a:r>
-              <a:rPr sz="2600" b="0">
-                <a:solidFill>
-                  <a:srgbClr val="1F2A44"/>
-                </a:solidFill>
-                <a:latin typeface="Nunito Sans"/>
-              </a:rPr>
-              <a:t>Para tumbar un «todos», ______ uno.  (sesión 11)</a:t>
-            </a:r>
-          </a:p>
-        </p:txBody>
-      </p:sp>
-    </p:spTree>
-  </p:cSld>
-  <p:clrMapOvr>
-    <a:masterClrMapping/>
-  </p:clrMapOvr>
-</p:sld>
-</file>
-
-<file path=ppt/slides/slide3.xml><?xml version="1.0" encoding="utf-8"?>
-<p:sld xmlns:a="http://schemas.openxmlformats.org/drawingml/2006/main" xmlns:p="http://schemas.openxmlformats.org/presentationml/2006/main" xmlns:r="http://schemas.openxmlformats.org/officeDocument/2006/relationships">
-  <p:cSld>
-    <p:bg>
-      <p:bgPr>
-        <a:solidFill>
-          <a:srgbClr val="FBF7EF"/>
-        </a:solidFill>
-        <a:effectLst/>
-      </p:bgPr>
-    </p:bg>
-    <p:spTree>
-      <p:nvGrpSpPr>
-        <p:cNvPr id="1" name=""/>
-        <p:cNvGrpSpPr/>
-        <p:nvPr/>
-      </p:nvGrpSpPr>
-      <p:grpSpPr/>
-      <p:sp>
-        <p:nvSpPr>
-          <p:cNvPr id="2" name="TextBox 1"/>
-          <p:cNvSpPr txBox="1"/>
-          <p:nvPr/>
-        </p:nvSpPr>
-        <p:spPr>
-          <a:xfrm>
-            <a:off x="640000" y="380000"/>
-            <a:ext cx="10912000" cy="420000"/>
-          </a:xfrm>
-          <a:prstGeom prst="rect">
-            <a:avLst/>
-          </a:prstGeom>
-          <a:noFill/>
-        </p:spPr>
-        <p:txBody>
-          <a:bodyPr wrap="square">
-            <a:spAutoFit/>
-          </a:bodyPr>
-          <a:lstStyle/>
-          <a:p>
-            <a:pPr>
-              <a:spcAft>
-                <a:spcPts val="630"/>
-              </a:spcAft>
-            </a:pPr>
-            <a:r>
-              <a:rPr sz="1400" b="1">
-                <a:solidFill>
-                  <a:srgbClr val="E8793A"/>
-                </a:solidFill>
-                <a:latin typeface="Nunito Sans"/>
-              </a:rPr>
-              <a:t>ANTES DE EMPEZAR · SIN MIRAR</a:t>
-            </a:r>
-          </a:p>
-        </p:txBody>
-      </p:sp>
-      <p:sp>
-        <p:nvSpPr>
-          <p:cNvPr id="3" name="TextBox 2"/>
-          <p:cNvSpPr txBox="1"/>
-          <p:nvPr/>
-        </p:nvSpPr>
-        <p:spPr>
-          <a:xfrm>
-            <a:off x="640000" y="760000"/>
-            <a:ext cx="10912000" cy="800000"/>
-          </a:xfrm>
-          <a:prstGeom prst="rect">
-            <a:avLst/>
-          </a:prstGeom>
-          <a:noFill/>
-        </p:spPr>
-        <p:txBody>
-          <a:bodyPr wrap="square">
-            <a:spAutoFit/>
-          </a:bodyPr>
-          <a:lstStyle/>
-          <a:p>
-            <a:pPr>
-              <a:spcAft>
-                <a:spcPts val="1440"/>
-              </a:spcAft>
-            </a:pPr>
-            <a:r>
-              <a:rPr sz="3200" b="1">
-                <a:solidFill>
-                  <a:srgbClr val="1F2A44"/>
-                </a:solidFill>
-                <a:latin typeface="Fredoka"/>
-              </a:rPr>
-              <a:t>Corrige con otro color</a:t>
-            </a:r>
-          </a:p>
-        </p:txBody>
-      </p:sp>
-      <p:sp>
-        <p:nvSpPr>
-          <p:cNvPr id="4" name="TextBox 3"/>
-          <p:cNvSpPr txBox="1"/>
-          <p:nvPr/>
-        </p:nvSpPr>
-        <p:spPr>
-          <a:xfrm>
-            <a:off x="640000" y="1800000"/>
-            <a:ext cx="10912000" cy="4300000"/>
-          </a:xfrm>
-          <a:prstGeom prst="rect">
-            <a:avLst/>
-          </a:prstGeom>
-          <a:noFill/>
-        </p:spPr>
-        <p:txBody>
-          <a:bodyPr wrap="square">
-            <a:spAutoFit/>
-          </a:bodyPr>
-          <a:lstStyle/>
-          <a:p>
-            <a:pPr>
-              <a:spcAft>
-                <a:spcPts val="1170"/>
-              </a:spcAft>
-            </a:pPr>
-            <a:r>
-              <a:rPr sz="2600" b="1">
-                <a:solidFill>
-                  <a:srgbClr val="E8793A"/>
-                </a:solidFill>
-                <a:latin typeface="Nunito Sans"/>
-              </a:rPr>
-              <a:t>1. </a:t>
-            </a:r>
-            <a:r>
-              <a:rPr sz="2600" b="0">
-                <a:solidFill>
-                  <a:srgbClr val="1F2A44"/>
-                </a:solidFill>
-                <a:latin typeface="Nunito Sans"/>
-              </a:rPr>
-              <a:t>Explicaciones que olvida la causa falsa: la casualidad, una </a:t>
-            </a:r>
-            <a:r>
-              <a:rPr sz="2600" b="1">
-                <a:solidFill>
-                  <a:srgbClr val="1F2A44"/>
-                </a:solidFill>
-                <a:latin typeface="Nunito Sans"/>
-              </a:rPr>
-              <a:t>tercera</a:t>
-            </a:r>
-            <a:r>
-              <a:rPr sz="2600" b="0">
-                <a:solidFill>
-                  <a:srgbClr val="1F2A44"/>
-                </a:solidFill>
-                <a:latin typeface="Nunito Sans"/>
-              </a:rPr>
-              <a:t> causa o que sea al revés.  (sesión 22)</a:t>
-            </a:r>
-          </a:p>
-          <a:p>
-            <a:pPr>
-              <a:spcAft>
-                <a:spcPts val="1170"/>
-              </a:spcAft>
-            </a:pPr>
-            <a:r>
-              <a:rPr sz="2600" b="1">
-                <a:solidFill>
-                  <a:srgbClr val="E8793A"/>
-                </a:solidFill>
-                <a:latin typeface="Nunito Sans"/>
-              </a:rPr>
-              <a:t>2. </a:t>
-            </a:r>
-            <a:r>
-              <a:rPr sz="2600" b="0">
-                <a:solidFill>
-                  <a:srgbClr val="1F2A44"/>
-                </a:solidFill>
-                <a:latin typeface="Nunito Sans"/>
-              </a:rPr>
-              <a:t>La causa falsa cree que una cosa </a:t>
-            </a:r>
-            <a:r>
-              <a:rPr sz="2600" b="1">
-                <a:solidFill>
-                  <a:srgbClr val="1F2A44"/>
-                </a:solidFill>
-                <a:latin typeface="Nunito Sans"/>
-              </a:rPr>
-              <a:t>causa</a:t>
-            </a:r>
-            <a:r>
-              <a:rPr sz="2600" b="0">
-                <a:solidFill>
-                  <a:srgbClr val="1F2A44"/>
-                </a:solidFill>
-                <a:latin typeface="Nunito Sans"/>
-              </a:rPr>
-              <a:t> otra solo porque pasó antes o van juntas.  (sesión 22)</a:t>
-            </a:r>
-          </a:p>
-          <a:p>
-            <a:pPr>
-              <a:spcAft>
-                <a:spcPts val="1170"/>
-              </a:spcAft>
-            </a:pPr>
-            <a:r>
-              <a:rPr sz="2600" b="1">
-                <a:solidFill>
-                  <a:srgbClr val="E8793A"/>
-                </a:solidFill>
-                <a:latin typeface="Nunito Sans"/>
-              </a:rPr>
-              <a:t>3. </a:t>
-            </a:r>
-            <a:r>
-              <a:rPr sz="2600" b="0">
-                <a:solidFill>
-                  <a:srgbClr val="1F2A44"/>
-                </a:solidFill>
-                <a:latin typeface="Nunito Sans"/>
-              </a:rPr>
-              <a:t>Para tumbar un «todos», </a:t>
-            </a:r>
-            <a:r>
-              <a:rPr sz="2600" b="1">
-                <a:solidFill>
-                  <a:srgbClr val="1F2A44"/>
-                </a:solidFill>
-                <a:latin typeface="Nunito Sans"/>
-              </a:rPr>
-              <a:t>basta</a:t>
-            </a:r>
-            <a:r>
-              <a:rPr sz="2600" b="0">
-                <a:solidFill>
-                  <a:srgbClr val="1F2A44"/>
-                </a:solidFill>
-                <a:latin typeface="Nunito Sans"/>
-              </a:rPr>
-              <a:t> uno.  (sesión 11)</a:t>
-            </a:r>
-          </a:p>
-        </p:txBody>
-      </p:sp>
-    </p:spTree>
-  </p:cSld>
-  <p:clrMapOvr>
-    <a:masterClrMapping/>
-  </p:clrMapOvr>
-</p:sld>
-</file>
-
-<file path=ppt/slides/slide4.xml><?xml version="1.0" encoding="utf-8"?>
-<p:sld xmlns:a="http://schemas.openxmlformats.org/drawingml/2006/main" xmlns:p="http://schemas.openxmlformats.org/presentationml/2006/main" xmlns:r="http://schemas.openxmlformats.org/officeDocument/2006/relationships">
-  <p:cSld>
-    <p:bg>
-      <p:bgPr>
-        <a:solidFill>
-          <a:srgbClr val="FBF7EF"/>
-        </a:solidFill>
-        <a:effectLst/>
-      </p:bgPr>
-    </p:bg>
-    <p:spTree>
-      <p:nvGrpSpPr>
-        <p:cNvPr id="1" name=""/>
-        <p:cNvGrpSpPr/>
-        <p:nvPr/>
-      </p:nvGrpSpPr>
-      <p:grpSpPr/>
-      <p:sp>
-        <p:nvSpPr>
-          <p:cNvPr id="2" name="TextBox 1"/>
-          <p:cNvSpPr txBox="1"/>
-          <p:nvPr/>
-        </p:nvSpPr>
-        <p:spPr>
-          <a:xfrm>
-            <a:off x="640000" y="380000"/>
-            <a:ext cx="10912000" cy="420000"/>
-          </a:xfrm>
-          <a:prstGeom prst="rect">
-            <a:avLst/>
-          </a:prstGeom>
-          <a:noFill/>
-        </p:spPr>
-        <p:txBody>
-          <a:bodyPr wrap="square">
-            <a:spAutoFit/>
-          </a:bodyPr>
-          <a:lstStyle/>
-          <a:p>
-            <a:pPr>
-              <a:spcAft>
-                <a:spcPts val="630"/>
-              </a:spcAft>
-            </a:pPr>
-            <a:r>
-              <a:rPr sz="1400" b="1">
-                <a:solidFill>
-                  <a:srgbClr val="E8793A"/>
-                </a:solidFill>
-                <a:latin typeface="Nunito Sans"/>
-              </a:rPr>
-              <a:t>PARA EMPEZAR</a:t>
-            </a:r>
-          </a:p>
-        </p:txBody>
-      </p:sp>
-      <p:sp>
-        <p:nvSpPr>
-          <p:cNvPr id="3" name="Rectangle 2"/>
-          <p:cNvSpPr/>
-          <p:nvPr/>
-        </p:nvSpPr>
-        <p:spPr>
-          <a:xfrm>
-            <a:off x="640000" y="1300000"/>
-            <a:ext cx="90000" cy="2400000"/>
-          </a:xfrm>
-          <a:prstGeom prst="rect">
-            <a:avLst/>
-          </a:prstGeom>
-          <a:solidFill>
-            <a:srgbClr val="E8793A"/>
-          </a:solidFill>
-          <a:ln>
-            <a:noFill/>
-          </a:ln>
-        </p:spPr>
-        <p:style>
-          <a:lnRef idx="1">
-            <a:schemeClr val="accent1"/>
-          </a:lnRef>
-          <a:fillRef idx="3">
-            <a:schemeClr val="accent1"/>
-          </a:fillRef>
-          <a:effectRef idx="2">
-            <a:schemeClr val="accent1"/>
-          </a:effectRef>
-          <a:fontRef idx="minor">
-            <a:schemeClr val="lt1"/>
-          </a:fontRef>
-        </p:style>
-        <p:txBody>
-          <a:bodyPr rtlCol="0" anchor="ctr"/>
-          <a:lstStyle/>
-          <a:p>
-            <a:pPr algn="ctr"/>
-          </a:p>
-        </p:txBody>
-      </p:sp>
-      <p:sp>
-        <p:nvSpPr>
-          <p:cNvPr id="4" name="TextBox 3"/>
-          <p:cNvSpPr txBox="1"/>
-          <p:nvPr/>
-        </p:nvSpPr>
-        <p:spPr>
-          <a:xfrm>
-            <a:off x="940000" y="1300000"/>
-            <a:ext cx="10612000" cy="2600000"/>
-          </a:xfrm>
-          <a:prstGeom prst="rect">
-            <a:avLst/>
-          </a:prstGeom>
-          <a:noFill/>
-        </p:spPr>
-        <p:txBody>
-          <a:bodyPr wrap="square" anchor="ctr">
-            <a:spAutoFit/>
-          </a:bodyPr>
-          <a:lstStyle/>
-          <a:p>
-            <a:pPr>
-              <a:spcAft>
-                <a:spcPts val="1530"/>
-              </a:spcAft>
-            </a:pPr>
-            <a:r>
-              <a:rPr sz="3400" b="1">
-                <a:solidFill>
-                  <a:srgbClr val="1F2A44"/>
-                </a:solidFill>
-                <a:latin typeface="Nunito Sans"/>
-              </a:rPr>
-              <a:t>«Los fantasmas existen: nadie ha demostrado nunca que no existan.»</a:t>
-            </a:r>
-          </a:p>
-        </p:txBody>
-      </p:sp>
-      <p:sp>
-        <p:nvSpPr>
-          <p:cNvPr id="5" name="TextBox 4"/>
-          <p:cNvSpPr txBox="1"/>
-          <p:nvPr/>
-        </p:nvSpPr>
-        <p:spPr>
-          <a:xfrm>
-            <a:off x="640000" y="4300000"/>
-            <a:ext cx="10912000" cy="1200000"/>
-          </a:xfrm>
-          <a:prstGeom prst="rect">
-            <a:avLst/>
-          </a:prstGeom>
-          <a:noFill/>
-        </p:spPr>
-        <p:txBody>
-          <a:bodyPr wrap="square">
-            <a:spAutoFit/>
-          </a:bodyPr>
-          <a:lstStyle/>
-          <a:p>
-            <a:pPr>
-              <a:spcAft>
-                <a:spcPts val="1170"/>
-              </a:spcAft>
-            </a:pPr>
-            <a:r>
-              <a:rPr sz="2600" b="0">
-                <a:solidFill>
-                  <a:srgbClr val="4A5568"/>
-                </a:solidFill>
-                <a:latin typeface="Nunito Sans"/>
-              </a:rPr>
-              <a:t>¿Que nadie lo haya demostrado es una prueba de que existen?</a:t>
-            </a:r>
-          </a:p>
-        </p:txBody>
-      </p:sp>
-    </p:spTree>
-  </p:cSld>
-  <p:clrMapOvr>
-    <a:masterClrMapping/>
-  </p:clrMapOvr>
-</p:sld>
-</file>
-
-<file path=ppt/slides/slide5.xml><?xml version="1.0" encoding="utf-8"?>
-<p:sld xmlns:a="http://schemas.openxmlformats.org/drawingml/2006/main" xmlns:p="http://schemas.openxmlformats.org/presentationml/2006/main" xmlns:r="http://schemas.openxmlformats.org/officeDocument/2006/relationships">
-  <p:cSld>
-    <p:bg>
-      <p:bgPr>
-        <a:solidFill>
-          <a:srgbClr val="1F2A44"/>
-        </a:solidFill>
-        <a:effectLst/>
-      </p:bgPr>
-    </p:bg>
-    <p:spTree>
-      <p:nvGrpSpPr>
-        <p:cNvPr id="1" name=""/>
-        <p:cNvGrpSpPr/>
-        <p:nvPr/>
-      </p:nvGrpSpPr>
-      <p:grpSpPr/>
-      <p:sp>
-        <p:nvSpPr>
-          <p:cNvPr id="2" name="TextBox 1"/>
-          <p:cNvSpPr txBox="1"/>
-          <p:nvPr/>
-        </p:nvSpPr>
-        <p:spPr>
-          <a:xfrm>
-            <a:off x="640000" y="2300000"/>
-            <a:ext cx="10912000" cy="500000"/>
-          </a:xfrm>
-          <a:prstGeom prst="rect">
-            <a:avLst/>
-          </a:prstGeom>
-          <a:noFill/>
-        </p:spPr>
-        <p:txBody>
-          <a:bodyPr wrap="square">
-            <a:spAutoFit/>
-          </a:bodyPr>
-          <a:lstStyle/>
-          <a:p>
-            <a:pPr>
-              <a:spcAft>
-                <a:spcPts val="810"/>
-              </a:spcAft>
-            </a:pPr>
-            <a:r>
-              <a:rPr sz="1800" b="1">
-                <a:solidFill>
-                  <a:srgbClr val="F4B183"/>
-                </a:solidFill>
-                <a:latin typeface="Nunito Sans"/>
-              </a:rPr>
-              <a:t>BLOQUE 1</a:t>
-            </a:r>
-          </a:p>
-        </p:txBody>
-      </p:sp>
-      <p:sp>
-        <p:nvSpPr>
-          <p:cNvPr id="3" name="TextBox 2"/>
-          <p:cNvSpPr txBox="1"/>
-          <p:nvPr/>
-        </p:nvSpPr>
-        <p:spPr>
-          <a:xfrm>
-            <a:off x="640000" y="2800000"/>
-            <a:ext cx="10912000" cy="800000"/>
-          </a:xfrm>
-          <a:prstGeom prst="rect">
-            <a:avLst/>
-          </a:prstGeom>
-          <a:noFill/>
-        </p:spPr>
-        <p:txBody>
-          <a:bodyPr wrap="square">
-            <a:spAutoFit/>
-          </a:bodyPr>
-          <a:lstStyle/>
-          <a:p>
-            <a:pPr>
-              <a:spcAft>
-                <a:spcPts val="2160"/>
-              </a:spcAft>
-            </a:pPr>
-            <a:r>
-              <a:rPr sz="4800" b="1">
-                <a:solidFill>
-                  <a:srgbClr val="FBF7EF"/>
-                </a:solidFill>
-                <a:latin typeface="Fredoka"/>
-              </a:rPr>
-              <a:t>Dos falacias sin pruebas</a:t>
-            </a:r>
-          </a:p>
-        </p:txBody>
-      </p:sp>
-    </p:spTree>
-  </p:cSld>
-  <p:clrMapOvr>
-    <a:masterClrMapping/>
-  </p:clrMapOvr>
-</p:sld>
-</file>
-
-<file path=ppt/slides/slide6.xml><?xml version="1.0" encoding="utf-8"?>
-<p:sld xmlns:a="http://schemas.openxmlformats.org/drawingml/2006/main" xmlns:p="http://schemas.openxmlformats.org/presentationml/2006/main" xmlns:r="http://schemas.openxmlformats.org/officeDocument/2006/relationships">
-  <p:cSld>
-    <p:bg>
-      <p:bgPr>
-        <a:solidFill>
-          <a:srgbClr val="FBF7EF"/>
-        </a:solidFill>
-        <a:effectLst/>
-      </p:bgPr>
-    </p:bg>
-    <p:spTree>
-      <p:nvGrpSpPr>
-        <p:cNvPr id="1" name=""/>
-        <p:cNvGrpSpPr/>
-        <p:nvPr/>
-      </p:nvGrpSpPr>
-      <p:grpSpPr/>
-      <p:sp>
-        <p:nvSpPr>
-          <p:cNvPr id="2" name="TextBox 1"/>
-          <p:cNvSpPr txBox="1"/>
-          <p:nvPr/>
-        </p:nvSpPr>
-        <p:spPr>
-          <a:xfrm>
-            <a:off x="640000" y="380000"/>
-            <a:ext cx="10912000" cy="420000"/>
-          </a:xfrm>
-          <a:prstGeom prst="rect">
-            <a:avLst/>
-          </a:prstGeom>
-          <a:noFill/>
-        </p:spPr>
-        <p:txBody>
-          <a:bodyPr wrap="square">
-            <a:spAutoFit/>
-          </a:bodyPr>
-          <a:lstStyle/>
-          <a:p>
-            <a:pPr>
-              <a:spcAft>
-                <a:spcPts val="630"/>
-              </a:spcAft>
-            </a:pPr>
-            <a:r>
-              <a:rPr sz="1400" b="1">
-                <a:solidFill>
-                  <a:srgbClr val="E8793A"/>
-                </a:solidFill>
-                <a:latin typeface="Nunito Sans"/>
-              </a:rPr>
-              <a:t>BLOQUE 1 · DOS FALACIAS SIN PRUEBAS</a:t>
-            </a:r>
-          </a:p>
-        </p:txBody>
-      </p:sp>
-      <p:sp>
-        <p:nvSpPr>
-          <p:cNvPr id="3" name="TextBox 2"/>
-          <p:cNvSpPr txBox="1"/>
-          <p:nvPr/>
-        </p:nvSpPr>
-        <p:spPr>
-          <a:xfrm>
-            <a:off x="640000" y="760000"/>
-            <a:ext cx="10912000" cy="800000"/>
-          </a:xfrm>
-          <a:prstGeom prst="rect">
-            <a:avLst/>
-          </a:prstGeom>
-          <a:noFill/>
-        </p:spPr>
-        <p:txBody>
-          <a:bodyPr wrap="square">
-            <a:spAutoFit/>
-          </a:bodyPr>
-          <a:lstStyle/>
-          <a:p>
-            <a:pPr>
-              <a:spcAft>
-                <a:spcPts val="1710"/>
-              </a:spcAft>
-            </a:pPr>
-            <a:r>
-              <a:rPr sz="3800" b="1">
-                <a:solidFill>
-                  <a:srgbClr val="1F2A44"/>
-                </a:solidFill>
-                <a:latin typeface="Fredoka"/>
-              </a:rPr>
-              <a:t>Apelación a la ignorancia (ad ignorantiam)</a:t>
-            </a:r>
-          </a:p>
-        </p:txBody>
-      </p:sp>
-      <p:sp>
-        <p:nvSpPr>
-          <p:cNvPr id="4" name="Rectangle 3"/>
-          <p:cNvSpPr/>
-          <p:nvPr/>
-        </p:nvSpPr>
-        <p:spPr>
-          <a:xfrm>
-            <a:off x="640000" y="1650000"/>
-            <a:ext cx="10912000" cy="1150000"/>
-          </a:xfrm>
-          <a:prstGeom prst="rect">
-            <a:avLst/>
-          </a:prstGeom>
-          <a:solidFill>
-            <a:srgbClr val="EAF0F7"/>
-          </a:solidFill>
-          <a:ln>
-            <a:noFill/>
-          </a:ln>
-        </p:spPr>
-        <p:style>
-          <a:lnRef idx="1">
-            <a:schemeClr val="accent1"/>
-          </a:lnRef>
-          <a:fillRef idx="3">
-            <a:schemeClr val="accent1"/>
-          </a:fillRef>
-          <a:effectRef idx="2">
-            <a:schemeClr val="accent1"/>
-          </a:effectRef>
-          <a:fontRef idx="minor">
-            <a:schemeClr val="lt1"/>
-          </a:fontRef>
-        </p:style>
-        <p:txBody>
-          <a:bodyPr rtlCol="0" anchor="ctr"/>
-          <a:lstStyle/>
-          <a:p>
-            <a:pPr algn="ctr"/>
-          </a:p>
-        </p:txBody>
-      </p:sp>
-      <p:sp>
-        <p:nvSpPr>
-          <p:cNvPr id="5" name="TextBox 4"/>
-          <p:cNvSpPr txBox="1"/>
-          <p:nvPr/>
-        </p:nvSpPr>
-        <p:spPr>
-          <a:xfrm>
-            <a:off x="840000" y="1730000"/>
-            <a:ext cx="10512000" cy="1000000"/>
-          </a:xfrm>
-          <a:prstGeom prst="rect">
-            <a:avLst/>
-          </a:prstGeom>
-          <a:noFill/>
-        </p:spPr>
-        <p:txBody>
-          <a:bodyPr wrap="square" anchor="ctr">
-            <a:spAutoFit/>
-          </a:bodyPr>
-          <a:lstStyle/>
-          <a:p>
-            <a:pPr>
-              <a:spcAft>
-                <a:spcPts val="1260"/>
-              </a:spcAft>
-            </a:pPr>
-            <a:r>
-              <a:rPr sz="2800" b="1">
-                <a:solidFill>
-                  <a:srgbClr val="1F2A44"/>
-                </a:solidFill>
-                <a:latin typeface="Nunito Sans"/>
-              </a:rPr>
-              <a:t>Decir que algo es verdad porque nadie ha demostrado que sea falso, o al revés.</a:t>
-            </a:r>
-          </a:p>
-        </p:txBody>
-      </p:sp>
-      <p:sp>
-        <p:nvSpPr>
-          <p:cNvPr id="6" name="TextBox 5"/>
-          <p:cNvSpPr txBox="1"/>
-          <p:nvPr/>
-        </p:nvSpPr>
-        <p:spPr>
-          <a:xfrm>
-            <a:off x="640000" y="3000000"/>
-            <a:ext cx="10912000" cy="3458000"/>
-          </a:xfrm>
-          <a:prstGeom prst="rect">
-            <a:avLst/>
-          </a:prstGeom>
-          <a:noFill/>
-        </p:spPr>
-        <p:txBody>
-          <a:bodyPr wrap="square">
-            <a:spAutoFit/>
-          </a:bodyPr>
-          <a:lstStyle/>
-          <a:p>
-            <a:pPr>
-              <a:spcAft>
-                <a:spcPts val="1260"/>
-              </a:spcAft>
-            </a:pPr>
-            <a:r>
-              <a:rPr sz="2800" b="1">
-                <a:solidFill>
-                  <a:srgbClr val="E8793A"/>
-                </a:solidFill>
-                <a:latin typeface="Nunito Sans"/>
-              </a:rPr>
-              <a:t>• </a:t>
-            </a:r>
-            <a:r>
-              <a:rPr sz="2800" b="1">
-                <a:solidFill>
-                  <a:srgbClr val="1F2A44"/>
-                </a:solidFill>
-                <a:latin typeface="Nunito Sans"/>
-              </a:rPr>
-              <a:t>Ignorancia</a:t>
-            </a:r>
-            <a:r>
-              <a:rPr sz="2800" b="0">
-                <a:solidFill>
-                  <a:srgbClr val="1F2A44"/>
-                </a:solidFill>
-                <a:latin typeface="Nunito Sans"/>
-              </a:rPr>
-              <a:t>: no saber algo</a:t>
-            </a:r>
-          </a:p>
-          <a:p>
-            <a:pPr>
-              <a:spcAft>
-                <a:spcPts val="1260"/>
-              </a:spcAft>
-            </a:pPr>
-            <a:r>
-              <a:rPr sz="2800" b="1">
-                <a:solidFill>
-                  <a:srgbClr val="E8793A"/>
-                </a:solidFill>
-                <a:latin typeface="Nunito Sans"/>
-              </a:rPr>
-              <a:t>• </a:t>
-            </a:r>
-            <a:r>
-              <a:rPr sz="2800" b="0">
-                <a:solidFill>
-                  <a:srgbClr val="1F2A44"/>
-                </a:solidFill>
-                <a:latin typeface="Nunito Sans"/>
-              </a:rPr>
-              <a:t>No saber que es falso </a:t>
-            </a:r>
-            <a:r>
-              <a:rPr sz="2800" b="1">
-                <a:solidFill>
-                  <a:srgbClr val="1F2A44"/>
-                </a:solidFill>
-                <a:latin typeface="Nunito Sans"/>
-              </a:rPr>
-              <a:t>no</a:t>
-            </a:r>
-            <a:r>
-              <a:rPr sz="2800" b="0">
-                <a:solidFill>
-                  <a:srgbClr val="1F2A44"/>
-                </a:solidFill>
-                <a:latin typeface="Nunito Sans"/>
-              </a:rPr>
-              <a:t> lo hace verdadero</a:t>
-            </a:r>
-          </a:p>
-          <a:p>
-            <a:pPr>
-              <a:spcAft>
-                <a:spcPts val="1260"/>
-              </a:spcAft>
-            </a:pPr>
-            <a:r>
-              <a:rPr sz="2800" b="1">
-                <a:solidFill>
-                  <a:srgbClr val="E8793A"/>
-                </a:solidFill>
-                <a:latin typeface="Nunito Sans"/>
-              </a:rPr>
-              <a:t>• </a:t>
-            </a:r>
-            <a:r>
-              <a:rPr sz="2800" b="0">
-                <a:solidFill>
-                  <a:srgbClr val="1F2A44"/>
-                </a:solidFill>
-                <a:latin typeface="Nunito Sans"/>
-              </a:rPr>
-              <a:t>Normalmente, quien afirma algo tiene que dar las </a:t>
-            </a:r>
-            <a:r>
-              <a:rPr sz="2800" b="1">
-                <a:solidFill>
-                  <a:srgbClr val="1F2A44"/>
-                </a:solidFill>
-                <a:latin typeface="Nunito Sans"/>
-              </a:rPr>
-              <a:t>pruebas</a:t>
-            </a:r>
-          </a:p>
-          <a:p>
-            <a:pPr>
-              <a:spcAft>
-                <a:spcPts val="1260"/>
-              </a:spcAft>
-            </a:pPr>
-            <a:r>
-              <a:rPr sz="2800" b="1">
-                <a:solidFill>
-                  <a:srgbClr val="E8793A"/>
-                </a:solidFill>
-                <a:latin typeface="Nunito Sans"/>
-              </a:rPr>
-              <a:t>• </a:t>
-            </a:r>
-            <a:r>
-              <a:rPr sz="2800" b="0">
-                <a:solidFill>
-                  <a:srgbClr val="1F2A44"/>
-                </a:solidFill>
-                <a:latin typeface="Nunito Sans"/>
-              </a:rPr>
-              <a:t>Pregunta: </a:t>
-            </a:r>
-            <a:r>
-              <a:rPr sz="2800" b="1">
-                <a:solidFill>
-                  <a:srgbClr val="1F2A44"/>
-                </a:solidFill>
-                <a:latin typeface="Nunito Sans"/>
-              </a:rPr>
-              <a:t>¿cómo lo sabes? ¿Qué pruebas hay a favor?</a:t>
-            </a:r>
-          </a:p>
-        </p:txBody>
-      </p:sp>
-    </p:spTree>
-  </p:cSld>
-  <p:clrMapOvr>
-    <a:masterClrMapping/>
-  </p:clrMapOvr>
-</p:sld>
-</file>
-
-<file path=ppt/slides/slide7.xml><?xml version="1.0" encoding="utf-8"?>
-<p:sld xmlns:a="http://schemas.openxmlformats.org/drawingml/2006/main" xmlns:p="http://schemas.openxmlformats.org/presentationml/2006/main" xmlns:r="http://schemas.openxmlformats.org/officeDocument/2006/relationships">
-  <p:cSld>
-    <p:bg>
-      <p:bgPr>
-        <a:solidFill>
-          <a:srgbClr val="FBF7EF"/>
-        </a:solidFill>
-        <a:effectLst/>
-      </p:bgPr>
-    </p:bg>
-    <p:spTree>
-      <p:nvGrpSpPr>
-        <p:cNvPr id="1" name=""/>
-        <p:cNvGrpSpPr/>
-        <p:nvPr/>
-      </p:nvGrpSpPr>
-      <p:grpSpPr/>
-      <p:sp>
-        <p:nvSpPr>
-          <p:cNvPr id="2" name="TextBox 1"/>
-          <p:cNvSpPr txBox="1"/>
-          <p:nvPr/>
-        </p:nvSpPr>
-        <p:spPr>
-          <a:xfrm>
-            <a:off x="640000" y="380000"/>
-            <a:ext cx="10912000" cy="420000"/>
-          </a:xfrm>
-          <a:prstGeom prst="rect">
-            <a:avLst/>
-          </a:prstGeom>
-          <a:noFill/>
-        </p:spPr>
-        <p:txBody>
-          <a:bodyPr wrap="square">
-            <a:spAutoFit/>
-          </a:bodyPr>
-          <a:lstStyle/>
-          <a:p>
-            <a:pPr>
-              <a:spcAft>
-                <a:spcPts val="630"/>
-              </a:spcAft>
-            </a:pPr>
-            <a:r>
-              <a:rPr sz="1400" b="1">
-                <a:solidFill>
-                  <a:srgbClr val="E8793A"/>
-                </a:solidFill>
-                <a:latin typeface="Nunito Sans"/>
-              </a:rPr>
-              <a:t>BLOQUE 1 · DOS FALACIAS SIN PRUEBAS</a:t>
-            </a:r>
-          </a:p>
-        </p:txBody>
-      </p:sp>
-      <p:sp>
-        <p:nvSpPr>
-          <p:cNvPr id="3" name="TextBox 2"/>
-          <p:cNvSpPr txBox="1"/>
-          <p:nvPr/>
-        </p:nvSpPr>
-        <p:spPr>
-          <a:xfrm>
-            <a:off x="640000" y="760000"/>
-            <a:ext cx="10912000" cy="800000"/>
-          </a:xfrm>
-          <a:prstGeom prst="rect">
-            <a:avLst/>
-          </a:prstGeom>
-          <a:noFill/>
-        </p:spPr>
-        <p:txBody>
-          <a:bodyPr wrap="square">
-            <a:spAutoFit/>
-          </a:bodyPr>
-          <a:lstStyle/>
-          <a:p>
-            <a:pPr>
-              <a:spcAft>
-                <a:spcPts val="1710"/>
-              </a:spcAft>
-            </a:pPr>
-            <a:r>
-              <a:rPr sz="3800" b="1">
-                <a:solidFill>
-                  <a:srgbClr val="1F2A44"/>
-                </a:solidFill>
-                <a:latin typeface="Fredoka"/>
-              </a:rPr>
-              <a:t>Razonamiento circular (petitio principii)</a:t>
-            </a:r>
-          </a:p>
-        </p:txBody>
-      </p:sp>
-      <p:sp>
-        <p:nvSpPr>
-          <p:cNvPr id="4" name="Rectangle 3"/>
-          <p:cNvSpPr/>
-          <p:nvPr/>
-        </p:nvSpPr>
-        <p:spPr>
-          <a:xfrm>
-            <a:off x="640000" y="1650000"/>
-            <a:ext cx="10912000" cy="1150000"/>
-          </a:xfrm>
-          <a:prstGeom prst="rect">
-            <a:avLst/>
-          </a:prstGeom>
-          <a:solidFill>
-            <a:srgbClr val="EAF0F7"/>
-          </a:solidFill>
-          <a:ln>
-            <a:noFill/>
-          </a:ln>
-        </p:spPr>
-        <p:style>
-          <a:lnRef idx="1">
-            <a:schemeClr val="accent1"/>
-          </a:lnRef>
-          <a:fillRef idx="3">
-            <a:schemeClr val="accent1"/>
-          </a:fillRef>
-          <a:effectRef idx="2">
-            <a:schemeClr val="accent1"/>
-          </a:effectRef>
-          <a:fontRef idx="minor">
-            <a:schemeClr val="lt1"/>
-          </a:fontRef>
-        </p:style>
-        <p:txBody>
-          <a:bodyPr rtlCol="0" anchor="ctr"/>
-          <a:lstStyle/>
-          <a:p>
-            <a:pPr algn="ctr"/>
-          </a:p>
-        </p:txBody>
-      </p:sp>
-      <p:sp>
-        <p:nvSpPr>
-          <p:cNvPr id="5" name="TextBox 4"/>
-          <p:cNvSpPr txBox="1"/>
-          <p:nvPr/>
-        </p:nvSpPr>
-        <p:spPr>
-          <a:xfrm>
-            <a:off x="840000" y="1730000"/>
-            <a:ext cx="10512000" cy="1000000"/>
-          </a:xfrm>
-          <a:prstGeom prst="rect">
-            <a:avLst/>
-          </a:prstGeom>
-          <a:noFill/>
-        </p:spPr>
-        <p:txBody>
-          <a:bodyPr wrap="square" anchor="ctr">
-            <a:spAutoFit/>
-          </a:bodyPr>
-          <a:lstStyle/>
-          <a:p>
-            <a:pPr>
-              <a:spcAft>
-                <a:spcPts val="1260"/>
-              </a:spcAft>
-            </a:pPr>
-            <a:r>
-              <a:rPr sz="2800" b="1">
-                <a:solidFill>
-                  <a:srgbClr val="1F2A44"/>
-                </a:solidFill>
-                <a:latin typeface="Nunito Sans"/>
-              </a:rPr>
-              <a:t>Usar la conclusión como razón: la conclusión ya está escondida en la premisa.</a:t>
-            </a:r>
-          </a:p>
-        </p:txBody>
-      </p:sp>
-      <p:sp>
-        <p:nvSpPr>
-          <p:cNvPr id="6" name="TextBox 5"/>
-          <p:cNvSpPr txBox="1"/>
-          <p:nvPr/>
-        </p:nvSpPr>
-        <p:spPr>
-          <a:xfrm>
-            <a:off x="640000" y="3000000"/>
-            <a:ext cx="10912000" cy="3458000"/>
-          </a:xfrm>
-          <a:prstGeom prst="rect">
-            <a:avLst/>
-          </a:prstGeom>
-          <a:noFill/>
-        </p:spPr>
-        <p:txBody>
-          <a:bodyPr wrap="square">
-            <a:spAutoFit/>
-          </a:bodyPr>
-          <a:lstStyle/>
-          <a:p>
-            <a:pPr>
-              <a:spcAft>
-                <a:spcPts val="1260"/>
-              </a:spcAft>
-            </a:pPr>
-            <a:r>
-              <a:rPr sz="2800" b="1">
-                <a:solidFill>
-                  <a:srgbClr val="E8793A"/>
-                </a:solidFill>
-                <a:latin typeface="Nunito Sans"/>
-              </a:rPr>
-              <a:t>• </a:t>
-            </a:r>
-            <a:r>
-              <a:rPr sz="2800" b="0">
-                <a:solidFill>
-                  <a:srgbClr val="1F2A44"/>
-                </a:solidFill>
-                <a:latin typeface="Nunito Sans"/>
-              </a:rPr>
-              <a:t>También se llama </a:t>
-            </a:r>
-            <a:r>
-              <a:rPr sz="2800" b="1">
-                <a:solidFill>
-                  <a:srgbClr val="1F2A44"/>
-                </a:solidFill>
-                <a:latin typeface="Nunito Sans"/>
-              </a:rPr>
-              <a:t>petición de principio</a:t>
-            </a:r>
-          </a:p>
-          <a:p>
-            <a:pPr>
-              <a:spcAft>
-                <a:spcPts val="1260"/>
-              </a:spcAft>
-            </a:pPr>
-            <a:r>
-              <a:rPr sz="2800" b="1">
-                <a:solidFill>
-                  <a:srgbClr val="E8793A"/>
-                </a:solidFill>
-                <a:latin typeface="Nunito Sans"/>
-              </a:rPr>
-              <a:t>• </a:t>
-            </a:r>
-            <a:r>
-              <a:rPr sz="2800" b="0">
-                <a:solidFill>
-                  <a:srgbClr val="1F2A44"/>
-                </a:solidFill>
-                <a:latin typeface="Nunito Sans"/>
-              </a:rPr>
-              <a:t>Da vueltas en </a:t>
-            </a:r>
-            <a:r>
-              <a:rPr sz="2800" b="1">
-                <a:solidFill>
-                  <a:srgbClr val="1F2A44"/>
-                </a:solidFill>
-                <a:latin typeface="Nunito Sans"/>
-              </a:rPr>
-              <a:t>círculo</a:t>
-            </a:r>
-            <a:r>
-              <a:rPr sz="2800" b="0">
-                <a:solidFill>
-                  <a:srgbClr val="1F2A44"/>
-                </a:solidFill>
-                <a:latin typeface="Nunito Sans"/>
-              </a:rPr>
-              <a:t> y no avanza</a:t>
-            </a:r>
-          </a:p>
-          <a:p>
-            <a:pPr>
-              <a:spcAft>
-                <a:spcPts val="1260"/>
-              </a:spcAft>
-            </a:pPr>
-            <a:r>
-              <a:rPr sz="2800" b="1">
-                <a:solidFill>
-                  <a:srgbClr val="E8793A"/>
-                </a:solidFill>
-                <a:latin typeface="Nunito Sans"/>
-              </a:rPr>
-              <a:t>• </a:t>
-            </a:r>
-            <a:r>
-              <a:rPr sz="2800" b="0">
-                <a:solidFill>
-                  <a:srgbClr val="1F2A44"/>
-                </a:solidFill>
-                <a:latin typeface="Nunito Sans"/>
-              </a:rPr>
-              <a:t>Dice lo mismo con otras palabras</a:t>
-            </a:r>
-          </a:p>
-          <a:p>
-            <a:pPr>
-              <a:spcAft>
-                <a:spcPts val="1260"/>
-              </a:spcAft>
-            </a:pPr>
-            <a:r>
-              <a:rPr sz="2800" b="1">
-                <a:solidFill>
-                  <a:srgbClr val="E8793A"/>
-                </a:solidFill>
-                <a:latin typeface="Nunito Sans"/>
-              </a:rPr>
-              <a:t>• </a:t>
-            </a:r>
-            <a:r>
-              <a:rPr sz="2800" b="0">
-                <a:solidFill>
-                  <a:srgbClr val="1F2A44"/>
-                </a:solidFill>
-                <a:latin typeface="Nunito Sans"/>
-              </a:rPr>
-              <a:t>Pregunta: </a:t>
-            </a:r>
-            <a:r>
-              <a:rPr sz="2800" b="1">
-                <a:solidFill>
-                  <a:srgbClr val="1F2A44"/>
-                </a:solidFill>
-                <a:latin typeface="Nunito Sans"/>
-              </a:rPr>
-              <a:t>¿la razón dice algo distinto de la conclusión?</a:t>
-            </a:r>
-          </a:p>
-        </p:txBody>
-      </p:sp>
-    </p:spTree>
-  </p:cSld>
-  <p:clrMapOvr>
-    <a:masterClrMapping/>
-  </p:clrMapOvr>
-</p:sld>
-</file>
-
-<file path=ppt/slides/slide8.xml><?xml version="1.0" encoding="utf-8"?>
-<p:sld xmlns:a="http://schemas.openxmlformats.org/drawingml/2006/main" xmlns:p="http://schemas.openxmlformats.org/presentationml/2006/main" xmlns:r="http://schemas.openxmlformats.org/officeDocument/2006/relationships">
-  <p:cSld>
-    <p:bg>
-      <p:bgPr>
-        <a:solidFill>
-          <a:srgbClr val="FBF7EF"/>
-        </a:solidFill>
-        <a:effectLst/>
-      </p:bgPr>
-    </p:bg>
-    <p:spTree>
-      <p:nvGrpSpPr>
-        <p:cNvPr id="1" name=""/>
-        <p:cNvGrpSpPr/>
-        <p:nvPr/>
-      </p:nvGrpSpPr>
-      <p:grpSpPr/>
-      <p:sp>
-        <p:nvSpPr>
-          <p:cNvPr id="2" name="TextBox 1"/>
-          <p:cNvSpPr txBox="1"/>
-          <p:nvPr/>
-        </p:nvSpPr>
-        <p:spPr>
-          <a:xfrm>
-            <a:off x="640000" y="380000"/>
-            <a:ext cx="10912000" cy="420000"/>
-          </a:xfrm>
-          <a:prstGeom prst="rect">
-            <a:avLst/>
-          </a:prstGeom>
-          <a:noFill/>
-        </p:spPr>
-        <p:txBody>
-          <a:bodyPr wrap="square">
-            <a:spAutoFit/>
-          </a:bodyPr>
-          <a:lstStyle/>
-          <a:p>
-            <a:pPr>
-              <a:spcAft>
-                <a:spcPts val="630"/>
-              </a:spcAft>
-            </a:pPr>
-            <a:r>
-              <a:rPr sz="1400" b="1">
-                <a:solidFill>
-                  <a:srgbClr val="E8793A"/>
-                </a:solidFill>
-                <a:latin typeface="Nunito Sans"/>
-              </a:rPr>
-              <a:t>BLOQUE 1 · DOS FALACIAS SIN PRUEBAS</a:t>
-            </a:r>
-          </a:p>
-        </p:txBody>
-      </p:sp>
-      <p:sp>
-        <p:nvSpPr>
-          <p:cNvPr id="3" name="TextBox 2"/>
-          <p:cNvSpPr txBox="1"/>
-          <p:nvPr/>
-        </p:nvSpPr>
-        <p:spPr>
-          <a:xfrm>
-            <a:off x="640000" y="760000"/>
-            <a:ext cx="10912000" cy="800000"/>
-          </a:xfrm>
-          <a:prstGeom prst="rect">
-            <a:avLst/>
-          </a:prstGeom>
-          <a:noFill/>
-        </p:spPr>
-        <p:txBody>
-          <a:bodyPr wrap="square">
-            <a:spAutoFit/>
-          </a:bodyPr>
-          <a:lstStyle/>
-          <a:p>
-            <a:pPr>
-              <a:spcAft>
-                <a:spcPts val="1710"/>
-              </a:spcAft>
-            </a:pPr>
-            <a:r>
-              <a:rPr sz="3800" b="1">
-                <a:solidFill>
-                  <a:srgbClr val="1F2A44"/>
-                </a:solidFill>
-                <a:latin typeface="Fredoka"/>
-              </a:rPr>
-              <a:t>Las dos, de un vistazo</a:t>
+              <a:t>Lo que llevamos de unidad</a:t>
             </a:r>
           </a:p>
         </p:txBody>
@@ -7940,7 +4455,7 @@
         </p:nvGraphicFramePr>
         <p:xfrm>
           <a:off x="640000" y="1700000"/>
-          <a:ext cx="10912000" cy="1800000"/>
+          <a:ext cx="10912000" cy="2400000"/>
         </p:xfrm>
         <a:graphic>
           <a:graphicData uri="http://schemas.openxmlformats.org/drawingml/2006/table">
@@ -7949,9 +4464,8 @@
                 <a:tableStyleId>{5C22544A-7EE6-4342-B048-85BDC9FD1C3A}</a:tableStyleId>
               </a:tblPr>
               <a:tblGrid>
-                <a:gridCol w="3637333"/>
-                <a:gridCol w="3637333"/>
-                <a:gridCol w="3637334"/>
+                <a:gridCol w="5456000"/>
+                <a:gridCol w="5456000"/>
               </a:tblGrid>
               <a:tr h="600000">
                 <a:tc>
@@ -7988,29 +4502,7 @@
                           </a:solidFill>
                           <a:latin typeface="Fredoka"/>
                         </a:rPr>
-                        <a:t>Esquema</a:t>
-                      </a:r>
-                    </a:p>
-                  </a:txBody>
-                  <a:tcPr>
-                    <a:solidFill>
-                      <a:srgbClr val="1F2A44"/>
-                    </a:solidFill>
-                  </a:tcPr>
-                </a:tc>
-                <a:tc>
-                  <a:txBody>
-                    <a:bodyPr/>
-                    <a:lstStyle/>
-                    <a:p>
-                      <a:r>
-                        <a:rPr sz="2000" b="1">
-                          <a:solidFill>
-                            <a:srgbClr val="FBF7EF"/>
-                          </a:solidFill>
-                          <a:latin typeface="Fredoka"/>
-                        </a:rPr>
-                        <a:t>Ejemplo</a:t>
+                        <a:t>Qué hace</a:t>
                       </a:r>
                     </a:p>
                   </a:txBody>
@@ -8034,7 +4526,7 @@
                           </a:solidFill>
                           <a:latin typeface="Nunito Sans"/>
                         </a:rPr>
-                        <a:t>Ignorancia</a:t>
+                        <a:t>Ataque a la persona (sesión 20)</a:t>
                       </a:r>
                     </a:p>
                   </a:txBody>
@@ -8056,29 +4548,16 @@
                           </a:solidFill>
                           <a:latin typeface="Nunito Sans"/>
                         </a:rPr>
-                        <a:t>Nadie ha demostrado que no, luego sí</a:t>
+                        <a:t>Cambia el tema </a:t>
                       </a:r>
-                    </a:p>
-                  </a:txBody>
-                  <a:tcPr>
-                    <a:solidFill>
-                      <a:srgbClr val="FFFFFF"/>
-                    </a:solidFill>
-                  </a:tcPr>
-                </a:tc>
-                <a:tc>
-                  <a:txBody>
-                    <a:bodyPr/>
-                    <a:lstStyle/>
-                    <a:p>
                       <a:r>
-                        <a:rPr sz="2000" b="0">
+                        <a:rPr sz="2000" b="1">
                           <a:solidFill>
                             <a:srgbClr val="1F2A44"/>
                           </a:solidFill>
                           <a:latin typeface="Nunito Sans"/>
                         </a:rPr>
-                        <a:t>«Nadie ha probado que el horóscopo falle»</a:t>
+                        <a:t>a la persona</a:t>
                       </a:r>
                     </a:p>
                   </a:txBody>
@@ -8102,7 +4581,7 @@
                           </a:solidFill>
                           <a:latin typeface="Nunito Sans"/>
                         </a:rPr>
-                        <a:t>Circular</a:t>
+                        <a:t>Hombre de paja (sesión 21)</a:t>
                       </a:r>
                     </a:p>
                   </a:txBody>
@@ -8124,13 +4603,55 @@
                           </a:solidFill>
                           <a:latin typeface="Nunito Sans"/>
                         </a:rPr>
-                        <a:t>A es verdad porque A</a:t>
+                        <a:t>Cambia </a:t>
+                      </a:r>
+                      <a:r>
+                        <a:rPr sz="2000" b="1">
+                          <a:solidFill>
+                            <a:srgbClr val="1F2A44"/>
+                          </a:solidFill>
+                          <a:latin typeface="Nunito Sans"/>
+                        </a:rPr>
+                        <a:t>la idea</a:t>
+                      </a:r>
+                      <a:r>
+                        <a:rPr sz="2000" b="0">
+                          <a:solidFill>
+                            <a:srgbClr val="1F2A44"/>
+                          </a:solidFill>
+                          <a:latin typeface="Nunito Sans"/>
+                        </a:rPr>
+                        <a:t> por otra peor</a:t>
                       </a:r>
                     </a:p>
                   </a:txBody>
                   <a:tcPr>
                     <a:solidFill>
                       <a:srgbClr val="EAF0F7"/>
+                    </a:solidFill>
+                  </a:tcPr>
+                </a:tc>
+              </a:tr>
+              <a:tr h="600000">
+                <a:tc>
+                  <a:txBody>
+                    <a:bodyPr/>
+                    <a:lstStyle/>
+                    <a:p>
+                      <a:r>
+                        <a:rPr sz="2000" b="0">
+                          <a:solidFill>
+                            <a:srgbClr val="1F2A44"/>
+                          </a:solidFill>
+                          <a:latin typeface="Nunito Sans"/>
+                        </a:rPr>
+                        <a:t>Pista falsa</a:t>
+                      </a:r>
+                    </a:p>
+                  </a:txBody>
+                  <a:tcPr>
+                    <a:solidFill>
+                      <a:srgbClr val="FFFFFF"/>
                     </a:solidFill>
                   </a:tcPr>
                 </a:tc>
@@ -8146,13 +4667,31 @@
                           </a:solidFill>
                           <a:latin typeface="Nunito Sans"/>
                         </a:rPr>
-                        <a:t>«Es el mejor youtuber porque nadie es mejor»</a:t>
+                        <a:t>Cambia </a:t>
+                      </a:r>
+                      <a:r>
+                        <a:rPr sz="2000" b="1">
+                          <a:solidFill>
+                            <a:srgbClr val="1F2A44"/>
+                          </a:solidFill>
+                          <a:latin typeface="Nunito Sans"/>
+                        </a:rPr>
+                        <a:t>de tema</a:t>
+                      </a:r>
+                      <a:r>
+                        <a:rPr sz="2000" b="0">
+                          <a:solidFill>
+                            <a:srgbClr val="1F2A44"/>
+                          </a:solidFill>
+                          <a:latin typeface="Nunito Sans"/>
+                        </a:rPr>
+                        <a:t> del todo</a:t>
                       </a:r>
                     </a:p>
                   </a:txBody>
                   <a:tcPr>
                     <a:solidFill>
-                      <a:srgbClr val="EAF0F7"/>
+                      <a:srgbClr val="FFFFFF"/>
                     </a:solidFill>
                   </a:tcPr>
                 </a:tc>
@@ -8169,7 +4708,647 @@
 </p:sld>
 </file>
 
-<file path=ppt/slides/slide9.xml><?xml version="1.0" encoding="utf-8"?>
+<file path=ppt/slides/slide14.xml><?xml version="1.0" encoding="utf-8"?>
+<p:sld xmlns:a="http://schemas.openxmlformats.org/drawingml/2006/main" xmlns:p="http://schemas.openxmlformats.org/presentationml/2006/main" xmlns:r="http://schemas.openxmlformats.org/officeDocument/2006/relationships">
+  <p:cSld>
+    <p:bg>
+      <p:bgPr>
+        <a:solidFill>
+          <a:srgbClr val="F6C9A8"/>
+        </a:solidFill>
+        <a:effectLst/>
+      </p:bgPr>
+    </p:bg>
+    <p:spTree>
+      <p:nvGrpSpPr>
+        <p:cNvPr id="1" name=""/>
+        <p:cNvGrpSpPr/>
+        <p:nvPr/>
+      </p:nvGrpSpPr>
+      <p:grpSpPr/>
+      <p:sp>
+        <p:nvSpPr>
+          <p:cNvPr id="2" name="TextBox 1"/>
+          <p:cNvSpPr txBox="1"/>
+          <p:nvPr/>
+        </p:nvSpPr>
+        <p:spPr>
+          <a:xfrm>
+            <a:off x="640000" y="380000"/>
+            <a:ext cx="10912000" cy="420000"/>
+          </a:xfrm>
+          <a:prstGeom prst="rect">
+            <a:avLst/>
+          </a:prstGeom>
+          <a:noFill/>
+        </p:spPr>
+        <p:txBody>
+          <a:bodyPr wrap="square">
+            <a:spAutoFit/>
+          </a:bodyPr>
+          <a:lstStyle/>
+          <a:p>
+            <a:pPr>
+              <a:spcAft>
+                <a:spcPts val="630"/>
+              </a:spcAft>
+            </a:pPr>
+            <a:r>
+              <a:rPr sz="1400" b="1">
+                <a:solidFill>
+                  <a:srgbClr val="1F2A44"/>
+                </a:solidFill>
+                <a:latin typeface="Nunito Sans"/>
+              </a:rPr>
+              <a:t>CASO TRAMPA · BLOQUE 3 · TRES FORMAS DE NO RESPONDER</a:t>
+            </a:r>
+          </a:p>
+        </p:txBody>
+      </p:sp>
+      <p:sp>
+        <p:nvSpPr>
+          <p:cNvPr id="3" name="TextBox 2"/>
+          <p:cNvSpPr txBox="1"/>
+          <p:nvPr/>
+        </p:nvSpPr>
+        <p:spPr>
+          <a:xfrm>
+            <a:off x="640000" y="760000"/>
+            <a:ext cx="10912000" cy="800000"/>
+          </a:xfrm>
+          <a:prstGeom prst="rect">
+            <a:avLst/>
+          </a:prstGeom>
+          <a:noFill/>
+        </p:spPr>
+        <p:txBody>
+          <a:bodyPr wrap="square">
+            <a:spAutoFit/>
+          </a:bodyPr>
+          <a:lstStyle/>
+          <a:p>
+            <a:pPr>
+              <a:spcAft>
+                <a:spcPts val="1710"/>
+              </a:spcAft>
+            </a:pPr>
+            <a:r>
+              <a:rPr sz="3800" b="1">
+                <a:solidFill>
+                  <a:srgbClr val="1F2A44"/>
+                </a:solidFill>
+                <a:latin typeface="Fredoka"/>
+              </a:rPr>
+              <a:t>⚠ ¿Habla de otra cosa?</a:t>
+            </a:r>
+          </a:p>
+        </p:txBody>
+      </p:sp>
+      <p:sp>
+        <p:nvSpPr>
+          <p:cNvPr id="4" name="Rectangle 3"/>
+          <p:cNvSpPr/>
+          <p:nvPr/>
+        </p:nvSpPr>
+        <p:spPr>
+          <a:xfrm>
+            <a:off x="640000" y="1600000"/>
+            <a:ext cx="10912000" cy="1100000"/>
+          </a:xfrm>
+          <a:prstGeom prst="rect">
+            <a:avLst/>
+          </a:prstGeom>
+          <a:solidFill>
+            <a:srgbClr val="FBF7EF"/>
+          </a:solidFill>
+          <a:ln>
+            <a:noFill/>
+          </a:ln>
+        </p:spPr>
+        <p:style>
+          <a:lnRef idx="1">
+            <a:schemeClr val="accent1"/>
+          </a:lnRef>
+          <a:fillRef idx="3">
+            <a:schemeClr val="accent1"/>
+          </a:fillRef>
+          <a:effectRef idx="2">
+            <a:schemeClr val="accent1"/>
+          </a:effectRef>
+          <a:fontRef idx="minor">
+            <a:schemeClr val="lt1"/>
+          </a:fontRef>
+        </p:style>
+        <p:txBody>
+          <a:bodyPr rtlCol="0" anchor="ctr"/>
+          <a:lstStyle/>
+          <a:p>
+            <a:pPr algn="ctr"/>
+          </a:p>
+        </p:txBody>
+      </p:sp>
+      <p:sp>
+        <p:nvSpPr>
+          <p:cNvPr id="5" name="TextBox 4"/>
+          <p:cNvSpPr txBox="1"/>
+          <p:nvPr/>
+        </p:nvSpPr>
+        <p:spPr>
+          <a:xfrm>
+            <a:off x="840000" y="1650000"/>
+            <a:ext cx="10512000" cy="1000000"/>
+          </a:xfrm>
+          <a:prstGeom prst="rect">
+            <a:avLst/>
+          </a:prstGeom>
+          <a:noFill/>
+        </p:spPr>
+        <p:txBody>
+          <a:bodyPr wrap="square" anchor="ctr">
+            <a:spAutoFit/>
+          </a:bodyPr>
+          <a:lstStyle/>
+          <a:p>
+            <a:pPr>
+              <a:spcAft>
+                <a:spcPts val="1170"/>
+              </a:spcAft>
+            </a:pPr>
+            <a:r>
+              <a:rPr sz="2600" b="1">
+                <a:solidFill>
+                  <a:srgbClr val="1F2A44"/>
+                </a:solidFill>
+                <a:latin typeface="Nunito Sans"/>
+              </a:rPr>
+              <a:t>La madre de una chica: «¿Has hecho los deberes de Matemáticas?». La chica: «La profe de Mates está de baja toda la semana».</a:t>
+            </a:r>
+          </a:p>
+        </p:txBody>
+      </p:sp>
+      <p:sp>
+        <p:nvSpPr>
+          <p:cNvPr id="6" name="TextBox 5"/>
+          <p:cNvSpPr txBox="1"/>
+          <p:nvPr/>
+        </p:nvSpPr>
+        <p:spPr>
+          <a:xfrm>
+            <a:off x="640000" y="2900000"/>
+            <a:ext cx="10912000" cy="3500000"/>
+          </a:xfrm>
+          <a:prstGeom prst="rect">
+            <a:avLst/>
+          </a:prstGeom>
+          <a:noFill/>
+        </p:spPr>
+        <p:txBody>
+          <a:bodyPr wrap="square">
+            <a:spAutoFit/>
+          </a:bodyPr>
+          <a:lstStyle/>
+          <a:p>
+            <a:pPr>
+              <a:spcAft>
+                <a:spcPts val="1080"/>
+              </a:spcAft>
+            </a:pPr>
+            <a:r>
+              <a:rPr sz="2400" b="1">
+                <a:solidFill>
+                  <a:srgbClr val="E8793A"/>
+                </a:solidFill>
+                <a:latin typeface="Nunito Sans"/>
+              </a:rPr>
+              <a:t>1. </a:t>
+            </a:r>
+            <a:r>
+              <a:rPr sz="2400" b="0">
+                <a:solidFill>
+                  <a:srgbClr val="1F2A44"/>
+                </a:solidFill>
+                <a:latin typeface="Nunito Sans"/>
+              </a:rPr>
+              <a:t>No dice ni «sí» ni «no». ¿Es una pista falsa?</a:t>
+            </a:r>
+          </a:p>
+          <a:p>
+            <a:pPr>
+              <a:spcAft>
+                <a:spcPts val="1080"/>
+              </a:spcAft>
+            </a:pPr>
+            <a:r>
+              <a:rPr sz="2400" b="1">
+                <a:solidFill>
+                  <a:srgbClr val="E8793A"/>
+                </a:solidFill>
+                <a:latin typeface="Nunito Sans"/>
+              </a:rPr>
+              <a:t>2. </a:t>
+            </a:r>
+            <a:r>
+              <a:rPr sz="2400" b="0">
+                <a:solidFill>
+                  <a:srgbClr val="1F2A44"/>
+                </a:solidFill>
+                <a:latin typeface="Nunito Sans"/>
+              </a:rPr>
+              <a:t>Parece que cambia de tema: habla de la profesora.</a:t>
+            </a:r>
+          </a:p>
+          <a:p>
+            <a:pPr>
+              <a:spcAft>
+                <a:spcPts val="1080"/>
+              </a:spcAft>
+            </a:pPr>
+            <a:r>
+              <a:rPr sz="2400" b="1">
+                <a:solidFill>
+                  <a:srgbClr val="E8793A"/>
+                </a:solidFill>
+                <a:latin typeface="Nunito Sans"/>
+              </a:rPr>
+              <a:t>3. </a:t>
+            </a:r>
+            <a:r>
+              <a:rPr sz="2400" b="0">
+                <a:solidFill>
+                  <a:srgbClr val="1F2A44"/>
+                </a:solidFill>
+                <a:latin typeface="Nunito Sans"/>
+              </a:rPr>
+              <a:t>Pero puede ser una respuesta: si la profe no está, quizá no ha mandado deberes.</a:t>
+            </a:r>
+          </a:p>
+          <a:p>
+            <a:pPr>
+              <a:spcAft>
+                <a:spcPts val="1080"/>
+              </a:spcAft>
+            </a:pPr>
+            <a:r>
+              <a:rPr sz="2400" b="1">
+                <a:solidFill>
+                  <a:srgbClr val="E8793A"/>
+                </a:solidFill>
+                <a:latin typeface="Nunito Sans"/>
+              </a:rPr>
+              <a:t>4. </a:t>
+            </a:r>
+            <a:r>
+              <a:rPr sz="2400" b="0">
+                <a:solidFill>
+                  <a:srgbClr val="1F2A44"/>
+                </a:solidFill>
+                <a:latin typeface="Nunito Sans"/>
+              </a:rPr>
+              <a:t>La madre puede comprobarlo: «¿Entonces no tienes deberes?».</a:t>
+            </a:r>
+          </a:p>
+          <a:p>
+            <a:pPr>
+              <a:spcAft>
+                <a:spcPts val="1080"/>
+              </a:spcAft>
+            </a:pPr>
+            <a:r>
+              <a:rPr sz="2400" b="1">
+                <a:solidFill>
+                  <a:srgbClr val="E8793A"/>
+                </a:solidFill>
+                <a:latin typeface="Nunito Sans"/>
+              </a:rPr>
+              <a:t>5. </a:t>
+            </a:r>
+            <a:r>
+              <a:rPr sz="2400" b="0">
+                <a:solidFill>
+                  <a:srgbClr val="1F2A44"/>
+                </a:solidFill>
+                <a:latin typeface="Nunito Sans"/>
+              </a:rPr>
+              <a:t>Conclusión: antes de decir «pista falsa», mira si la respuesta tiene que ver, aunque no lo parezca.</a:t>
+            </a:r>
+          </a:p>
+        </p:txBody>
+      </p:sp>
+    </p:spTree>
+  </p:cSld>
+  <p:clrMapOvr>
+    <a:masterClrMapping/>
+  </p:clrMapOvr>
+</p:sld>
+</file>
+
+<file path=ppt/slides/slide15.xml><?xml version="1.0" encoding="utf-8"?>
+<p:sld xmlns:a="http://schemas.openxmlformats.org/drawingml/2006/main" xmlns:p="http://schemas.openxmlformats.org/presentationml/2006/main" xmlns:r="http://schemas.openxmlformats.org/officeDocument/2006/relationships">
+  <p:cSld>
+    <p:bg>
+      <p:bgPr>
+        <a:solidFill>
+          <a:srgbClr val="FBF7EF"/>
+        </a:solidFill>
+        <a:effectLst/>
+      </p:bgPr>
+    </p:bg>
+    <p:spTree>
+      <p:nvGrpSpPr>
+        <p:cNvPr id="1" name=""/>
+        <p:cNvGrpSpPr/>
+        <p:nvPr/>
+      </p:nvGrpSpPr>
+      <p:grpSpPr/>
+      <p:sp>
+        <p:nvSpPr>
+          <p:cNvPr id="2" name="TextBox 1"/>
+          <p:cNvSpPr txBox="1"/>
+          <p:nvPr/>
+        </p:nvSpPr>
+        <p:spPr>
+          <a:xfrm>
+            <a:off x="640000" y="380000"/>
+            <a:ext cx="10912000" cy="420000"/>
+          </a:xfrm>
+          <a:prstGeom prst="rect">
+            <a:avLst/>
+          </a:prstGeom>
+          <a:noFill/>
+        </p:spPr>
+        <p:txBody>
+          <a:bodyPr wrap="square">
+            <a:spAutoFit/>
+          </a:bodyPr>
+          <a:lstStyle/>
+          <a:p>
+            <a:pPr>
+              <a:spcAft>
+                <a:spcPts val="630"/>
+              </a:spcAft>
+            </a:pPr>
+            <a:r>
+              <a:rPr sz="1400" b="1">
+                <a:solidFill>
+                  <a:srgbClr val="E8793A"/>
+                </a:solidFill>
+                <a:latin typeface="Nunito Sans"/>
+              </a:rPr>
+              <a:t>LO DE HOY EN TRES LÍNEAS</a:t>
+            </a:r>
+          </a:p>
+        </p:txBody>
+      </p:sp>
+      <p:sp>
+        <p:nvSpPr>
+          <p:cNvPr id="3" name="TextBox 2"/>
+          <p:cNvSpPr txBox="1"/>
+          <p:nvPr/>
+        </p:nvSpPr>
+        <p:spPr>
+          <a:xfrm>
+            <a:off x="640000" y="760000"/>
+            <a:ext cx="10912000" cy="800000"/>
+          </a:xfrm>
+          <a:prstGeom prst="rect">
+            <a:avLst/>
+          </a:prstGeom>
+          <a:noFill/>
+        </p:spPr>
+        <p:txBody>
+          <a:bodyPr wrap="square">
+            <a:spAutoFit/>
+          </a:bodyPr>
+          <a:lstStyle/>
+          <a:p>
+            <a:pPr>
+              <a:spcAft>
+                <a:spcPts val="1710"/>
+              </a:spcAft>
+            </a:pPr>
+            <a:r>
+              <a:rPr sz="3800" b="1">
+                <a:solidFill>
+                  <a:srgbClr val="1F2A44"/>
+                </a:solidFill>
+                <a:latin typeface="Fredoka"/>
+              </a:rPr>
+              <a:t>Escríbelo tú primero, sin mirar</a:t>
+            </a:r>
+          </a:p>
+        </p:txBody>
+      </p:sp>
+      <p:sp>
+        <p:nvSpPr>
+          <p:cNvPr id="4" name="TextBox 3"/>
+          <p:cNvSpPr txBox="1"/>
+          <p:nvPr/>
+        </p:nvSpPr>
+        <p:spPr>
+          <a:xfrm>
+            <a:off x="640000" y="1800000"/>
+            <a:ext cx="10912000" cy="1500000"/>
+          </a:xfrm>
+          <a:prstGeom prst="rect">
+            <a:avLst/>
+          </a:prstGeom>
+          <a:noFill/>
+        </p:spPr>
+        <p:txBody>
+          <a:bodyPr wrap="square">
+            <a:spAutoFit/>
+          </a:bodyPr>
+          <a:lstStyle/>
+          <a:p>
+            <a:pPr>
+              <a:spcAft>
+                <a:spcPts val="1170"/>
+              </a:spcAft>
+            </a:pPr>
+            <a:r>
+              <a:rPr sz="2600" b="0">
+                <a:solidFill>
+                  <a:srgbClr val="4A5568"/>
+                </a:solidFill>
+                <a:latin typeface="Nunito Sans"/>
+              </a:rPr>
+              <a:t>Dos minutos. Después lo comparamos.</a:t>
+            </a:r>
+          </a:p>
+        </p:txBody>
+      </p:sp>
+    </p:spTree>
+  </p:cSld>
+  <p:clrMapOvr>
+    <a:masterClrMapping/>
+  </p:clrMapOvr>
+</p:sld>
+</file>
+
+<file path=ppt/slides/slide16.xml><?xml version="1.0" encoding="utf-8"?>
+<p:sld xmlns:a="http://schemas.openxmlformats.org/drawingml/2006/main" xmlns:p="http://schemas.openxmlformats.org/presentationml/2006/main" xmlns:r="http://schemas.openxmlformats.org/officeDocument/2006/relationships">
+  <p:cSld>
+    <p:bg>
+      <p:bgPr>
+        <a:solidFill>
+          <a:srgbClr val="FBF7EF"/>
+        </a:solidFill>
+        <a:effectLst/>
+      </p:bgPr>
+    </p:bg>
+    <p:spTree>
+      <p:nvGrpSpPr>
+        <p:cNvPr id="1" name=""/>
+        <p:cNvGrpSpPr/>
+        <p:nvPr/>
+      </p:nvGrpSpPr>
+      <p:grpSpPr/>
+      <p:sp>
+        <p:nvSpPr>
+          <p:cNvPr id="2" name="TextBox 1"/>
+          <p:cNvSpPr txBox="1"/>
+          <p:nvPr/>
+        </p:nvSpPr>
+        <p:spPr>
+          <a:xfrm>
+            <a:off x="640000" y="380000"/>
+            <a:ext cx="10912000" cy="420000"/>
+          </a:xfrm>
+          <a:prstGeom prst="rect">
+            <a:avLst/>
+          </a:prstGeom>
+          <a:noFill/>
+        </p:spPr>
+        <p:txBody>
+          <a:bodyPr wrap="square">
+            <a:spAutoFit/>
+          </a:bodyPr>
+          <a:lstStyle/>
+          <a:p>
+            <a:pPr>
+              <a:spcAft>
+                <a:spcPts val="630"/>
+              </a:spcAft>
+            </a:pPr>
+            <a:r>
+              <a:rPr sz="1400" b="1">
+                <a:solidFill>
+                  <a:srgbClr val="E8793A"/>
+                </a:solidFill>
+                <a:latin typeface="Nunito Sans"/>
+              </a:rPr>
+              <a:t>LO DE HOY EN TRES LÍNEAS</a:t>
+            </a:r>
+          </a:p>
+        </p:txBody>
+      </p:sp>
+      <p:sp>
+        <p:nvSpPr>
+          <p:cNvPr id="3" name="TextBox 2"/>
+          <p:cNvSpPr txBox="1"/>
+          <p:nvPr/>
+        </p:nvSpPr>
+        <p:spPr>
+          <a:xfrm>
+            <a:off x="640000" y="1300000"/>
+            <a:ext cx="10912000" cy="4800000"/>
+          </a:xfrm>
+          <a:prstGeom prst="rect">
+            <a:avLst/>
+          </a:prstGeom>
+          <a:noFill/>
+        </p:spPr>
+        <p:txBody>
+          <a:bodyPr wrap="square">
+            <a:spAutoFit/>
+          </a:bodyPr>
+          <a:lstStyle/>
+          <a:p>
+            <a:pPr>
+              <a:spcAft>
+                <a:spcPts val="1350"/>
+              </a:spcAft>
+            </a:pPr>
+            <a:r>
+              <a:rPr sz="3000" b="1">
+                <a:solidFill>
+                  <a:srgbClr val="E8793A"/>
+                </a:solidFill>
+                <a:latin typeface="Nunito Sans"/>
+              </a:rPr>
+              <a:t>1. </a:t>
+            </a:r>
+            <a:r>
+              <a:rPr sz="3000" b="0">
+                <a:solidFill>
+                  <a:srgbClr val="1F2A44"/>
+                </a:solidFill>
+                <a:latin typeface="Nunito Sans"/>
+              </a:rPr>
+              <a:t>La pista falsa cambia de tema para no responder.</a:t>
+            </a:r>
+          </a:p>
+          <a:p>
+            <a:pPr>
+              <a:spcAft>
+                <a:spcPts val="1350"/>
+              </a:spcAft>
+            </a:pPr>
+            <a:r>
+              <a:rPr sz="3000" b="1">
+                <a:solidFill>
+                  <a:srgbClr val="E8793A"/>
+                </a:solidFill>
+                <a:latin typeface="Nunito Sans"/>
+              </a:rPr>
+              <a:t>2. </a:t>
+            </a:r>
+            <a:r>
+              <a:rPr sz="3000" b="0">
+                <a:solidFill>
+                  <a:srgbClr val="1F2A44"/>
+                </a:solidFill>
+                <a:latin typeface="Nunito Sans"/>
+              </a:rPr>
+              <a:t>El nuevo tema suele ser más interesante, y la pregunta se olvida.</a:t>
+            </a:r>
+          </a:p>
+          <a:p>
+            <a:pPr>
+              <a:spcAft>
+                <a:spcPts val="1350"/>
+              </a:spcAft>
+            </a:pPr>
+            <a:r>
+              <a:rPr sz="3000" b="1">
+                <a:solidFill>
+                  <a:srgbClr val="E8793A"/>
+                </a:solidFill>
+                <a:latin typeface="Nunito Sans"/>
+              </a:rPr>
+              <a:t>3. </a:t>
+            </a:r>
+            <a:r>
+              <a:rPr sz="3000" b="0">
+                <a:solidFill>
+                  <a:srgbClr val="1F2A44"/>
+                </a:solidFill>
+                <a:latin typeface="Nunito Sans"/>
+              </a:rPr>
+              <a:t>Para desmontarla: ¿qué tiene que ver esto con lo que hablábamos?</a:t>
+            </a:r>
+          </a:p>
+        </p:txBody>
+      </p:sp>
+    </p:spTree>
+  </p:cSld>
+  <p:clrMapOvr>
+    <a:masterClrMapping/>
+  </p:clrMapOvr>
+</p:sld>
+</file>
+
+<file path=ppt/slides/slide17.xml><?xml version="1.0" encoding="utf-8"?>
 <p:sld xmlns:a="http://schemas.openxmlformats.org/drawingml/2006/main" xmlns:p="http://schemas.openxmlformats.org/presentationml/2006/main" xmlns:r="http://schemas.openxmlformats.org/officeDocument/2006/relationships">
   <p:cSld>
     <p:bg>
@@ -8195,8 +5374,8 @@
         </p:nvSpPr>
         <p:spPr>
           <a:xfrm>
-            <a:off x="640000" y="2300000"/>
-            <a:ext cx="10912000" cy="500000"/>
+            <a:off x="640000" y="380000"/>
+            <a:ext cx="10912000" cy="420000"/>
           </a:xfrm>
           <a:prstGeom prst="rect">
             <a:avLst/>
@@ -8211,17 +5390,17 @@
           <a:p>
             <a:pPr>
               <a:spcAft>
-                <a:spcPts val="810"/>
-              </a:spcAft>
-            </a:pPr>
-            <a:r>
-              <a:rPr sz="1800" b="1">
+                <a:spcPts val="630"/>
+              </a:spcAft>
+            </a:pPr>
+            <a:r>
+              <a:rPr sz="1400" b="1">
                 <a:solidFill>
                   <a:srgbClr val="F4B183"/>
                 </a:solidFill>
                 <a:latin typeface="Nunito Sans"/>
               </a:rPr>
-              <a:t>BLOQUE 2</a:t>
+              <a:t>VÍDEO</a:t>
             </a:r>
           </a:p>
         </p:txBody>
@@ -8234,7 +5413,7 @@
         </p:nvSpPr>
         <p:spPr>
           <a:xfrm>
-            <a:off x="640000" y="2800000"/>
+            <a:off x="640000" y="760000"/>
             <a:ext cx="10912000" cy="800000"/>
           </a:xfrm>
           <a:prstGeom prst="rect">
@@ -8250,6 +5429,1317 @@
           <a:p>
             <a:pPr>
               <a:spcAft>
+                <a:spcPts val="1620"/>
+              </a:spcAft>
+            </a:pPr>
+            <a:r>
+              <a:rPr sz="3600" b="1">
+                <a:solidFill>
+                  <a:srgbClr val="FBF7EF"/>
+                </a:solidFill>
+                <a:latin typeface="Fredoka"/>
+              </a:rPr>
+              <a:t>La falacia de la pista falsa (red herring)</a:t>
+            </a:r>
+          </a:p>
+        </p:txBody>
+      </p:sp>
+      <p:sp>
+        <p:nvSpPr>
+          <p:cNvPr id="4" name="TextBox 3"/>
+          <p:cNvSpPr txBox="1"/>
+          <p:nvPr/>
+        </p:nvSpPr>
+        <p:spPr>
+          <a:xfrm>
+            <a:off x="640000" y="2200000"/>
+            <a:ext cx="10912000" cy="2000000"/>
+          </a:xfrm>
+          <a:prstGeom prst="rect">
+            <a:avLst/>
+          </a:prstGeom>
+          <a:noFill/>
+        </p:spPr>
+        <p:txBody>
+          <a:bodyPr wrap="square">
+            <a:spAutoFit/>
+          </a:bodyPr>
+          <a:lstStyle/>
+          <a:p>
+            <a:pPr>
+              <a:spcAft>
+                <a:spcPts val="1080"/>
+              </a:spcAft>
+            </a:pPr>
+            <a:r>
+              <a:rPr sz="2400" b="0">
+                <a:solidFill>
+                  <a:srgbClr val="C9D3E6"/>
+                </a:solidFill>
+                <a:latin typeface="Nunito Sans"/>
+              </a:rPr>
+              <a:t>Ver cómo se esquiva una pregunta en entrevistas y debates.</a:t>
+            </a:r>
+          </a:p>
+        </p:txBody>
+      </p:sp>
+    </p:spTree>
+  </p:cSld>
+  <p:clrMapOvr>
+    <a:masterClrMapping/>
+  </p:clrMapOvr>
+</p:sld>
+</file>
+
+<file path=ppt/slides/slide18.xml><?xml version="1.0" encoding="utf-8"?>
+<p:sld xmlns:a="http://schemas.openxmlformats.org/drawingml/2006/main" xmlns:p="http://schemas.openxmlformats.org/presentationml/2006/main" xmlns:r="http://schemas.openxmlformats.org/officeDocument/2006/relationships">
+  <p:cSld>
+    <p:bg>
+      <p:bgPr>
+        <a:solidFill>
+          <a:srgbClr val="1F2A44"/>
+        </a:solidFill>
+        <a:effectLst/>
+      </p:bgPr>
+    </p:bg>
+    <p:spTree>
+      <p:nvGrpSpPr>
+        <p:cNvPr id="1" name=""/>
+        <p:cNvGrpSpPr/>
+        <p:nvPr/>
+      </p:nvGrpSpPr>
+      <p:grpSpPr/>
+      <p:sp>
+        <p:nvSpPr>
+          <p:cNvPr id="2" name="TextBox 1"/>
+          <p:cNvSpPr txBox="1"/>
+          <p:nvPr/>
+        </p:nvSpPr>
+        <p:spPr>
+          <a:xfrm>
+            <a:off x="640000" y="380000"/>
+            <a:ext cx="10912000" cy="420000"/>
+          </a:xfrm>
+          <a:prstGeom prst="rect">
+            <a:avLst/>
+          </a:prstGeom>
+          <a:noFill/>
+        </p:spPr>
+        <p:txBody>
+          <a:bodyPr wrap="square">
+            <a:spAutoFit/>
+          </a:bodyPr>
+          <a:lstStyle/>
+          <a:p>
+            <a:pPr>
+              <a:spcAft>
+                <a:spcPts val="630"/>
+              </a:spcAft>
+            </a:pPr>
+            <a:r>
+              <a:rPr sz="1400" b="1">
+                <a:solidFill>
+                  <a:srgbClr val="F4B183"/>
+                </a:solidFill>
+                <a:latin typeface="Nunito Sans"/>
+              </a:rPr>
+              <a:t>AHORA, LA HOJA DEL DÍA</a:t>
+            </a:r>
+          </a:p>
+        </p:txBody>
+      </p:sp>
+      <p:sp>
+        <p:nvSpPr>
+          <p:cNvPr id="3" name="TextBox 2"/>
+          <p:cNvSpPr txBox="1"/>
+          <p:nvPr/>
+        </p:nvSpPr>
+        <p:spPr>
+          <a:xfrm>
+            <a:off x="640000" y="760000"/>
+            <a:ext cx="10912000" cy="800000"/>
+          </a:xfrm>
+          <a:prstGeom prst="rect">
+            <a:avLst/>
+          </a:prstGeom>
+          <a:noFill/>
+        </p:spPr>
+        <p:txBody>
+          <a:bodyPr wrap="square">
+            <a:spAutoFit/>
+          </a:bodyPr>
+          <a:lstStyle/>
+          <a:p>
+            <a:pPr>
+              <a:spcAft>
+                <a:spcPts val="1710"/>
+              </a:spcAft>
+            </a:pPr>
+            <a:r>
+              <a:rPr sz="3800" b="1">
+                <a:solidFill>
+                  <a:srgbClr val="FBF7EF"/>
+                </a:solidFill>
+                <a:latin typeface="Fredoka"/>
+              </a:rPr>
+              <a:t>20 minutos · individual · en silencio</a:t>
+            </a:r>
+          </a:p>
+        </p:txBody>
+      </p:sp>
+      <p:sp>
+        <p:nvSpPr>
+          <p:cNvPr id="4" name="Rectangle 3"/>
+          <p:cNvSpPr/>
+          <p:nvPr/>
+        </p:nvSpPr>
+        <p:spPr>
+          <a:xfrm>
+            <a:off x="640000" y="2000000"/>
+            <a:ext cx="3504000" cy="1800000"/>
+          </a:xfrm>
+          <a:prstGeom prst="rect">
+            <a:avLst/>
+          </a:prstGeom>
+          <a:solidFill>
+            <a:srgbClr val="FBF7EF"/>
+          </a:solidFill>
+          <a:ln>
+            <a:noFill/>
+          </a:ln>
+        </p:spPr>
+        <p:style>
+          <a:lnRef idx="1">
+            <a:schemeClr val="accent1"/>
+          </a:lnRef>
+          <a:fillRef idx="3">
+            <a:schemeClr val="accent1"/>
+          </a:fillRef>
+          <a:effectRef idx="2">
+            <a:schemeClr val="accent1"/>
+          </a:effectRef>
+          <a:fontRef idx="minor">
+            <a:schemeClr val="lt1"/>
+          </a:fontRef>
+        </p:style>
+        <p:txBody>
+          <a:bodyPr rtlCol="0" anchor="ctr"/>
+          <a:lstStyle/>
+          <a:p>
+            <a:pPr algn="ctr"/>
+          </a:p>
+        </p:txBody>
+      </p:sp>
+      <p:sp>
+        <p:nvSpPr>
+          <p:cNvPr id="5" name="TextBox 4"/>
+          <p:cNvSpPr txBox="1"/>
+          <p:nvPr/>
+        </p:nvSpPr>
+        <p:spPr>
+          <a:xfrm>
+            <a:off x="790000" y="2100000"/>
+            <a:ext cx="3204000" cy="700000"/>
+          </a:xfrm>
+          <a:prstGeom prst="rect">
+            <a:avLst/>
+          </a:prstGeom>
+          <a:noFill/>
+        </p:spPr>
+        <p:txBody>
+          <a:bodyPr wrap="square">
+            <a:spAutoFit/>
+          </a:bodyPr>
+          <a:lstStyle/>
+          <a:p>
+            <a:pPr>
+              <a:spcAft>
+                <a:spcPts val="990"/>
+              </a:spcAft>
+            </a:pPr>
+            <a:r>
+              <a:rPr sz="2200" b="1">
+                <a:solidFill>
+                  <a:srgbClr val="E8793A"/>
+                </a:solidFill>
+                <a:latin typeface="Nunito Sans"/>
+              </a:rPr>
+              <a:t>Peldaño 1 · Todos</a:t>
+            </a:r>
+          </a:p>
+        </p:txBody>
+      </p:sp>
+      <p:sp>
+        <p:nvSpPr>
+          <p:cNvPr id="6" name="TextBox 5"/>
+          <p:cNvSpPr txBox="1"/>
+          <p:nvPr/>
+        </p:nvSpPr>
+        <p:spPr>
+          <a:xfrm>
+            <a:off x="790000" y="2900000"/>
+            <a:ext cx="3204000" cy="700000"/>
+          </a:xfrm>
+          <a:prstGeom prst="rect">
+            <a:avLst/>
+          </a:prstGeom>
+          <a:noFill/>
+        </p:spPr>
+        <p:txBody>
+          <a:bodyPr wrap="square">
+            <a:spAutoFit/>
+          </a:bodyPr>
+          <a:lstStyle/>
+          <a:p>
+            <a:pPr>
+              <a:spcAft>
+                <a:spcPts val="900"/>
+              </a:spcAft>
+            </a:pPr>
+            <a:r>
+              <a:rPr sz="2000" b="0">
+                <a:solidFill>
+                  <a:srgbClr val="4A5568"/>
+                </a:solidFill>
+                <a:latin typeface="Nunito Sans"/>
+              </a:rPr>
+              <a:t>6 puntos</a:t>
+            </a:r>
+          </a:p>
+        </p:txBody>
+      </p:sp>
+      <p:sp>
+        <p:nvSpPr>
+          <p:cNvPr id="7" name="Rectangle 6"/>
+          <p:cNvSpPr/>
+          <p:nvPr/>
+        </p:nvSpPr>
+        <p:spPr>
+          <a:xfrm>
+            <a:off x="4344000" y="2000000"/>
+            <a:ext cx="3504000" cy="1800000"/>
+          </a:xfrm>
+          <a:prstGeom prst="rect">
+            <a:avLst/>
+          </a:prstGeom>
+          <a:solidFill>
+            <a:srgbClr val="FBF7EF"/>
+          </a:solidFill>
+          <a:ln>
+            <a:noFill/>
+          </a:ln>
+        </p:spPr>
+        <p:style>
+          <a:lnRef idx="1">
+            <a:schemeClr val="accent1"/>
+          </a:lnRef>
+          <a:fillRef idx="3">
+            <a:schemeClr val="accent1"/>
+          </a:fillRef>
+          <a:effectRef idx="2">
+            <a:schemeClr val="accent1"/>
+          </a:effectRef>
+          <a:fontRef idx="minor">
+            <a:schemeClr val="lt1"/>
+          </a:fontRef>
+        </p:style>
+        <p:txBody>
+          <a:bodyPr rtlCol="0" anchor="ctr"/>
+          <a:lstStyle/>
+          <a:p>
+            <a:pPr algn="ctr"/>
+          </a:p>
+        </p:txBody>
+      </p:sp>
+      <p:sp>
+        <p:nvSpPr>
+          <p:cNvPr id="8" name="TextBox 7"/>
+          <p:cNvSpPr txBox="1"/>
+          <p:nvPr/>
+        </p:nvSpPr>
+        <p:spPr>
+          <a:xfrm>
+            <a:off x="4494000" y="2100000"/>
+            <a:ext cx="3204000" cy="700000"/>
+          </a:xfrm>
+          <a:prstGeom prst="rect">
+            <a:avLst/>
+          </a:prstGeom>
+          <a:noFill/>
+        </p:spPr>
+        <p:txBody>
+          <a:bodyPr wrap="square">
+            <a:spAutoFit/>
+          </a:bodyPr>
+          <a:lstStyle/>
+          <a:p>
+            <a:pPr>
+              <a:spcAft>
+                <a:spcPts val="990"/>
+              </a:spcAft>
+            </a:pPr>
+            <a:r>
+              <a:rPr sz="2200" b="1">
+                <a:solidFill>
+                  <a:srgbClr val="E8793A"/>
+                </a:solidFill>
+                <a:latin typeface="Nunito Sans"/>
+              </a:rPr>
+              <a:t>Peldaño 2 · Repaso</a:t>
+            </a:r>
+          </a:p>
+        </p:txBody>
+      </p:sp>
+      <p:sp>
+        <p:nvSpPr>
+          <p:cNvPr id="9" name="TextBox 8"/>
+          <p:cNvSpPr txBox="1"/>
+          <p:nvPr/>
+        </p:nvSpPr>
+        <p:spPr>
+          <a:xfrm>
+            <a:off x="4494000" y="2900000"/>
+            <a:ext cx="3204000" cy="700000"/>
+          </a:xfrm>
+          <a:prstGeom prst="rect">
+            <a:avLst/>
+          </a:prstGeom>
+          <a:noFill/>
+        </p:spPr>
+        <p:txBody>
+          <a:bodyPr wrap="square">
+            <a:spAutoFit/>
+          </a:bodyPr>
+          <a:lstStyle/>
+          <a:p>
+            <a:pPr>
+              <a:spcAft>
+                <a:spcPts val="900"/>
+              </a:spcAft>
+            </a:pPr>
+            <a:r>
+              <a:rPr sz="2000" b="0">
+                <a:solidFill>
+                  <a:srgbClr val="4A5568"/>
+                </a:solidFill>
+                <a:latin typeface="Nunito Sans"/>
+              </a:rPr>
+              <a:t>2 puntos</a:t>
+            </a:r>
+          </a:p>
+        </p:txBody>
+      </p:sp>
+      <p:sp>
+        <p:nvSpPr>
+          <p:cNvPr id="10" name="Rectangle 9"/>
+          <p:cNvSpPr/>
+          <p:nvPr/>
+        </p:nvSpPr>
+        <p:spPr>
+          <a:xfrm>
+            <a:off x="8048000" y="2000000"/>
+            <a:ext cx="3504000" cy="1800000"/>
+          </a:xfrm>
+          <a:prstGeom prst="rect">
+            <a:avLst/>
+          </a:prstGeom>
+          <a:solidFill>
+            <a:srgbClr val="FBF7EF"/>
+          </a:solidFill>
+          <a:ln>
+            <a:noFill/>
+          </a:ln>
+        </p:spPr>
+        <p:style>
+          <a:lnRef idx="1">
+            <a:schemeClr val="accent1"/>
+          </a:lnRef>
+          <a:fillRef idx="3">
+            <a:schemeClr val="accent1"/>
+          </a:fillRef>
+          <a:effectRef idx="2">
+            <a:schemeClr val="accent1"/>
+          </a:effectRef>
+          <a:fontRef idx="minor">
+            <a:schemeClr val="lt1"/>
+          </a:fontRef>
+        </p:style>
+        <p:txBody>
+          <a:bodyPr rtlCol="0" anchor="ctr"/>
+          <a:lstStyle/>
+          <a:p>
+            <a:pPr algn="ctr"/>
+          </a:p>
+        </p:txBody>
+      </p:sp>
+      <p:sp>
+        <p:nvSpPr>
+          <p:cNvPr id="11" name="TextBox 10"/>
+          <p:cNvSpPr txBox="1"/>
+          <p:nvPr/>
+        </p:nvSpPr>
+        <p:spPr>
+          <a:xfrm>
+            <a:off x="8198000" y="2100000"/>
+            <a:ext cx="3204000" cy="700000"/>
+          </a:xfrm>
+          <a:prstGeom prst="rect">
+            <a:avLst/>
+          </a:prstGeom>
+          <a:noFill/>
+        </p:spPr>
+        <p:txBody>
+          <a:bodyPr wrap="square">
+            <a:spAutoFit/>
+          </a:bodyPr>
+          <a:lstStyle/>
+          <a:p>
+            <a:pPr>
+              <a:spcAft>
+                <a:spcPts val="990"/>
+              </a:spcAft>
+            </a:pPr>
+            <a:r>
+              <a:rPr sz="2200" b="1">
+                <a:solidFill>
+                  <a:srgbClr val="E8793A"/>
+                </a:solidFill>
+                <a:latin typeface="Nunito Sans"/>
+              </a:rPr>
+              <a:t>Peldaño 3 · Reto</a:t>
+            </a:r>
+          </a:p>
+        </p:txBody>
+      </p:sp>
+      <p:sp>
+        <p:nvSpPr>
+          <p:cNvPr id="12" name="TextBox 11"/>
+          <p:cNvSpPr txBox="1"/>
+          <p:nvPr/>
+        </p:nvSpPr>
+        <p:spPr>
+          <a:xfrm>
+            <a:off x="8198000" y="2900000"/>
+            <a:ext cx="3204000" cy="700000"/>
+          </a:xfrm>
+          <a:prstGeom prst="rect">
+            <a:avLst/>
+          </a:prstGeom>
+          <a:noFill/>
+        </p:spPr>
+        <p:txBody>
+          <a:bodyPr wrap="square">
+            <a:spAutoFit/>
+          </a:bodyPr>
+          <a:lstStyle/>
+          <a:p>
+            <a:pPr>
+              <a:spcAft>
+                <a:spcPts val="900"/>
+              </a:spcAft>
+            </a:pPr>
+            <a:r>
+              <a:rPr sz="2000" b="0">
+                <a:solidFill>
+                  <a:srgbClr val="4A5568"/>
+                </a:solidFill>
+                <a:latin typeface="Nunito Sans"/>
+              </a:rPr>
+              <a:t>2 puntos</a:t>
+            </a:r>
+          </a:p>
+        </p:txBody>
+      </p:sp>
+      <p:sp>
+        <p:nvSpPr>
+          <p:cNvPr id="13" name="TextBox 12"/>
+          <p:cNvSpPr txBox="1"/>
+          <p:nvPr/>
+        </p:nvSpPr>
+        <p:spPr>
+          <a:xfrm>
+            <a:off x="640000" y="4200000"/>
+            <a:ext cx="10912000" cy="1500000"/>
+          </a:xfrm>
+          <a:prstGeom prst="rect">
+            <a:avLst/>
+          </a:prstGeom>
+          <a:noFill/>
+        </p:spPr>
+        <p:txBody>
+          <a:bodyPr wrap="square">
+            <a:spAutoFit/>
+          </a:bodyPr>
+          <a:lstStyle/>
+          <a:p>
+            <a:pPr>
+              <a:spcAft>
+                <a:spcPts val="990"/>
+              </a:spcAft>
+            </a:pPr>
+            <a:r>
+              <a:rPr sz="2200" b="0">
+                <a:solidFill>
+                  <a:srgbClr val="C9D3E6"/>
+                </a:solidFill>
+                <a:latin typeface="Nunito Sans"/>
+              </a:rPr>
+              <a:t>1.ª pasada: sin apuntes, con bolígrafo. 2.ª pasada: con los apuntes, en otro color. Marca «seguro» o «dudo» en cada respuesta.</a:t>
+            </a:r>
+          </a:p>
+        </p:txBody>
+      </p:sp>
+    </p:spTree>
+  </p:cSld>
+  <p:clrMapOvr>
+    <a:masterClrMapping/>
+  </p:clrMapOvr>
+</p:sld>
+</file>
+
+<file path=ppt/slides/slide2.xml><?xml version="1.0" encoding="utf-8"?>
+<p:sld xmlns:a="http://schemas.openxmlformats.org/drawingml/2006/main" xmlns:p="http://schemas.openxmlformats.org/presentationml/2006/main" xmlns:r="http://schemas.openxmlformats.org/officeDocument/2006/relationships">
+  <p:cSld>
+    <p:bg>
+      <p:bgPr>
+        <a:solidFill>
+          <a:srgbClr val="FBF7EF"/>
+        </a:solidFill>
+        <a:effectLst/>
+      </p:bgPr>
+    </p:bg>
+    <p:spTree>
+      <p:nvGrpSpPr>
+        <p:cNvPr id="1" name=""/>
+        <p:cNvGrpSpPr/>
+        <p:nvPr/>
+      </p:nvGrpSpPr>
+      <p:grpSpPr/>
+      <p:sp>
+        <p:nvSpPr>
+          <p:cNvPr id="2" name="TextBox 1"/>
+          <p:cNvSpPr txBox="1"/>
+          <p:nvPr/>
+        </p:nvSpPr>
+        <p:spPr>
+          <a:xfrm>
+            <a:off x="640000" y="380000"/>
+            <a:ext cx="10912000" cy="420000"/>
+          </a:xfrm>
+          <a:prstGeom prst="rect">
+            <a:avLst/>
+          </a:prstGeom>
+          <a:noFill/>
+        </p:spPr>
+        <p:txBody>
+          <a:bodyPr wrap="square">
+            <a:spAutoFit/>
+          </a:bodyPr>
+          <a:lstStyle/>
+          <a:p>
+            <a:pPr>
+              <a:spcAft>
+                <a:spcPts val="630"/>
+              </a:spcAft>
+            </a:pPr>
+            <a:r>
+              <a:rPr sz="1400" b="1">
+                <a:solidFill>
+                  <a:srgbClr val="E8793A"/>
+                </a:solidFill>
+                <a:latin typeface="Nunito Sans"/>
+              </a:rPr>
+              <a:t>ANTES DE EMPEZAR · SIN MIRAR</a:t>
+            </a:r>
+          </a:p>
+        </p:txBody>
+      </p:sp>
+      <p:sp>
+        <p:nvSpPr>
+          <p:cNvPr id="3" name="TextBox 2"/>
+          <p:cNvSpPr txBox="1"/>
+          <p:nvPr/>
+        </p:nvSpPr>
+        <p:spPr>
+          <a:xfrm>
+            <a:off x="640000" y="760000"/>
+            <a:ext cx="10912000" cy="800000"/>
+          </a:xfrm>
+          <a:prstGeom prst="rect">
+            <a:avLst/>
+          </a:prstGeom>
+          <a:noFill/>
+        </p:spPr>
+        <p:txBody>
+          <a:bodyPr wrap="square">
+            <a:spAutoFit/>
+          </a:bodyPr>
+          <a:lstStyle/>
+          <a:p>
+            <a:pPr>
+              <a:spcAft>
+                <a:spcPts val="1440"/>
+              </a:spcAft>
+            </a:pPr>
+            <a:r>
+              <a:rPr sz="3200" b="1">
+                <a:solidFill>
+                  <a:srgbClr val="1F2A44"/>
+                </a:solidFill>
+                <a:latin typeface="Fredoka"/>
+              </a:rPr>
+              <a:t>Escribe en tu hoja las palabras que faltan</a:t>
+            </a:r>
+          </a:p>
+        </p:txBody>
+      </p:sp>
+      <p:sp>
+        <p:nvSpPr>
+          <p:cNvPr id="4" name="TextBox 3"/>
+          <p:cNvSpPr txBox="1"/>
+          <p:nvPr/>
+        </p:nvSpPr>
+        <p:spPr>
+          <a:xfrm>
+            <a:off x="640000" y="1800000"/>
+            <a:ext cx="10912000" cy="4300000"/>
+          </a:xfrm>
+          <a:prstGeom prst="rect">
+            <a:avLst/>
+          </a:prstGeom>
+          <a:noFill/>
+        </p:spPr>
+        <p:txBody>
+          <a:bodyPr wrap="square">
+            <a:spAutoFit/>
+          </a:bodyPr>
+          <a:lstStyle/>
+          <a:p>
+            <a:pPr>
+              <a:spcAft>
+                <a:spcPts val="1170"/>
+              </a:spcAft>
+            </a:pPr>
+            <a:r>
+              <a:rPr sz="2600" b="1">
+                <a:solidFill>
+                  <a:srgbClr val="E8793A"/>
+                </a:solidFill>
+                <a:latin typeface="Nunito Sans"/>
+              </a:rPr>
+              <a:t>1. </a:t>
+            </a:r>
+            <a:r>
+              <a:rPr sz="2600" b="0">
+                <a:solidFill>
+                  <a:srgbClr val="1F2A44"/>
+                </a:solidFill>
+                <a:latin typeface="Nunito Sans"/>
+              </a:rPr>
+              <a:t>Es legítimo si la emoción ______ a las razones; es falacia si las ______.  (sesión 22)</a:t>
+            </a:r>
+          </a:p>
+          <a:p>
+            <a:pPr>
+              <a:spcAft>
+                <a:spcPts val="1170"/>
+              </a:spcAft>
+            </a:pPr>
+            <a:r>
+              <a:rPr sz="2600" b="1">
+                <a:solidFill>
+                  <a:srgbClr val="E8793A"/>
+                </a:solidFill>
+                <a:latin typeface="Nunito Sans"/>
+              </a:rPr>
+              <a:t>2. </a:t>
+            </a:r>
+            <a:r>
+              <a:rPr sz="2600" b="0">
+                <a:solidFill>
+                  <a:srgbClr val="1F2A44"/>
+                </a:solidFill>
+                <a:latin typeface="Nunito Sans"/>
+              </a:rPr>
+              <a:t>Pregunta para el miedo: ¿ese peligro es ______? ¿Qué pruebas hay?  (sesión 22)</a:t>
+            </a:r>
+          </a:p>
+          <a:p>
+            <a:pPr>
+              <a:spcAft>
+                <a:spcPts val="1170"/>
+              </a:spcAft>
+            </a:pPr>
+            <a:r>
+              <a:rPr sz="2600" b="1">
+                <a:solidFill>
+                  <a:srgbClr val="E8793A"/>
+                </a:solidFill>
+                <a:latin typeface="Nunito Sans"/>
+              </a:rPr>
+              <a:t>3. </a:t>
+            </a:r>
+            <a:r>
+              <a:rPr sz="2600" b="0">
+                <a:solidFill>
+                  <a:srgbClr val="1F2A44"/>
+                </a:solidFill>
+                <a:latin typeface="Nunito Sans"/>
+              </a:rPr>
+              <a:t>La autoridad por poder me pide que ______; la autoridad por saber, que me crea lo que dice.  (sesión 11)</a:t>
+            </a:r>
+          </a:p>
+        </p:txBody>
+      </p:sp>
+    </p:spTree>
+  </p:cSld>
+  <p:clrMapOvr>
+    <a:masterClrMapping/>
+  </p:clrMapOvr>
+</p:sld>
+</file>
+
+<file path=ppt/slides/slide3.xml><?xml version="1.0" encoding="utf-8"?>
+<p:sld xmlns:a="http://schemas.openxmlformats.org/drawingml/2006/main" xmlns:p="http://schemas.openxmlformats.org/presentationml/2006/main" xmlns:r="http://schemas.openxmlformats.org/officeDocument/2006/relationships">
+  <p:cSld>
+    <p:bg>
+      <p:bgPr>
+        <a:solidFill>
+          <a:srgbClr val="FBF7EF"/>
+        </a:solidFill>
+        <a:effectLst/>
+      </p:bgPr>
+    </p:bg>
+    <p:spTree>
+      <p:nvGrpSpPr>
+        <p:cNvPr id="1" name=""/>
+        <p:cNvGrpSpPr/>
+        <p:nvPr/>
+      </p:nvGrpSpPr>
+      <p:grpSpPr/>
+      <p:sp>
+        <p:nvSpPr>
+          <p:cNvPr id="2" name="TextBox 1"/>
+          <p:cNvSpPr txBox="1"/>
+          <p:nvPr/>
+        </p:nvSpPr>
+        <p:spPr>
+          <a:xfrm>
+            <a:off x="640000" y="380000"/>
+            <a:ext cx="10912000" cy="420000"/>
+          </a:xfrm>
+          <a:prstGeom prst="rect">
+            <a:avLst/>
+          </a:prstGeom>
+          <a:noFill/>
+        </p:spPr>
+        <p:txBody>
+          <a:bodyPr wrap="square">
+            <a:spAutoFit/>
+          </a:bodyPr>
+          <a:lstStyle/>
+          <a:p>
+            <a:pPr>
+              <a:spcAft>
+                <a:spcPts val="630"/>
+              </a:spcAft>
+            </a:pPr>
+            <a:r>
+              <a:rPr sz="1400" b="1">
+                <a:solidFill>
+                  <a:srgbClr val="E8793A"/>
+                </a:solidFill>
+                <a:latin typeface="Nunito Sans"/>
+              </a:rPr>
+              <a:t>ANTES DE EMPEZAR · SIN MIRAR</a:t>
+            </a:r>
+          </a:p>
+        </p:txBody>
+      </p:sp>
+      <p:sp>
+        <p:nvSpPr>
+          <p:cNvPr id="3" name="TextBox 2"/>
+          <p:cNvSpPr txBox="1"/>
+          <p:nvPr/>
+        </p:nvSpPr>
+        <p:spPr>
+          <a:xfrm>
+            <a:off x="640000" y="760000"/>
+            <a:ext cx="10912000" cy="800000"/>
+          </a:xfrm>
+          <a:prstGeom prst="rect">
+            <a:avLst/>
+          </a:prstGeom>
+          <a:noFill/>
+        </p:spPr>
+        <p:txBody>
+          <a:bodyPr wrap="square">
+            <a:spAutoFit/>
+          </a:bodyPr>
+          <a:lstStyle/>
+          <a:p>
+            <a:pPr>
+              <a:spcAft>
+                <a:spcPts val="1440"/>
+              </a:spcAft>
+            </a:pPr>
+            <a:r>
+              <a:rPr sz="3200" b="1">
+                <a:solidFill>
+                  <a:srgbClr val="1F2A44"/>
+                </a:solidFill>
+                <a:latin typeface="Fredoka"/>
+              </a:rPr>
+              <a:t>Corrige con otro color</a:t>
+            </a:r>
+          </a:p>
+        </p:txBody>
+      </p:sp>
+      <p:sp>
+        <p:nvSpPr>
+          <p:cNvPr id="4" name="TextBox 3"/>
+          <p:cNvSpPr txBox="1"/>
+          <p:nvPr/>
+        </p:nvSpPr>
+        <p:spPr>
+          <a:xfrm>
+            <a:off x="640000" y="1800000"/>
+            <a:ext cx="10912000" cy="4300000"/>
+          </a:xfrm>
+          <a:prstGeom prst="rect">
+            <a:avLst/>
+          </a:prstGeom>
+          <a:noFill/>
+        </p:spPr>
+        <p:txBody>
+          <a:bodyPr wrap="square">
+            <a:spAutoFit/>
+          </a:bodyPr>
+          <a:lstStyle/>
+          <a:p>
+            <a:pPr>
+              <a:spcAft>
+                <a:spcPts val="1170"/>
+              </a:spcAft>
+            </a:pPr>
+            <a:r>
+              <a:rPr sz="2600" b="1">
+                <a:solidFill>
+                  <a:srgbClr val="E8793A"/>
+                </a:solidFill>
+                <a:latin typeface="Nunito Sans"/>
+              </a:rPr>
+              <a:t>1. </a:t>
+            </a:r>
+            <a:r>
+              <a:rPr sz="2600" b="0">
+                <a:solidFill>
+                  <a:srgbClr val="1F2A44"/>
+                </a:solidFill>
+                <a:latin typeface="Nunito Sans"/>
+              </a:rPr>
+              <a:t>Es legítimo si la emoción </a:t>
+            </a:r>
+            <a:r>
+              <a:rPr sz="2600" b="1">
+                <a:solidFill>
+                  <a:srgbClr val="1F2A44"/>
+                </a:solidFill>
+                <a:latin typeface="Nunito Sans"/>
+              </a:rPr>
+              <a:t>acompaña</a:t>
+            </a:r>
+            <a:r>
+              <a:rPr sz="2600" b="0">
+                <a:solidFill>
+                  <a:srgbClr val="1F2A44"/>
+                </a:solidFill>
+                <a:latin typeface="Nunito Sans"/>
+              </a:rPr>
+              <a:t> a las razones; es falacia si las </a:t>
+            </a:r>
+            <a:r>
+              <a:rPr sz="2600" b="1">
+                <a:solidFill>
+                  <a:srgbClr val="1F2A44"/>
+                </a:solidFill>
+                <a:latin typeface="Nunito Sans"/>
+              </a:rPr>
+              <a:t>sustituyen</a:t>
+            </a:r>
+            <a:r>
+              <a:rPr sz="2600" b="0">
+                <a:solidFill>
+                  <a:srgbClr val="1F2A44"/>
+                </a:solidFill>
+                <a:latin typeface="Nunito Sans"/>
+              </a:rPr>
+              <a:t>.  (sesión 22)</a:t>
+            </a:r>
+          </a:p>
+          <a:p>
+            <a:pPr>
+              <a:spcAft>
+                <a:spcPts val="1170"/>
+              </a:spcAft>
+            </a:pPr>
+            <a:r>
+              <a:rPr sz="2600" b="1">
+                <a:solidFill>
+                  <a:srgbClr val="E8793A"/>
+                </a:solidFill>
+                <a:latin typeface="Nunito Sans"/>
+              </a:rPr>
+              <a:t>2. </a:t>
+            </a:r>
+            <a:r>
+              <a:rPr sz="2600" b="0">
+                <a:solidFill>
+                  <a:srgbClr val="1F2A44"/>
+                </a:solidFill>
+                <a:latin typeface="Nunito Sans"/>
+              </a:rPr>
+              <a:t>Pregunta para el miedo: ¿ese peligro es </a:t>
+            </a:r>
+            <a:r>
+              <a:rPr sz="2600" b="1">
+                <a:solidFill>
+                  <a:srgbClr val="1F2A44"/>
+                </a:solidFill>
+                <a:latin typeface="Nunito Sans"/>
+              </a:rPr>
+              <a:t>real</a:t>
+            </a:r>
+            <a:r>
+              <a:rPr sz="2600" b="0">
+                <a:solidFill>
+                  <a:srgbClr val="1F2A44"/>
+                </a:solidFill>
+                <a:latin typeface="Nunito Sans"/>
+              </a:rPr>
+              <a:t>? ¿Qué pruebas hay?  (sesión 22)</a:t>
+            </a:r>
+          </a:p>
+          <a:p>
+            <a:pPr>
+              <a:spcAft>
+                <a:spcPts val="1170"/>
+              </a:spcAft>
+            </a:pPr>
+            <a:r>
+              <a:rPr sz="2600" b="1">
+                <a:solidFill>
+                  <a:srgbClr val="E8793A"/>
+                </a:solidFill>
+                <a:latin typeface="Nunito Sans"/>
+              </a:rPr>
+              <a:t>3. </a:t>
+            </a:r>
+            <a:r>
+              <a:rPr sz="2600" b="0">
+                <a:solidFill>
+                  <a:srgbClr val="1F2A44"/>
+                </a:solidFill>
+                <a:latin typeface="Nunito Sans"/>
+              </a:rPr>
+              <a:t>La autoridad por poder me pide que </a:t>
+            </a:r>
+            <a:r>
+              <a:rPr sz="2600" b="1">
+                <a:solidFill>
+                  <a:srgbClr val="1F2A44"/>
+                </a:solidFill>
+                <a:latin typeface="Nunito Sans"/>
+              </a:rPr>
+              <a:t>obedezca</a:t>
+            </a:r>
+            <a:r>
+              <a:rPr sz="2600" b="0">
+                <a:solidFill>
+                  <a:srgbClr val="1F2A44"/>
+                </a:solidFill>
+                <a:latin typeface="Nunito Sans"/>
+              </a:rPr>
+              <a:t>; la autoridad por saber, que me crea lo que dice.  (sesión 11)</a:t>
+            </a:r>
+          </a:p>
+        </p:txBody>
+      </p:sp>
+    </p:spTree>
+  </p:cSld>
+  <p:clrMapOvr>
+    <a:masterClrMapping/>
+  </p:clrMapOvr>
+</p:sld>
+</file>
+
+<file path=ppt/slides/slide4.xml><?xml version="1.0" encoding="utf-8"?>
+<p:sld xmlns:a="http://schemas.openxmlformats.org/drawingml/2006/main" xmlns:p="http://schemas.openxmlformats.org/presentationml/2006/main" xmlns:r="http://schemas.openxmlformats.org/officeDocument/2006/relationships">
+  <p:cSld>
+    <p:bg>
+      <p:bgPr>
+        <a:solidFill>
+          <a:srgbClr val="FBF7EF"/>
+        </a:solidFill>
+        <a:effectLst/>
+      </p:bgPr>
+    </p:bg>
+    <p:spTree>
+      <p:nvGrpSpPr>
+        <p:cNvPr id="1" name=""/>
+        <p:cNvGrpSpPr/>
+        <p:nvPr/>
+      </p:nvGrpSpPr>
+      <p:grpSpPr/>
+      <p:sp>
+        <p:nvSpPr>
+          <p:cNvPr id="2" name="TextBox 1"/>
+          <p:cNvSpPr txBox="1"/>
+          <p:nvPr/>
+        </p:nvSpPr>
+        <p:spPr>
+          <a:xfrm>
+            <a:off x="640000" y="380000"/>
+            <a:ext cx="10912000" cy="420000"/>
+          </a:xfrm>
+          <a:prstGeom prst="rect">
+            <a:avLst/>
+          </a:prstGeom>
+          <a:noFill/>
+        </p:spPr>
+        <p:txBody>
+          <a:bodyPr wrap="square">
+            <a:spAutoFit/>
+          </a:bodyPr>
+          <a:lstStyle/>
+          <a:p>
+            <a:pPr>
+              <a:spcAft>
+                <a:spcPts val="630"/>
+              </a:spcAft>
+            </a:pPr>
+            <a:r>
+              <a:rPr sz="1400" b="1">
+                <a:solidFill>
+                  <a:srgbClr val="E8793A"/>
+                </a:solidFill>
+                <a:latin typeface="Nunito Sans"/>
+              </a:rPr>
+              <a:t>PARA EMPEZAR</a:t>
+            </a:r>
+          </a:p>
+        </p:txBody>
+      </p:sp>
+      <p:sp>
+        <p:nvSpPr>
+          <p:cNvPr id="3" name="Rectangle 2"/>
+          <p:cNvSpPr/>
+          <p:nvPr/>
+        </p:nvSpPr>
+        <p:spPr>
+          <a:xfrm>
+            <a:off x="640000" y="1300000"/>
+            <a:ext cx="90000" cy="2400000"/>
+          </a:xfrm>
+          <a:prstGeom prst="rect">
+            <a:avLst/>
+          </a:prstGeom>
+          <a:solidFill>
+            <a:srgbClr val="E8793A"/>
+          </a:solidFill>
+          <a:ln>
+            <a:noFill/>
+          </a:ln>
+        </p:spPr>
+        <p:style>
+          <a:lnRef idx="1">
+            <a:schemeClr val="accent1"/>
+          </a:lnRef>
+          <a:fillRef idx="3">
+            <a:schemeClr val="accent1"/>
+          </a:fillRef>
+          <a:effectRef idx="2">
+            <a:schemeClr val="accent1"/>
+          </a:effectRef>
+          <a:fontRef idx="minor">
+            <a:schemeClr val="lt1"/>
+          </a:fontRef>
+        </p:style>
+        <p:txBody>
+          <a:bodyPr rtlCol="0" anchor="ctr"/>
+          <a:lstStyle/>
+          <a:p>
+            <a:pPr algn="ctr"/>
+          </a:p>
+        </p:txBody>
+      </p:sp>
+      <p:sp>
+        <p:nvSpPr>
+          <p:cNvPr id="4" name="TextBox 3"/>
+          <p:cNvSpPr txBox="1"/>
+          <p:nvPr/>
+        </p:nvSpPr>
+        <p:spPr>
+          <a:xfrm>
+            <a:off x="940000" y="1300000"/>
+            <a:ext cx="10612000" cy="2600000"/>
+          </a:xfrm>
+          <a:prstGeom prst="rect">
+            <a:avLst/>
+          </a:prstGeom>
+          <a:noFill/>
+        </p:spPr>
+        <p:txBody>
+          <a:bodyPr wrap="square" anchor="ctr">
+            <a:spAutoFit/>
+          </a:bodyPr>
+          <a:lstStyle/>
+          <a:p>
+            <a:pPr>
+              <a:spcAft>
+                <a:spcPts val="1530"/>
+              </a:spcAft>
+            </a:pPr>
+            <a:r>
+              <a:rPr sz="3400" b="1">
+                <a:solidFill>
+                  <a:srgbClr val="1F2A44"/>
+                </a:solidFill>
+                <a:latin typeface="Nunito Sans"/>
+              </a:rPr>
+              <a:t>La madre de una chica: «¿Has hecho los deberes?». La chica: «¿Sabías que el Athletic ha fichado a un delantero nuevo?».</a:t>
+            </a:r>
+          </a:p>
+        </p:txBody>
+      </p:sp>
+      <p:sp>
+        <p:nvSpPr>
+          <p:cNvPr id="5" name="TextBox 4"/>
+          <p:cNvSpPr txBox="1"/>
+          <p:nvPr/>
+        </p:nvSpPr>
+        <p:spPr>
+          <a:xfrm>
+            <a:off x="640000" y="4300000"/>
+            <a:ext cx="10912000" cy="1200000"/>
+          </a:xfrm>
+          <a:prstGeom prst="rect">
+            <a:avLst/>
+          </a:prstGeom>
+          <a:noFill/>
+        </p:spPr>
+        <p:txBody>
+          <a:bodyPr wrap="square">
+            <a:spAutoFit/>
+          </a:bodyPr>
+          <a:lstStyle/>
+          <a:p>
+            <a:pPr>
+              <a:spcAft>
+                <a:spcPts val="1170"/>
+              </a:spcAft>
+            </a:pPr>
+            <a:r>
+              <a:rPr sz="2600" b="0">
+                <a:solidFill>
+                  <a:srgbClr val="4A5568"/>
+                </a:solidFill>
+                <a:latin typeface="Nunito Sans"/>
+              </a:rPr>
+              <a:t>¿Ha contestado la chica? ¿Por qué habrá cambiado de tema?</a:t>
+            </a:r>
+          </a:p>
+        </p:txBody>
+      </p:sp>
+    </p:spTree>
+  </p:cSld>
+  <p:clrMapOvr>
+    <a:masterClrMapping/>
+  </p:clrMapOvr>
+</p:sld>
+</file>
+
+<file path=ppt/slides/slide5.xml><?xml version="1.0" encoding="utf-8"?>
+<p:sld xmlns:a="http://schemas.openxmlformats.org/drawingml/2006/main" xmlns:p="http://schemas.openxmlformats.org/presentationml/2006/main" xmlns:r="http://schemas.openxmlformats.org/officeDocument/2006/relationships">
+  <p:cSld>
+    <p:bg>
+      <p:bgPr>
+        <a:solidFill>
+          <a:srgbClr val="1F2A44"/>
+        </a:solidFill>
+        <a:effectLst/>
+      </p:bgPr>
+    </p:bg>
+    <p:spTree>
+      <p:nvGrpSpPr>
+        <p:cNvPr id="1" name=""/>
+        <p:cNvGrpSpPr/>
+        <p:nvPr/>
+      </p:nvGrpSpPr>
+      <p:grpSpPr/>
+      <p:sp>
+        <p:nvSpPr>
+          <p:cNvPr id="2" name="TextBox 1"/>
+          <p:cNvSpPr txBox="1"/>
+          <p:nvPr/>
+        </p:nvSpPr>
+        <p:spPr>
+          <a:xfrm>
+            <a:off x="640000" y="2300000"/>
+            <a:ext cx="10912000" cy="500000"/>
+          </a:xfrm>
+          <a:prstGeom prst="rect">
+            <a:avLst/>
+          </a:prstGeom>
+          <a:noFill/>
+        </p:spPr>
+        <p:txBody>
+          <a:bodyPr wrap="square">
+            <a:spAutoFit/>
+          </a:bodyPr>
+          <a:lstStyle/>
+          <a:p>
+            <a:pPr>
+              <a:spcAft>
+                <a:spcPts val="810"/>
+              </a:spcAft>
+            </a:pPr>
+            <a:r>
+              <a:rPr sz="1800" b="1">
+                <a:solidFill>
+                  <a:srgbClr val="F4B183"/>
+                </a:solidFill>
+                <a:latin typeface="Nunito Sans"/>
+              </a:rPr>
+              <a:t>BLOQUE 1</a:t>
+            </a:r>
+          </a:p>
+        </p:txBody>
+      </p:sp>
+      <p:sp>
+        <p:nvSpPr>
+          <p:cNvPr id="3" name="TextBox 2"/>
+          <p:cNvSpPr txBox="1"/>
+          <p:nvPr/>
+        </p:nvSpPr>
+        <p:spPr>
+          <a:xfrm>
+            <a:off x="640000" y="2800000"/>
+            <a:ext cx="10912000" cy="800000"/>
+          </a:xfrm>
+          <a:prstGeom prst="rect">
+            <a:avLst/>
+          </a:prstGeom>
+          <a:noFill/>
+        </p:spPr>
+        <p:txBody>
+          <a:bodyPr wrap="square">
+            <a:spAutoFit/>
+          </a:bodyPr>
+          <a:lstStyle/>
+          <a:p>
+            <a:pPr>
+              <a:spcAft>
                 <a:spcPts val="2160"/>
               </a:spcAft>
             </a:pPr>
@@ -8260,7 +6750,1019 @@
                 </a:solidFill>
                 <a:latin typeface="Fredoka"/>
               </a:rPr>
+              <a:t>Qué es la pista falsa</a:t>
+            </a:r>
+          </a:p>
+        </p:txBody>
+      </p:sp>
+    </p:spTree>
+  </p:cSld>
+  <p:clrMapOvr>
+    <a:masterClrMapping/>
+  </p:clrMapOvr>
+</p:sld>
+</file>
+
+<file path=ppt/slides/slide6.xml><?xml version="1.0" encoding="utf-8"?>
+<p:sld xmlns:a="http://schemas.openxmlformats.org/drawingml/2006/main" xmlns:p="http://schemas.openxmlformats.org/presentationml/2006/main" xmlns:r="http://schemas.openxmlformats.org/officeDocument/2006/relationships">
+  <p:cSld>
+    <p:bg>
+      <p:bgPr>
+        <a:solidFill>
+          <a:srgbClr val="FBF7EF"/>
+        </a:solidFill>
+        <a:effectLst/>
+      </p:bgPr>
+    </p:bg>
+    <p:spTree>
+      <p:nvGrpSpPr>
+        <p:cNvPr id="1" name=""/>
+        <p:cNvGrpSpPr/>
+        <p:nvPr/>
+      </p:nvGrpSpPr>
+      <p:grpSpPr/>
+      <p:sp>
+        <p:nvSpPr>
+          <p:cNvPr id="2" name="TextBox 1"/>
+          <p:cNvSpPr txBox="1"/>
+          <p:nvPr/>
+        </p:nvSpPr>
+        <p:spPr>
+          <a:xfrm>
+            <a:off x="640000" y="380000"/>
+            <a:ext cx="10912000" cy="420000"/>
+          </a:xfrm>
+          <a:prstGeom prst="rect">
+            <a:avLst/>
+          </a:prstGeom>
+          <a:noFill/>
+        </p:spPr>
+        <p:txBody>
+          <a:bodyPr wrap="square">
+            <a:spAutoFit/>
+          </a:bodyPr>
+          <a:lstStyle/>
+          <a:p>
+            <a:pPr>
+              <a:spcAft>
+                <a:spcPts val="630"/>
+              </a:spcAft>
+            </a:pPr>
+            <a:r>
+              <a:rPr sz="1400" b="1">
+                <a:solidFill>
+                  <a:srgbClr val="E8793A"/>
+                </a:solidFill>
+                <a:latin typeface="Nunito Sans"/>
+              </a:rPr>
+              <a:t>BLOQUE 1 · QUÉ ES LA PISTA FALSA</a:t>
+            </a:r>
+          </a:p>
+        </p:txBody>
+      </p:sp>
+      <p:sp>
+        <p:nvSpPr>
+          <p:cNvPr id="3" name="TextBox 2"/>
+          <p:cNvSpPr txBox="1"/>
+          <p:nvPr/>
+        </p:nvSpPr>
+        <p:spPr>
+          <a:xfrm>
+            <a:off x="640000" y="760000"/>
+            <a:ext cx="10912000" cy="800000"/>
+          </a:xfrm>
+          <a:prstGeom prst="rect">
+            <a:avLst/>
+          </a:prstGeom>
+          <a:noFill/>
+        </p:spPr>
+        <p:txBody>
+          <a:bodyPr wrap="square">
+            <a:spAutoFit/>
+          </a:bodyPr>
+          <a:lstStyle/>
+          <a:p>
+            <a:pPr>
+              <a:spcAft>
+                <a:spcPts val="1710"/>
+              </a:spcAft>
+            </a:pPr>
+            <a:r>
+              <a:rPr sz="3800" b="1">
+                <a:solidFill>
+                  <a:srgbClr val="1F2A44"/>
+                </a:solidFill>
+                <a:latin typeface="Fredoka"/>
+              </a:rPr>
+              <a:t>La pista falsa</a:t>
+            </a:r>
+          </a:p>
+        </p:txBody>
+      </p:sp>
+      <p:sp>
+        <p:nvSpPr>
+          <p:cNvPr id="4" name="Rectangle 3"/>
+          <p:cNvSpPr/>
+          <p:nvPr/>
+        </p:nvSpPr>
+        <p:spPr>
+          <a:xfrm>
+            <a:off x="640000" y="1650000"/>
+            <a:ext cx="10912000" cy="1150000"/>
+          </a:xfrm>
+          <a:prstGeom prst="rect">
+            <a:avLst/>
+          </a:prstGeom>
+          <a:solidFill>
+            <a:srgbClr val="EAF0F7"/>
+          </a:solidFill>
+          <a:ln>
+            <a:noFill/>
+          </a:ln>
+        </p:spPr>
+        <p:style>
+          <a:lnRef idx="1">
+            <a:schemeClr val="accent1"/>
+          </a:lnRef>
+          <a:fillRef idx="3">
+            <a:schemeClr val="accent1"/>
+          </a:fillRef>
+          <a:effectRef idx="2">
+            <a:schemeClr val="accent1"/>
+          </a:effectRef>
+          <a:fontRef idx="minor">
+            <a:schemeClr val="lt1"/>
+          </a:fontRef>
+        </p:style>
+        <p:txBody>
+          <a:bodyPr rtlCol="0" anchor="ctr"/>
+          <a:lstStyle/>
+          <a:p>
+            <a:pPr algn="ctr"/>
+          </a:p>
+        </p:txBody>
+      </p:sp>
+      <p:sp>
+        <p:nvSpPr>
+          <p:cNvPr id="5" name="TextBox 4"/>
+          <p:cNvSpPr txBox="1"/>
+          <p:nvPr/>
+        </p:nvSpPr>
+        <p:spPr>
+          <a:xfrm>
+            <a:off x="840000" y="1730000"/>
+            <a:ext cx="10512000" cy="1000000"/>
+          </a:xfrm>
+          <a:prstGeom prst="rect">
+            <a:avLst/>
+          </a:prstGeom>
+          <a:noFill/>
+        </p:spPr>
+        <p:txBody>
+          <a:bodyPr wrap="square" anchor="ctr">
+            <a:spAutoFit/>
+          </a:bodyPr>
+          <a:lstStyle/>
+          <a:p>
+            <a:pPr>
+              <a:spcAft>
+                <a:spcPts val="1260"/>
+              </a:spcAft>
+            </a:pPr>
+            <a:r>
+              <a:rPr sz="2800" b="1">
+                <a:solidFill>
+                  <a:srgbClr val="1F2A44"/>
+                </a:solidFill>
+                <a:latin typeface="Nunito Sans"/>
+              </a:rPr>
+              <a:t>Cambiar de tema para no responder a lo que se pregunta o se discute.</a:t>
+            </a:r>
+          </a:p>
+        </p:txBody>
+      </p:sp>
+      <p:sp>
+        <p:nvSpPr>
+          <p:cNvPr id="6" name="TextBox 5"/>
+          <p:cNvSpPr txBox="1"/>
+          <p:nvPr/>
+        </p:nvSpPr>
+        <p:spPr>
+          <a:xfrm>
+            <a:off x="640000" y="3000000"/>
+            <a:ext cx="10912000" cy="3458000"/>
+          </a:xfrm>
+          <a:prstGeom prst="rect">
+            <a:avLst/>
+          </a:prstGeom>
+          <a:noFill/>
+        </p:spPr>
+        <p:txBody>
+          <a:bodyPr wrap="square">
+            <a:spAutoFit/>
+          </a:bodyPr>
+          <a:lstStyle/>
+          <a:p>
+            <a:pPr>
+              <a:spcAft>
+                <a:spcPts val="1260"/>
+              </a:spcAft>
+            </a:pPr>
+            <a:r>
+              <a:rPr sz="2800" b="1">
+                <a:solidFill>
+                  <a:srgbClr val="E8793A"/>
+                </a:solidFill>
+                <a:latin typeface="Nunito Sans"/>
+              </a:rPr>
+              <a:t>• </a:t>
+            </a:r>
+            <a:r>
+              <a:rPr sz="2800" b="0">
+                <a:solidFill>
+                  <a:srgbClr val="1F2A44"/>
+                </a:solidFill>
+                <a:latin typeface="Nunito Sans"/>
+              </a:rPr>
+              <a:t>El nuevo tema suele ser más </a:t>
+            </a:r>
+            <a:r>
+              <a:rPr sz="2800" b="1">
+                <a:solidFill>
+                  <a:srgbClr val="1F2A44"/>
+                </a:solidFill>
+                <a:latin typeface="Nunito Sans"/>
+              </a:rPr>
+              <a:t>interesante</a:t>
+            </a:r>
+          </a:p>
+          <a:p>
+            <a:pPr>
+              <a:spcAft>
+                <a:spcPts val="1260"/>
+              </a:spcAft>
+            </a:pPr>
+            <a:r>
+              <a:rPr sz="2800" b="1">
+                <a:solidFill>
+                  <a:srgbClr val="E8793A"/>
+                </a:solidFill>
+                <a:latin typeface="Nunito Sans"/>
+              </a:rPr>
+              <a:t>• </a:t>
+            </a:r>
+            <a:r>
+              <a:rPr sz="2800" b="0">
+                <a:solidFill>
+                  <a:srgbClr val="1F2A44"/>
+                </a:solidFill>
+                <a:latin typeface="Nunito Sans"/>
+              </a:rPr>
+              <a:t>La pregunta de verdad se </a:t>
+            </a:r>
+            <a:r>
+              <a:rPr sz="2800" b="1">
+                <a:solidFill>
+                  <a:srgbClr val="1F2A44"/>
+                </a:solidFill>
+                <a:latin typeface="Nunito Sans"/>
+              </a:rPr>
+              <a:t>olvida</a:t>
+            </a:r>
+          </a:p>
+          <a:p>
+            <a:pPr>
+              <a:spcAft>
+                <a:spcPts val="1260"/>
+              </a:spcAft>
+            </a:pPr>
+            <a:r>
+              <a:rPr sz="2800" b="1">
+                <a:solidFill>
+                  <a:srgbClr val="E8793A"/>
+                </a:solidFill>
+                <a:latin typeface="Nunito Sans"/>
+              </a:rPr>
+              <a:t>• </a:t>
+            </a:r>
+            <a:r>
+              <a:rPr sz="2800" b="0">
+                <a:solidFill>
+                  <a:srgbClr val="1F2A44"/>
+                </a:solidFill>
+                <a:latin typeface="Nunito Sans"/>
+              </a:rPr>
+              <a:t>En inglés, </a:t>
+            </a:r>
+            <a:r>
+              <a:rPr sz="2800" b="1">
+                <a:solidFill>
+                  <a:srgbClr val="1F2A44"/>
+                </a:solidFill>
+                <a:latin typeface="Nunito Sans"/>
+              </a:rPr>
+              <a:t>red herring</a:t>
+            </a:r>
+            <a:r>
+              <a:rPr sz="2800" b="0">
+                <a:solidFill>
+                  <a:srgbClr val="1F2A44"/>
+                </a:solidFill>
+                <a:latin typeface="Nunito Sans"/>
+              </a:rPr>
+              <a:t>: se cuenta que despistaba a los perros</a:t>
+            </a:r>
+          </a:p>
+          <a:p>
+            <a:pPr>
+              <a:spcAft>
+                <a:spcPts val="1260"/>
+              </a:spcAft>
+            </a:pPr>
+            <a:r>
+              <a:rPr sz="2800" b="1">
+                <a:solidFill>
+                  <a:srgbClr val="E8793A"/>
+                </a:solidFill>
+                <a:latin typeface="Nunito Sans"/>
+              </a:rPr>
+              <a:t>• </a:t>
+            </a:r>
+            <a:r>
+              <a:rPr sz="2800" b="0">
+                <a:solidFill>
+                  <a:srgbClr val="1F2A44"/>
+                </a:solidFill>
+                <a:latin typeface="Nunito Sans"/>
+              </a:rPr>
+              <a:t>Pregunta: </a:t>
+            </a:r>
+            <a:r>
+              <a:rPr sz="2800" b="1">
+                <a:solidFill>
+                  <a:srgbClr val="1F2A44"/>
+                </a:solidFill>
+                <a:latin typeface="Nunito Sans"/>
+              </a:rPr>
+              <a:t>¿qué tiene que ver esto con lo que hablábamos?</a:t>
+            </a:r>
+          </a:p>
+        </p:txBody>
+      </p:sp>
+    </p:spTree>
+  </p:cSld>
+  <p:clrMapOvr>
+    <a:masterClrMapping/>
+  </p:clrMapOvr>
+</p:sld>
+</file>
+
+<file path=ppt/slides/slide7.xml><?xml version="1.0" encoding="utf-8"?>
+<p:sld xmlns:a="http://schemas.openxmlformats.org/drawingml/2006/main" xmlns:p="http://schemas.openxmlformats.org/presentationml/2006/main" xmlns:r="http://schemas.openxmlformats.org/officeDocument/2006/relationships">
+  <p:cSld>
+    <p:bg>
+      <p:bgPr>
+        <a:solidFill>
+          <a:srgbClr val="FBF7EF"/>
+        </a:solidFill>
+        <a:effectLst/>
+      </p:bgPr>
+    </p:bg>
+    <p:spTree>
+      <p:nvGrpSpPr>
+        <p:cNvPr id="1" name=""/>
+        <p:cNvGrpSpPr/>
+        <p:nvPr/>
+      </p:nvGrpSpPr>
+      <p:grpSpPr/>
+      <p:sp>
+        <p:nvSpPr>
+          <p:cNvPr id="2" name="TextBox 1"/>
+          <p:cNvSpPr txBox="1"/>
+          <p:nvPr/>
+        </p:nvSpPr>
+        <p:spPr>
+          <a:xfrm>
+            <a:off x="640000" y="380000"/>
+            <a:ext cx="10912000" cy="420000"/>
+          </a:xfrm>
+          <a:prstGeom prst="rect">
+            <a:avLst/>
+          </a:prstGeom>
+          <a:noFill/>
+        </p:spPr>
+        <p:txBody>
+          <a:bodyPr wrap="square">
+            <a:spAutoFit/>
+          </a:bodyPr>
+          <a:lstStyle/>
+          <a:p>
+            <a:pPr>
+              <a:spcAft>
+                <a:spcPts val="630"/>
+              </a:spcAft>
+            </a:pPr>
+            <a:r>
+              <a:rPr sz="1400" b="1">
+                <a:solidFill>
+                  <a:srgbClr val="E8793A"/>
+                </a:solidFill>
+                <a:latin typeface="Nunito Sans"/>
+              </a:rPr>
+              <a:t>BLOQUE 1 · QUÉ ES LA PISTA FALSA</a:t>
+            </a:r>
+          </a:p>
+        </p:txBody>
+      </p:sp>
+      <p:sp>
+        <p:nvSpPr>
+          <p:cNvPr id="3" name="TextBox 2"/>
+          <p:cNvSpPr txBox="1"/>
+          <p:nvPr/>
+        </p:nvSpPr>
+        <p:spPr>
+          <a:xfrm>
+            <a:off x="640000" y="760000"/>
+            <a:ext cx="10912000" cy="800000"/>
+          </a:xfrm>
+          <a:prstGeom prst="rect">
+            <a:avLst/>
+          </a:prstGeom>
+          <a:noFill/>
+        </p:spPr>
+        <p:txBody>
+          <a:bodyPr wrap="square">
+            <a:spAutoFit/>
+          </a:bodyPr>
+          <a:lstStyle/>
+          <a:p>
+            <a:pPr>
+              <a:spcAft>
+                <a:spcPts val="1710"/>
+              </a:spcAft>
+            </a:pPr>
+            <a:r>
+              <a:rPr sz="3800" b="1">
+                <a:solidFill>
+                  <a:srgbClr val="1F2A44"/>
+                </a:solidFill>
+                <a:latin typeface="Fredoka"/>
+              </a:rPr>
+              <a:t>Cómo reconocerla</a:t>
+            </a:r>
+          </a:p>
+        </p:txBody>
+      </p:sp>
+      <p:sp>
+        <p:nvSpPr>
+          <p:cNvPr id="4" name="TextBox 3"/>
+          <p:cNvSpPr txBox="1"/>
+          <p:nvPr/>
+        </p:nvSpPr>
+        <p:spPr>
+          <a:xfrm>
+            <a:off x="640000" y="1650000"/>
+            <a:ext cx="10912000" cy="4808000"/>
+          </a:xfrm>
+          <a:prstGeom prst="rect">
+            <a:avLst/>
+          </a:prstGeom>
+          <a:noFill/>
+        </p:spPr>
+        <p:txBody>
+          <a:bodyPr wrap="square">
+            <a:spAutoFit/>
+          </a:bodyPr>
+          <a:lstStyle/>
+          <a:p>
+            <a:pPr>
+              <a:spcAft>
+                <a:spcPts val="1260"/>
+              </a:spcAft>
+            </a:pPr>
+            <a:r>
+              <a:rPr sz="2800" b="1">
+                <a:solidFill>
+                  <a:srgbClr val="E8793A"/>
+                </a:solidFill>
+                <a:latin typeface="Nunito Sans"/>
+              </a:rPr>
+              <a:t>• </a:t>
+            </a:r>
+            <a:r>
+              <a:rPr sz="2800" b="0">
+                <a:solidFill>
+                  <a:srgbClr val="1F2A44"/>
+                </a:solidFill>
+                <a:latin typeface="Nunito Sans"/>
+              </a:rPr>
+              <a:t>La respuesta habla de </a:t>
+            </a:r>
+            <a:r>
+              <a:rPr sz="2800" b="1">
+                <a:solidFill>
+                  <a:srgbClr val="1F2A44"/>
+                </a:solidFill>
+                <a:latin typeface="Nunito Sans"/>
+              </a:rPr>
+              <a:t>otra cosa</a:t>
+            </a:r>
+          </a:p>
+          <a:p>
+            <a:pPr>
+              <a:spcAft>
+                <a:spcPts val="1260"/>
+              </a:spcAft>
+            </a:pPr>
+            <a:r>
+              <a:rPr sz="2800" b="1">
+                <a:solidFill>
+                  <a:srgbClr val="E8793A"/>
+                </a:solidFill>
+                <a:latin typeface="Nunito Sans"/>
+              </a:rPr>
+              <a:t>• </a:t>
+            </a:r>
+            <a:r>
+              <a:rPr sz="2800" b="0">
+                <a:solidFill>
+                  <a:srgbClr val="1F2A44"/>
+                </a:solidFill>
+                <a:latin typeface="Nunito Sans"/>
+              </a:rPr>
+              <a:t>Suele empezar con «ya, pero…» o «¿y qué me dices de…?»</a:t>
+            </a:r>
+          </a:p>
+          <a:p>
+            <a:pPr>
+              <a:spcAft>
+                <a:spcPts val="1260"/>
+              </a:spcAft>
+            </a:pPr>
+            <a:r>
+              <a:rPr sz="2800" b="1">
+                <a:solidFill>
+                  <a:srgbClr val="E8793A"/>
+                </a:solidFill>
+                <a:latin typeface="Nunito Sans"/>
+              </a:rPr>
+              <a:t>• </a:t>
+            </a:r>
+            <a:r>
+              <a:rPr sz="2800" b="0">
+                <a:solidFill>
+                  <a:srgbClr val="1F2A44"/>
+                </a:solidFill>
+                <a:latin typeface="Nunito Sans"/>
+              </a:rPr>
+              <a:t>Al final nadie recuerda la pregunta del principio</a:t>
+            </a:r>
+          </a:p>
+          <a:p>
+            <a:pPr>
+              <a:spcAft>
+                <a:spcPts val="1260"/>
+              </a:spcAft>
+            </a:pPr>
+            <a:r>
+              <a:rPr sz="2800" b="1">
+                <a:solidFill>
+                  <a:srgbClr val="E8793A"/>
+                </a:solidFill>
+                <a:latin typeface="Nunito Sans"/>
+              </a:rPr>
+              <a:t>• </a:t>
+            </a:r>
+            <a:r>
+              <a:rPr sz="2800" b="0">
+                <a:solidFill>
+                  <a:srgbClr val="1F2A44"/>
+                </a:solidFill>
+                <a:latin typeface="Nunito Sans"/>
+              </a:rPr>
+              <a:t>No es mentir: es </a:t>
+            </a:r>
+            <a:r>
+              <a:rPr sz="2800" b="1">
+                <a:solidFill>
+                  <a:srgbClr val="1F2A44"/>
+                </a:solidFill>
+                <a:latin typeface="Nunito Sans"/>
+              </a:rPr>
+              <a:t>esquivar</a:t>
+            </a:r>
+          </a:p>
+        </p:txBody>
+      </p:sp>
+    </p:spTree>
+  </p:cSld>
+  <p:clrMapOvr>
+    <a:masterClrMapping/>
+  </p:clrMapOvr>
+</p:sld>
+</file>
+
+<file path=ppt/slides/slide8.xml><?xml version="1.0" encoding="utf-8"?>
+<p:sld xmlns:a="http://schemas.openxmlformats.org/drawingml/2006/main" xmlns:p="http://schemas.openxmlformats.org/presentationml/2006/main" xmlns:r="http://schemas.openxmlformats.org/officeDocument/2006/relationships">
+  <p:cSld>
+    <p:bg>
+      <p:bgPr>
+        <a:solidFill>
+          <a:srgbClr val="1F2A44"/>
+        </a:solidFill>
+        <a:effectLst/>
+      </p:bgPr>
+    </p:bg>
+    <p:spTree>
+      <p:nvGrpSpPr>
+        <p:cNvPr id="1" name=""/>
+        <p:cNvGrpSpPr/>
+        <p:nvPr/>
+      </p:nvGrpSpPr>
+      <p:grpSpPr/>
+      <p:sp>
+        <p:nvSpPr>
+          <p:cNvPr id="2" name="TextBox 1"/>
+          <p:cNvSpPr txBox="1"/>
+          <p:nvPr/>
+        </p:nvSpPr>
+        <p:spPr>
+          <a:xfrm>
+            <a:off x="640000" y="2300000"/>
+            <a:ext cx="10912000" cy="500000"/>
+          </a:xfrm>
+          <a:prstGeom prst="rect">
+            <a:avLst/>
+          </a:prstGeom>
+          <a:noFill/>
+        </p:spPr>
+        <p:txBody>
+          <a:bodyPr wrap="square">
+            <a:spAutoFit/>
+          </a:bodyPr>
+          <a:lstStyle/>
+          <a:p>
+            <a:pPr>
+              <a:spcAft>
+                <a:spcPts val="810"/>
+              </a:spcAft>
+            </a:pPr>
+            <a:r>
+              <a:rPr sz="1800" b="1">
+                <a:solidFill>
+                  <a:srgbClr val="F4B183"/>
+                </a:solidFill>
+                <a:latin typeface="Nunito Sans"/>
+              </a:rPr>
+              <a:t>BLOQUE 2</a:t>
+            </a:r>
+          </a:p>
+        </p:txBody>
+      </p:sp>
+      <p:sp>
+        <p:nvSpPr>
+          <p:cNvPr id="3" name="TextBox 2"/>
+          <p:cNvSpPr txBox="1"/>
+          <p:nvPr/>
+        </p:nvSpPr>
+        <p:spPr>
+          <a:xfrm>
+            <a:off x="640000" y="2800000"/>
+            <a:ext cx="10912000" cy="800000"/>
+          </a:xfrm>
+          <a:prstGeom prst="rect">
+            <a:avLst/>
+          </a:prstGeom>
+          <a:noFill/>
+        </p:spPr>
+        <p:txBody>
+          <a:bodyPr wrap="square">
+            <a:spAutoFit/>
+          </a:bodyPr>
+          <a:lstStyle/>
+          <a:p>
+            <a:pPr>
+              <a:spcAft>
+                <a:spcPts val="2160"/>
+              </a:spcAft>
+            </a:pPr>
+            <a:r>
+              <a:rPr sz="4800" b="1">
+                <a:solidFill>
+                  <a:srgbClr val="FBF7EF"/>
+                </a:solidFill>
+                <a:latin typeface="Fredoka"/>
+              </a:rPr>
               <a:t>Casos resueltos</a:t>
+            </a:r>
+          </a:p>
+        </p:txBody>
+      </p:sp>
+    </p:spTree>
+  </p:cSld>
+  <p:clrMapOvr>
+    <a:masterClrMapping/>
+  </p:clrMapOvr>
+</p:sld>
+</file>
+
+<file path=ppt/slides/slide9.xml><?xml version="1.0" encoding="utf-8"?>
+<p:sld xmlns:a="http://schemas.openxmlformats.org/drawingml/2006/main" xmlns:p="http://schemas.openxmlformats.org/presentationml/2006/main" xmlns:r="http://schemas.openxmlformats.org/officeDocument/2006/relationships">
+  <p:cSld>
+    <p:bg>
+      <p:bgPr>
+        <a:solidFill>
+          <a:srgbClr val="FBF7EF"/>
+        </a:solidFill>
+        <a:effectLst/>
+      </p:bgPr>
+    </p:bg>
+    <p:spTree>
+      <p:nvGrpSpPr>
+        <p:cNvPr id="1" name=""/>
+        <p:cNvGrpSpPr/>
+        <p:nvPr/>
+      </p:nvGrpSpPr>
+      <p:grpSpPr/>
+      <p:sp>
+        <p:nvSpPr>
+          <p:cNvPr id="2" name="TextBox 1"/>
+          <p:cNvSpPr txBox="1"/>
+          <p:nvPr/>
+        </p:nvSpPr>
+        <p:spPr>
+          <a:xfrm>
+            <a:off x="640000" y="380000"/>
+            <a:ext cx="10912000" cy="420000"/>
+          </a:xfrm>
+          <a:prstGeom prst="rect">
+            <a:avLst/>
+          </a:prstGeom>
+          <a:noFill/>
+        </p:spPr>
+        <p:txBody>
+          <a:bodyPr wrap="square">
+            <a:spAutoFit/>
+          </a:bodyPr>
+          <a:lstStyle/>
+          <a:p>
+            <a:pPr>
+              <a:spcAft>
+                <a:spcPts val="630"/>
+              </a:spcAft>
+            </a:pPr>
+            <a:r>
+              <a:rPr sz="1400" b="1">
+                <a:solidFill>
+                  <a:srgbClr val="E8793A"/>
+                </a:solidFill>
+                <a:latin typeface="Nunito Sans"/>
+              </a:rPr>
+              <a:t>BLOQUE 2 · CASOS RESUELTOS</a:t>
+            </a:r>
+          </a:p>
+        </p:txBody>
+      </p:sp>
+      <p:sp>
+        <p:nvSpPr>
+          <p:cNvPr id="3" name="TextBox 2"/>
+          <p:cNvSpPr txBox="1"/>
+          <p:nvPr/>
+        </p:nvSpPr>
+        <p:spPr>
+          <a:xfrm>
+            <a:off x="640000" y="760000"/>
+            <a:ext cx="10912000" cy="800000"/>
+          </a:xfrm>
+          <a:prstGeom prst="rect">
+            <a:avLst/>
+          </a:prstGeom>
+          <a:noFill/>
+        </p:spPr>
+        <p:txBody>
+          <a:bodyPr wrap="square">
+            <a:spAutoFit/>
+          </a:bodyPr>
+          <a:lstStyle/>
+          <a:p>
+            <a:pPr>
+              <a:spcAft>
+                <a:spcPts val="1710"/>
+              </a:spcAft>
+            </a:pPr>
+            <a:r>
+              <a:rPr sz="3800" b="1">
+                <a:solidFill>
+                  <a:srgbClr val="1F2A44"/>
+                </a:solidFill>
+                <a:latin typeface="Fredoka"/>
+              </a:rPr>
+              <a:t>Caso 1 · Los deberes</a:t>
+            </a:r>
+          </a:p>
+        </p:txBody>
+      </p:sp>
+      <p:sp>
+        <p:nvSpPr>
+          <p:cNvPr id="4" name="Rectangle 3"/>
+          <p:cNvSpPr/>
+          <p:nvPr/>
+        </p:nvSpPr>
+        <p:spPr>
+          <a:xfrm>
+            <a:off x="640000" y="1600000"/>
+            <a:ext cx="10912000" cy="1100000"/>
+          </a:xfrm>
+          <a:prstGeom prst="rect">
+            <a:avLst/>
+          </a:prstGeom>
+          <a:solidFill>
+            <a:srgbClr val="FFFFFF"/>
+          </a:solidFill>
+          <a:ln>
+            <a:noFill/>
+          </a:ln>
+        </p:spPr>
+        <p:style>
+          <a:lnRef idx="1">
+            <a:schemeClr val="accent1"/>
+          </a:lnRef>
+          <a:fillRef idx="3">
+            <a:schemeClr val="accent1"/>
+          </a:fillRef>
+          <a:effectRef idx="2">
+            <a:schemeClr val="accent1"/>
+          </a:effectRef>
+          <a:fontRef idx="minor">
+            <a:schemeClr val="lt1"/>
+          </a:fontRef>
+        </p:style>
+        <p:txBody>
+          <a:bodyPr rtlCol="0" anchor="ctr"/>
+          <a:lstStyle/>
+          <a:p>
+            <a:pPr algn="ctr"/>
+          </a:p>
+        </p:txBody>
+      </p:sp>
+      <p:sp>
+        <p:nvSpPr>
+          <p:cNvPr id="5" name="TextBox 4"/>
+          <p:cNvSpPr txBox="1"/>
+          <p:nvPr/>
+        </p:nvSpPr>
+        <p:spPr>
+          <a:xfrm>
+            <a:off x="840000" y="1650000"/>
+            <a:ext cx="10512000" cy="1000000"/>
+          </a:xfrm>
+          <a:prstGeom prst="rect">
+            <a:avLst/>
+          </a:prstGeom>
+          <a:noFill/>
+        </p:spPr>
+        <p:txBody>
+          <a:bodyPr wrap="square" anchor="ctr">
+            <a:spAutoFit/>
+          </a:bodyPr>
+          <a:lstStyle/>
+          <a:p>
+            <a:pPr>
+              <a:spcAft>
+                <a:spcPts val="1170"/>
+              </a:spcAft>
+            </a:pPr>
+            <a:r>
+              <a:rPr sz="2600" b="1">
+                <a:solidFill>
+                  <a:srgbClr val="1F2A44"/>
+                </a:solidFill>
+                <a:latin typeface="Nunito Sans"/>
+              </a:rPr>
+              <a:t>La madre de una chica: «¿Has hecho los deberes?». La chica: «¿Sabías que el Athletic ha fichado a un delantero nuevo?».</a:t>
+            </a:r>
+          </a:p>
+        </p:txBody>
+      </p:sp>
+      <p:sp>
+        <p:nvSpPr>
+          <p:cNvPr id="6" name="TextBox 5"/>
+          <p:cNvSpPr txBox="1"/>
+          <p:nvPr/>
+        </p:nvSpPr>
+        <p:spPr>
+          <a:xfrm>
+            <a:off x="640000" y="2900000"/>
+            <a:ext cx="10912000" cy="3500000"/>
+          </a:xfrm>
+          <a:prstGeom prst="rect">
+            <a:avLst/>
+          </a:prstGeom>
+          <a:noFill/>
+        </p:spPr>
+        <p:txBody>
+          <a:bodyPr wrap="square">
+            <a:spAutoFit/>
+          </a:bodyPr>
+          <a:lstStyle/>
+          <a:p>
+            <a:pPr>
+              <a:spcAft>
+                <a:spcPts val="1080"/>
+              </a:spcAft>
+            </a:pPr>
+            <a:r>
+              <a:rPr sz="2400" b="1">
+                <a:solidFill>
+                  <a:srgbClr val="E8793A"/>
+                </a:solidFill>
+                <a:latin typeface="Nunito Sans"/>
+              </a:rPr>
+              <a:t>1. </a:t>
+            </a:r>
+            <a:r>
+              <a:rPr sz="2400" b="0">
+                <a:solidFill>
+                  <a:srgbClr val="1F2A44"/>
+                </a:solidFill>
+                <a:latin typeface="Nunito Sans"/>
+              </a:rPr>
+              <a:t>¿Qué le preguntan? Si ha hecho los deberes.</a:t>
+            </a:r>
+          </a:p>
+          <a:p>
+            <a:pPr>
+              <a:spcAft>
+                <a:spcPts val="1080"/>
+              </a:spcAft>
+            </a:pPr>
+            <a:r>
+              <a:rPr sz="2400" b="1">
+                <a:solidFill>
+                  <a:srgbClr val="E8793A"/>
+                </a:solidFill>
+                <a:latin typeface="Nunito Sans"/>
+              </a:rPr>
+              <a:t>2. </a:t>
+            </a:r>
+            <a:r>
+              <a:rPr sz="2400" b="0">
+                <a:solidFill>
+                  <a:srgbClr val="1F2A44"/>
+                </a:solidFill>
+                <a:latin typeface="Nunito Sans"/>
+              </a:rPr>
+              <a:t>¿Qué responde? Un fichaje del Athletic.</a:t>
+            </a:r>
+          </a:p>
+          <a:p>
+            <a:pPr>
+              <a:spcAft>
+                <a:spcPts val="1080"/>
+              </a:spcAft>
+            </a:pPr>
+            <a:r>
+              <a:rPr sz="2400" b="1">
+                <a:solidFill>
+                  <a:srgbClr val="E8793A"/>
+                </a:solidFill>
+                <a:latin typeface="Nunito Sans"/>
+              </a:rPr>
+              <a:t>3. </a:t>
+            </a:r>
+            <a:r>
+              <a:rPr sz="2400" b="0">
+                <a:solidFill>
+                  <a:srgbClr val="1F2A44"/>
+                </a:solidFill>
+                <a:latin typeface="Nunito Sans"/>
+              </a:rPr>
+              <a:t>¿Tiene que ver? No: es otro tema, más interesante.</a:t>
+            </a:r>
+          </a:p>
+          <a:p>
+            <a:pPr>
+              <a:spcAft>
+                <a:spcPts val="1080"/>
+              </a:spcAft>
+            </a:pPr>
+            <a:r>
+              <a:rPr sz="2400" b="1">
+                <a:solidFill>
+                  <a:srgbClr val="E8793A"/>
+                </a:solidFill>
+                <a:latin typeface="Nunito Sans"/>
+              </a:rPr>
+              <a:t>4. </a:t>
+            </a:r>
+            <a:r>
+              <a:rPr sz="2400" b="0">
+                <a:solidFill>
+                  <a:srgbClr val="1F2A44"/>
+                </a:solidFill>
+                <a:latin typeface="Nunito Sans"/>
+              </a:rPr>
+              <a:t>Conclusión: pista falsa. La pregunta sigue sin respuesta.</a:t>
             </a:r>
           </a:p>
         </p:txBody>
